--- a/Docs/四轴飞控项目分享.pptx
+++ b/Docs/四轴飞控项目分享.pptx
@@ -589,7 +589,7 @@
           <a:lstStyle/>
           <a:p>
             <a:r>
-              <a:t>串级PID是本项目与公司方向(运动控制)最对口的部分。讲清'内环快、外环慢'的带宽分离原则;三个工程细节都是真实修过的坑,能体现深度。面试必问抗饱和:clamping vs back-calculation。</a:t>
+              <a:t>这页展示'从需求反推传感器方案'的思路:想要定高→没有高度计→退而求其次用加速度。坦诚说明局限(长时间悬停会缓慢漂),体现工程权衡。</a:t>
             </a:r>
           </a:p>
         </p:txBody>
@@ -659,7 +659,7 @@
           <a:lstStyle/>
           <a:p>
             <a:r>
-              <a:t>布局图讲一遍符号推导,证明矩阵不是抄的。共模/差模正交性为下一页'三环协同'做铺垫。最后一行红字是安全意识的体现,面试官喜欢。</a:t>
+              <a:t>用'现在/过去/未来'三个词讲透PID:P看现在,I记旧账,D预判趋势。副作用列一定要讲——工程就是取舍。整定顺序是实操经验,台架调参会按这个来。右下角两个细节直接衔接下一页项目实现。</a:t>
             </a:r>
           </a:p>
         </p:txBody>
@@ -729,7 +729,7 @@
           <a:lstStyle/>
           <a:p>
             <a:r>
-              <a:t>用'油门归属权'一句话讲透状态机:FOLLOW归人,HOVER归az环,LANDING归状态机;姿态永远归PID。讲清松杆3秒自动降落是刻意设计(无高度计不敢久悬)。</a:t>
+              <a:t>串级PID是本项目与公司方向(运动控制)最对口的部分。讲清'内环快、外环慢'的带宽分离原则;三个工程细节都是真实修过的坑,能体现深度。面试必问抗饱和:clamping vs back-calculation。</a:t>
             </a:r>
           </a:p>
         </p:txBody>
@@ -799,7 +799,7 @@
           <a:lstStyle/>
           <a:p>
             <a:r>
-              <a:t>安全链是飞控区别于普通嵌入式项目的地方:每个保护都有'为什么'——NaN会绕过所有if、单帧噪声不能停电机、半空断电比缓降危险。讲两个真实案例更打动人:NaN那条和姿态丢失那条。</a:t>
+              <a:t>布局图讲一遍符号推导,证明矩阵不是抄的。共模/差模正交性为下一页'三环协同'做铺垫。最后一行红字是安全意识的体现,面试官喜欢。</a:t>
             </a:r>
           </a:p>
         </p:txBody>
@@ -869,7 +869,7 @@
           <a:lstStyle/>
           <a:p>
             <a:r>
-              <a:t>这页回答最常被问的'环之间打架吗':串级部分是故意耦合;az环靠共模/差模正交+慢一个数量级(时间尺度分离)实现工程解耦;残余三条耦合要能说出来,尤其②饱和,是真风险。</a:t>
+              <a:t>用'油门归属权'一句话讲透状态机:FOLLOW归人,HOVER归az环,LANDING归状态机;姿态永远归PID。讲清松杆3秒自动降落是刻意设计(无高度计不敢久悬)。</a:t>
             </a:r>
           </a:p>
         </p:txBody>
@@ -939,7 +939,7 @@
           <a:lstStyle/>
           <a:p>
             <a:r>
-              <a:t>把协议设计与自己的另一个项目对比,展示'不是只会一种套路'。逐字节状态机+重同步是嵌入式通用功,面试可展开讲粘包/断帧怎么处理。</a:t>
+              <a:t>安全链是飞控区别于普通嵌入式项目的地方:每个保护都有'为什么'——NaN会绕过所有if、单帧噪声不能停电机、半空断电比缓降危险。讲两个真实案例更打动人:NaN那条和姿态丢失那条。</a:t>
             </a:r>
           </a:p>
         </p:txBody>
@@ -1009,7 +1009,7 @@
           <a:lstStyle/>
           <a:p>
             <a:r>
-              <a:t>这页是与同龄人拉开差距的地方:飞控写单元测试很少见。'诚实边界'要主动讲——哪些验证过了,哪些没有,一句话带过,反而建立信任。</a:t>
+              <a:t>这页回答最常被问的'环之间打架吗':串级部分是故意耦合;az环靠共模/差模正交+慢一个数量级(时间尺度分离)实现工程解耦;残余三条耦合要能说出来,尤其②饱和,是真风险。</a:t>
             </a:r>
           </a:p>
         </p:txBody>
@@ -1079,7 +1079,7 @@
           <a:lstStyle/>
           <a:p>
             <a:r>
-              <a:t>每个坑用'现象→根因→修复'三段讲,15-30秒一个。这些全是真实修复,代码里有注释和对应测试用例,经得起追问。坑2最能展示RTOS+HAL底层理解。</a:t>
+              <a:t>把协议设计与自己的另一个项目对比,展示'不是只会一种套路'。逐字节状态机+重同步是嵌入式通用功,面试可展开讲粘包/断帧怎么处理。</a:t>
             </a:r>
           </a:p>
         </p:txBody>
@@ -1149,7 +1149,7 @@
           <a:lstStyle/>
           <a:p>
             <a:r>
-              <a:t>收尾:路线图表明'没飞'是排期问题不是能力问题。主动引导提问方向:'欢迎大家问控制细节或测试方法'。</a:t>
+              <a:t>结尾停顿两秒,主动邀请提问:'姿态解算和控制两块都可以往深了聊'。</a:t>
             </a:r>
           </a:p>
         </p:txBody>
@@ -1219,7 +1219,7 @@
           <a:lstStyle/>
           <a:p>
             <a:r>
-              <a:t>快速过一遍结构,告诉大家重点在第3、4部分(算法与逻辑),第6部分的踩坑故事最有意思。</a:t>
+              <a:t>快速过一遍结构,告诉大家本次重点是第3、4部分:姿态解算与控制算法的原理。</a:t>
             </a:r>
           </a:p>
         </p:txBody>
@@ -1639,7 +1639,7 @@
           <a:lstStyle/>
           <a:p>
             <a:r>
-              <a:t>本页是算法核心:按①→④讲一遍闭环。类比:陀螺是'自信但会迷路的人',加计是'记不清过程但知道家在哪的人'。面试常问:与卡尔曼比较——Mahony计算量小、无需噪声模型,精度够用;EKF更优但M4上开销大。</a:t>
+              <a:t>先讲'为什么必须解算':传感器不直接给姿态。两条途径各有软肋,融合是必然——为下一页Mahony做铺垫。三种表示的对比表回答'为什么用四元数':万向节锁用一句大白话解释(pitch抬到90度时,再转roll和yaw效果一样,丢了一个自由度)。</a:t>
             </a:r>
           </a:p>
         </p:txBody>
@@ -1709,7 +1709,7 @@
           <a:lstStyle/>
           <a:p>
             <a:r>
-              <a:t>这页展示'从需求反推传感器方案'的思路:想要定高→没有高度计→退而求其次用加速度。坦诚说明局限(长时间悬停会缓慢漂),体现工程权衡。</a:t>
+              <a:t>本页是算法核心:按①→④讲一遍闭环。类比:陀螺是'自信但会迷路的人',加计是'记不清过程但知道家在哪的人'。面试常问:与卡尔曼比较——Mahony计算量小、无需噪声模型,精度够用;EKF更优但M4上开销大。</a:t>
             </a:r>
           </a:p>
         </p:txBody>
@@ -5077,7 +5077,7 @@
                 <a:latin typeface="微软雅黑"/>
                 <a:ea typeface="微软雅黑"/>
               </a:rPr>
-              <a:t>模块⑤ 串级 PID 控制器</a:t>
+              <a:t>模块④ 垂直加速度 az</a:t>
             </a:r>
             <a:r>
               <a:rPr sz="1400" b="0" i="0">
@@ -5087,7 +5087,7 @@
                 <a:latin typeface="微软雅黑"/>
                 <a:ea typeface="微软雅黑"/>
               </a:rPr>
-              <a:t>   角度环 P + 角速度环 PID</a:t>
+              <a:t>   旋转矩阵去重力</a:t>
             </a:r>
           </a:p>
         </p:txBody>
@@ -5128,6 +5128,1751 @@
                 <a:ea typeface="微软雅黑"/>
               </a:rPr>
               <a:t>09</a:t>
+            </a:r>
+          </a:p>
+        </p:txBody>
+      </p:sp>
+      <p:sp>
+        <p:nvSpPr>
+          <p:cNvPr id="5" name="Rectangle 4"/>
+          <p:cNvSpPr/>
+          <p:nvPr/>
+        </p:nvSpPr>
+        <p:spPr>
+          <a:xfrm>
+            <a:off x="0" y="868680"/>
+            <a:ext cx="12191695" cy="41148"/>
+          </a:xfrm>
+          <a:prstGeom prst="rect">
+            <a:avLst/>
+          </a:prstGeom>
+          <a:solidFill>
+            <a:srgbClr val="ED7D31"/>
+          </a:solidFill>
+          <a:ln>
+            <a:noFill/>
+          </a:ln>
+          <a:effectLst/>
+        </p:spPr>
+        <p:style>
+          <a:lnRef idx="1">
+            <a:schemeClr val="accent1"/>
+          </a:lnRef>
+          <a:fillRef idx="3">
+            <a:schemeClr val="accent1"/>
+          </a:fillRef>
+          <a:effectRef idx="2">
+            <a:schemeClr val="accent1"/>
+          </a:effectRef>
+          <a:fontRef idx="minor">
+            <a:schemeClr val="lt1"/>
+          </a:fontRef>
+        </p:style>
+        <p:txBody>
+          <a:bodyPr rtlCol="0" anchor="ctr"/>
+          <a:lstStyle/>
+          <a:p>
+            <a:pPr algn="ctr"/>
+          </a:p>
+        </p:txBody>
+      </p:sp>
+      <p:sp>
+        <p:nvSpPr>
+          <p:cNvPr id="6" name="Rounded Rectangle 5"/>
+          <p:cNvSpPr/>
+          <p:nvPr/>
+        </p:nvSpPr>
+        <p:spPr>
+          <a:xfrm>
+            <a:off x="502920" y="1188720"/>
+            <a:ext cx="5577840" cy="2651760"/>
+          </a:xfrm>
+          <a:prstGeom prst="roundRect">
+            <a:avLst>
+              <a:gd name="adj" fmla="val 12000"/>
+            </a:avLst>
+          </a:prstGeom>
+          <a:solidFill>
+            <a:srgbClr val="F2F4F8"/>
+          </a:solidFill>
+          <a:ln w="15240">
+            <a:solidFill>
+              <a:srgbClr val="2E75B6"/>
+            </a:solidFill>
+          </a:ln>
+          <a:effectLst/>
+        </p:spPr>
+        <p:style>
+          <a:lnRef idx="1">
+            <a:schemeClr val="accent1"/>
+          </a:lnRef>
+          <a:fillRef idx="3">
+            <a:schemeClr val="accent1"/>
+          </a:fillRef>
+          <a:effectRef idx="2">
+            <a:schemeClr val="accent1"/>
+          </a:effectRef>
+          <a:fontRef idx="minor">
+            <a:schemeClr val="lt1"/>
+          </a:fontRef>
+        </p:style>
+        <p:txBody>
+          <a:bodyPr rtlCol="0" anchor="ctr" wrap="square" lIns="38100" rIns="38100" tIns="25400" bIns="25400"/>
+          <a:lstStyle/>
+          <a:p>
+            <a:pPr algn="ctr">
+              <a:spcAft>
+                <a:spcPts val="200"/>
+              </a:spcAft>
+            </a:pPr>
+            <a:r>
+              <a:rPr sz="1800" b="1" i="0">
+                <a:solidFill>
+                  <a:srgbClr val="2E75B6"/>
+                </a:solidFill>
+                <a:latin typeface="微软雅黑"/>
+                <a:ea typeface="微软雅黑"/>
+              </a:rPr>
+              <a:t>a_world = R(q) · a_body</a:t>
+            </a:r>
+          </a:p>
+          <a:p>
+            <a:pPr algn="ctr">
+              <a:spcAft>
+                <a:spcPts val="200"/>
+              </a:spcAft>
+            </a:pPr>
+            <a:r>
+              <a:rPr sz="600" b="0" i="0">
+                <a:solidFill>
+                  <a:srgbClr val="595959"/>
+                </a:solidFill>
+                <a:latin typeface="微软雅黑"/>
+                <a:ea typeface="微软雅黑"/>
+              </a:rPr>
+              <a:t/>
+            </a:r>
+          </a:p>
+          <a:p>
+            <a:pPr algn="ctr">
+              <a:spcAft>
+                <a:spcPts val="200"/>
+              </a:spcAft>
+            </a:pPr>
+            <a:r>
+              <a:rPr sz="1400" b="0" i="0">
+                <a:solidFill>
+                  <a:srgbClr val="595959"/>
+                </a:solidFill>
+                <a:latin typeface="微软雅黑"/>
+                <a:ea typeface="微软雅黑"/>
+              </a:rPr>
+              <a:t>取世界系 z 分量(R 第三行):</a:t>
+            </a:r>
+          </a:p>
+          <a:p>
+            <a:pPr algn="ctr">
+              <a:spcAft>
+                <a:spcPts val="200"/>
+              </a:spcAft>
+            </a:pPr>
+            <a:r>
+              <a:rPr sz="1400" b="1" i="0">
+                <a:solidFill>
+                  <a:srgbClr val="595959"/>
+                </a:solidFill>
+                <a:latin typeface="微软雅黑"/>
+                <a:ea typeface="微软雅黑"/>
+              </a:rPr>
+              <a:t>az = 2(q1q3−q0q2)·ax + 2(q2q3+q0q1)·ay</a:t>
+            </a:r>
+          </a:p>
+          <a:p>
+            <a:pPr algn="ctr">
+              <a:spcAft>
+                <a:spcPts val="200"/>
+              </a:spcAft>
+            </a:pPr>
+            <a:r>
+              <a:rPr sz="1400" b="1" i="0">
+                <a:solidFill>
+                  <a:srgbClr val="595959"/>
+                </a:solidFill>
+                <a:latin typeface="微软雅黑"/>
+                <a:ea typeface="微软雅黑"/>
+              </a:rPr>
+              <a:t>     + (q0²−q1²−q2²+q3²)·az − g</a:t>
+            </a:r>
+          </a:p>
+          <a:p>
+            <a:pPr algn="ctr">
+              <a:spcAft>
+                <a:spcPts val="200"/>
+              </a:spcAft>
+            </a:pPr>
+            <a:r>
+              <a:rPr sz="600" b="0" i="0">
+                <a:solidFill>
+                  <a:srgbClr val="595959"/>
+                </a:solidFill>
+                <a:latin typeface="微软雅黑"/>
+                <a:ea typeface="微软雅黑"/>
+              </a:rPr>
+              <a:t/>
+            </a:r>
+          </a:p>
+          <a:p>
+            <a:pPr algn="ctr">
+              <a:spcAft>
+                <a:spcPts val="200"/>
+              </a:spcAft>
+            </a:pPr>
+            <a:r>
+              <a:rPr sz="1400" b="1" i="0">
+                <a:solidFill>
+                  <a:srgbClr val="1F3864"/>
+                </a:solidFill>
+                <a:latin typeface="微软雅黑"/>
+                <a:ea typeface="微软雅黑"/>
+              </a:rPr>
+              <a:t>物理含义:扣除重力后的净垂直加速度</a:t>
+            </a:r>
+          </a:p>
+        </p:txBody>
+      </p:sp>
+      <p:sp>
+        <p:nvSpPr>
+          <p:cNvPr id="7" name="TextBox 6"/>
+          <p:cNvSpPr txBox="1"/>
+          <p:nvPr/>
+        </p:nvSpPr>
+        <p:spPr>
+          <a:xfrm>
+            <a:off x="502920" y="4114800"/>
+            <a:ext cx="5577840" cy="2194560"/>
+          </a:xfrm>
+          <a:prstGeom prst="rect">
+            <a:avLst/>
+          </a:prstGeom>
+          <a:noFill/>
+        </p:spPr>
+        <p:txBody>
+          <a:bodyPr wrap="square" anchor="t" lIns="25400" rIns="25400" tIns="12700" bIns="12700">
+            <a:spAutoFit/>
+          </a:bodyPr>
+          <a:lstStyle/>
+          <a:p>
+            <a:pPr algn="l">
+              <a:spcAft>
+                <a:spcPts val="400"/>
+              </a:spcAft>
+            </a:pPr>
+            <a:r>
+              <a:rPr sz="1600" b="1" i="0">
+                <a:solidFill>
+                  <a:srgbClr val="1F3864"/>
+                </a:solidFill>
+                <a:latin typeface="微软雅黑"/>
+                <a:ea typeface="微软雅黑"/>
+              </a:rPr>
+              <a:t>为什么需要它?</a:t>
+            </a:r>
+          </a:p>
+          <a:p>
+            <a:pPr algn="l">
+              <a:spcAft>
+                <a:spcPts val="400"/>
+              </a:spcAft>
+            </a:pPr>
+            <a:r>
+              <a:rPr sz="1400" b="0" i="0">
+                <a:solidFill>
+                  <a:srgbClr val="595959"/>
+                </a:solidFill>
+                <a:latin typeface="微软雅黑"/>
+                <a:ea typeface="微软雅黑"/>
+              </a:rPr>
+              <a:t>▸ 没有气压计/高度计 → 无法直接定高</a:t>
+            </a:r>
+          </a:p>
+          <a:p>
+            <a:pPr algn="l">
+              <a:spcAft>
+                <a:spcPts val="400"/>
+              </a:spcAft>
+            </a:pPr>
+            <a:r>
+              <a:rPr sz="1400" b="0" i="0">
+                <a:solidFill>
+                  <a:srgbClr val="595959"/>
+                </a:solidFill>
+                <a:latin typeface="微软雅黑"/>
+                <a:ea typeface="微软雅黑"/>
+              </a:rPr>
+              <a:t>▸ 但'悬停'的物理条件是 az = 0(升力=重力)</a:t>
+            </a:r>
+          </a:p>
+          <a:p>
+            <a:pPr algn="l">
+              <a:spcAft>
+                <a:spcPts val="400"/>
+              </a:spcAft>
+            </a:pPr>
+            <a:r>
+              <a:rPr sz="1400" b="0" i="0">
+                <a:solidFill>
+                  <a:srgbClr val="595959"/>
+                </a:solidFill>
+                <a:latin typeface="微软雅黑"/>
+                <a:ea typeface="微软雅黑"/>
+              </a:rPr>
+              <a:t>▸ 用加速度信号闭环逼近悬停,不积分不漂移</a:t>
+            </a:r>
+          </a:p>
+        </p:txBody>
+      </p:sp>
+      <p:sp>
+        <p:nvSpPr>
+          <p:cNvPr id="8" name="Rounded Rectangle 7"/>
+          <p:cNvSpPr/>
+          <p:nvPr/>
+        </p:nvSpPr>
+        <p:spPr>
+          <a:xfrm>
+            <a:off x="6492240" y="1188720"/>
+            <a:ext cx="5303520" cy="2377440"/>
+          </a:xfrm>
+          <a:prstGeom prst="roundRect">
+            <a:avLst>
+              <a:gd name="adj" fmla="val 12000"/>
+            </a:avLst>
+          </a:prstGeom>
+          <a:solidFill>
+            <a:srgbClr val="F2F4F8"/>
+          </a:solidFill>
+          <a:ln w="15240">
+            <a:solidFill>
+              <a:srgbClr val="2E75B6"/>
+            </a:solidFill>
+          </a:ln>
+          <a:effectLst/>
+        </p:spPr>
+        <p:style>
+          <a:lnRef idx="1">
+            <a:schemeClr val="accent1"/>
+          </a:lnRef>
+          <a:fillRef idx="3">
+            <a:schemeClr val="accent1"/>
+          </a:fillRef>
+          <a:effectRef idx="2">
+            <a:schemeClr val="accent1"/>
+          </a:effectRef>
+          <a:fontRef idx="minor">
+            <a:schemeClr val="lt1"/>
+          </a:fontRef>
+        </p:style>
+        <p:txBody>
+          <a:bodyPr rtlCol="0" anchor="t" wrap="square" lIns="38100" rIns="38100" tIns="25400" bIns="25400"/>
+          <a:lstStyle/>
+          <a:p>
+            <a:pPr algn="l">
+              <a:spcAft>
+                <a:spcPts val="200"/>
+              </a:spcAft>
+            </a:pPr>
+            <a:r>
+              <a:rPr sz="1500" b="1" i="0">
+                <a:solidFill>
+                  <a:srgbClr val="1F3864"/>
+                </a:solidFill>
+                <a:latin typeface="微软雅黑"/>
+                <a:ea typeface="微软雅黑"/>
+              </a:rPr>
+              <a:t>精度依赖姿态精度</a:t>
+            </a:r>
+          </a:p>
+          <a:p>
+            <a:pPr algn="l">
+              <a:spcAft>
+                <a:spcPts val="200"/>
+              </a:spcAft>
+            </a:pPr>
+            <a:r>
+              <a:rPr sz="1350" b="0" i="0">
+                <a:solidFill>
+                  <a:srgbClr val="595959"/>
+                </a:solidFill>
+                <a:latin typeface="微软雅黑"/>
+                <a:ea typeface="微软雅黑"/>
+              </a:rPr>
+              <a:t>▸ 姿态误差 θ → az 误差 ≈ g·θ²/2(二阶小量)</a:t>
+            </a:r>
+          </a:p>
+          <a:p>
+            <a:pPr algn="l">
+              <a:spcAft>
+                <a:spcPts val="200"/>
+              </a:spcAft>
+            </a:pPr>
+            <a:r>
+              <a:rPr sz="1350" b="0" i="0">
+                <a:solidFill>
+                  <a:srgbClr val="595959"/>
+                </a:solidFill>
+                <a:latin typeface="微软雅黑"/>
+                <a:ea typeface="微软雅黑"/>
+              </a:rPr>
+              <a:t>▸ 小角度下安全;大倾角需姿态准</a:t>
+            </a:r>
+          </a:p>
+          <a:p>
+            <a:pPr algn="l">
+              <a:spcAft>
+                <a:spcPts val="200"/>
+              </a:spcAft>
+            </a:pPr>
+            <a:r>
+              <a:rPr sz="1350" b="0" i="0">
+                <a:solidFill>
+                  <a:srgbClr val="ED7D31"/>
+                </a:solidFill>
+                <a:latin typeface="微软雅黑"/>
+                <a:ea typeface="微软雅黑"/>
+              </a:rPr>
+              <a:t>▸ 曾发现系数符号写反(转置矩阵)</a:t>
+            </a:r>
+          </a:p>
+          <a:p>
+            <a:pPr algn="l">
+              <a:spcAft>
+                <a:spcPts val="200"/>
+              </a:spcAft>
+            </a:pPr>
+            <a:r>
+              <a:rPr sz="1350" b="0" i="0">
+                <a:solidFill>
+                  <a:srgbClr val="2E7D32"/>
+                </a:solidFill>
+                <a:latin typeface="微软雅黑"/>
+                <a:ea typeface="微软雅黑"/>
+              </a:rPr>
+              <a:t>   → 已修复并加回归用例</a:t>
+            </a:r>
+          </a:p>
+        </p:txBody>
+      </p:sp>
+      <p:sp>
+        <p:nvSpPr>
+          <p:cNvPr id="9" name="Rounded Rectangle 8"/>
+          <p:cNvSpPr/>
+          <p:nvPr/>
+        </p:nvSpPr>
+        <p:spPr>
+          <a:xfrm>
+            <a:off x="6492240" y="3840480"/>
+            <a:ext cx="5303520" cy="2560320"/>
+          </a:xfrm>
+          <a:prstGeom prst="roundRect">
+            <a:avLst>
+              <a:gd name="adj" fmla="val 12000"/>
+            </a:avLst>
+          </a:prstGeom>
+          <a:solidFill>
+            <a:srgbClr val="F2F4F8"/>
+          </a:solidFill>
+          <a:ln w="15240">
+            <a:solidFill>
+              <a:srgbClr val="2E75B6"/>
+            </a:solidFill>
+          </a:ln>
+          <a:effectLst/>
+        </p:spPr>
+        <p:style>
+          <a:lnRef idx="1">
+            <a:schemeClr val="accent1"/>
+          </a:lnRef>
+          <a:fillRef idx="3">
+            <a:schemeClr val="accent1"/>
+          </a:fillRef>
+          <a:effectRef idx="2">
+            <a:schemeClr val="accent1"/>
+          </a:effectRef>
+          <a:fontRef idx="minor">
+            <a:schemeClr val="lt1"/>
+          </a:fontRef>
+        </p:style>
+        <p:txBody>
+          <a:bodyPr rtlCol="0" anchor="t" wrap="square" lIns="38100" rIns="38100" tIns="25400" bIns="25400"/>
+          <a:lstStyle/>
+          <a:p>
+            <a:pPr algn="l">
+              <a:spcAft>
+                <a:spcPts val="200"/>
+              </a:spcAft>
+            </a:pPr>
+            <a:r>
+              <a:rPr sz="1500" b="1" i="0">
+                <a:solidFill>
+                  <a:srgbClr val="1F3864"/>
+                </a:solidFill>
+                <a:latin typeface="微软雅黑"/>
+                <a:ea typeface="微软雅黑"/>
+              </a:rPr>
+              <a:t>az 环怎么用(预告)</a:t>
+            </a:r>
+          </a:p>
+          <a:p>
+            <a:pPr algn="l">
+              <a:spcAft>
+                <a:spcPts val="200"/>
+              </a:spcAft>
+            </a:pPr>
+            <a:r>
+              <a:rPr sz="1400" b="1" i="0">
+                <a:solidFill>
+                  <a:srgbClr val="2E75B6"/>
+                </a:solidFill>
+                <a:latin typeface="微软雅黑"/>
+                <a:ea typeface="微软雅黑"/>
+              </a:rPr>
+              <a:t>悬停态:throttle −= az × 0.0002 (每 5ms)</a:t>
+            </a:r>
+          </a:p>
+          <a:p>
+            <a:pPr algn="l">
+              <a:spcAft>
+                <a:spcPts val="200"/>
+              </a:spcAft>
+            </a:pPr>
+            <a:r>
+              <a:rPr sz="1350" b="0" i="0">
+                <a:solidFill>
+                  <a:srgbClr val="595959"/>
+                </a:solidFill>
+                <a:latin typeface="微软雅黑"/>
+                <a:ea typeface="微软雅黑"/>
+              </a:rPr>
+              <a:t>az&gt;0 在升 → 收油门;az&lt;0 在掉 → 加油门</a:t>
+            </a:r>
+          </a:p>
+          <a:p>
+            <a:pPr algn="l">
+              <a:spcAft>
+                <a:spcPts val="200"/>
+              </a:spcAft>
+            </a:pPr>
+            <a:r>
+              <a:rPr sz="1350" b="0" i="0">
+                <a:solidFill>
+                  <a:srgbClr val="595959"/>
+                </a:solidFill>
+                <a:latin typeface="微软雅黑"/>
+                <a:ea typeface="微软雅黑"/>
+              </a:rPr>
+              <a:t>收敛到 az≈0,即'加速度意义下的悬停'</a:t>
+            </a:r>
+          </a:p>
+          <a:p>
+            <a:pPr algn="l">
+              <a:spcAft>
+                <a:spcPts val="200"/>
+              </a:spcAft>
+            </a:pPr>
+            <a:r>
+              <a:rPr sz="600" b="0" i="0">
+                <a:solidFill>
+                  <a:srgbClr val="595959"/>
+                </a:solidFill>
+                <a:latin typeface="微软雅黑"/>
+                <a:ea typeface="微软雅黑"/>
+              </a:rPr>
+              <a:t/>
+            </a:r>
+          </a:p>
+          <a:p>
+            <a:pPr algn="l">
+              <a:spcAft>
+                <a:spcPts val="200"/>
+              </a:spcAft>
+            </a:pPr>
+            <a:r>
+              <a:rPr sz="1250" b="0" i="0">
+                <a:solidFill>
+                  <a:srgbClr val="ED7D31"/>
+                </a:solidFill>
+                <a:latin typeface="微软雅黑"/>
+                <a:ea typeface="微软雅黑"/>
+              </a:rPr>
+              <a:t>局限:速度不为零时'托住'的是当前运动趋势</a:t>
+            </a:r>
+          </a:p>
+        </p:txBody>
+      </p:sp>
+    </p:spTree>
+  </p:cSld>
+  <p:clrMapOvr>
+    <a:masterClrMapping/>
+  </p:clrMapOvr>
+</p:sld>
+</file>
+
+<file path=ppt/slides/slide11.xml><?xml version="1.0" encoding="utf-8"?>
+<p:sld xmlns:a="http://schemas.openxmlformats.org/drawingml/2006/main" xmlns:p="http://schemas.openxmlformats.org/presentationml/2006/main" xmlns:r="http://schemas.openxmlformats.org/officeDocument/2006/relationships">
+  <p:cSld>
+    <p:spTree>
+      <p:nvGrpSpPr>
+        <p:cNvPr id="1" name=""/>
+        <p:cNvGrpSpPr/>
+        <p:nvPr/>
+      </p:nvGrpSpPr>
+      <p:grpSpPr/>
+      <p:sp>
+        <p:nvSpPr>
+          <p:cNvPr id="2" name="Rectangle 1"/>
+          <p:cNvSpPr/>
+          <p:nvPr/>
+        </p:nvSpPr>
+        <p:spPr>
+          <a:xfrm>
+            <a:off x="0" y="0"/>
+            <a:ext cx="12191695" cy="868680"/>
+          </a:xfrm>
+          <a:prstGeom prst="rect">
+            <a:avLst/>
+          </a:prstGeom>
+          <a:solidFill>
+            <a:srgbClr val="1F3864"/>
+          </a:solidFill>
+          <a:ln>
+            <a:noFill/>
+          </a:ln>
+          <a:effectLst/>
+        </p:spPr>
+        <p:style>
+          <a:lnRef idx="1">
+            <a:schemeClr val="accent1"/>
+          </a:lnRef>
+          <a:fillRef idx="3">
+            <a:schemeClr val="accent1"/>
+          </a:fillRef>
+          <a:effectRef idx="2">
+            <a:schemeClr val="accent1"/>
+          </a:effectRef>
+          <a:fontRef idx="minor">
+            <a:schemeClr val="lt1"/>
+          </a:fontRef>
+        </p:style>
+        <p:txBody>
+          <a:bodyPr rtlCol="0" anchor="ctr"/>
+          <a:lstStyle/>
+          <a:p>
+            <a:pPr algn="ctr"/>
+          </a:p>
+        </p:txBody>
+      </p:sp>
+      <p:sp>
+        <p:nvSpPr>
+          <p:cNvPr id="3" name="TextBox 2"/>
+          <p:cNvSpPr txBox="1"/>
+          <p:nvPr/>
+        </p:nvSpPr>
+        <p:spPr>
+          <a:xfrm>
+            <a:off x="502920" y="91440"/>
+            <a:ext cx="10241280" cy="731520"/>
+          </a:xfrm>
+          <a:prstGeom prst="rect">
+            <a:avLst/>
+          </a:prstGeom>
+          <a:noFill/>
+        </p:spPr>
+        <p:txBody>
+          <a:bodyPr wrap="square" anchor="ctr" lIns="25400" rIns="25400" tIns="12700" bIns="12700">
+            <a:spAutoFit/>
+          </a:bodyPr>
+          <a:lstStyle/>
+          <a:p>
+            <a:pPr algn="l">
+              <a:spcAft>
+                <a:spcPts val="400"/>
+              </a:spcAft>
+            </a:pPr>
+            <a:r>
+              <a:rPr sz="2600" b="1" i="0">
+                <a:solidFill>
+                  <a:srgbClr val="FFFFFF"/>
+                </a:solidFill>
+                <a:latin typeface="微软雅黑"/>
+                <a:ea typeface="微软雅黑"/>
+              </a:rPr>
+              <a:t>PID 控制原理</a:t>
+            </a:r>
+            <a:r>
+              <a:rPr sz="1400" b="0" i="0">
+                <a:solidFill>
+                  <a:srgbClr val="BDD7EE"/>
+                </a:solidFill>
+                <a:latin typeface="微软雅黑"/>
+                <a:ea typeface="微软雅黑"/>
+              </a:rPr>
+              <a:t>   P/I/D 三项各自的本质</a:t>
+            </a:r>
+          </a:p>
+        </p:txBody>
+      </p:sp>
+      <p:sp>
+        <p:nvSpPr>
+          <p:cNvPr id="4" name="TextBox 3"/>
+          <p:cNvSpPr txBox="1"/>
+          <p:nvPr/>
+        </p:nvSpPr>
+        <p:spPr>
+          <a:xfrm>
+            <a:off x="11292840" y="6382512"/>
+            <a:ext cx="822960" cy="365760"/>
+          </a:xfrm>
+          <a:prstGeom prst="rect">
+            <a:avLst/>
+          </a:prstGeom>
+          <a:noFill/>
+        </p:spPr>
+        <p:txBody>
+          <a:bodyPr wrap="square" anchor="t" lIns="25400" rIns="25400" tIns="12700" bIns="12700">
+            <a:spAutoFit/>
+          </a:bodyPr>
+          <a:lstStyle/>
+          <a:p>
+            <a:pPr algn="r">
+              <a:spcAft>
+                <a:spcPts val="400"/>
+              </a:spcAft>
+            </a:pPr>
+            <a:r>
+              <a:rPr sz="1200" b="0" i="0">
+                <a:solidFill>
+                  <a:srgbClr val="FFFFFF"/>
+                </a:solidFill>
+                <a:latin typeface="微软雅黑"/>
+                <a:ea typeface="微软雅黑"/>
+              </a:rPr>
+              <a:t>10</a:t>
+            </a:r>
+          </a:p>
+        </p:txBody>
+      </p:sp>
+      <p:sp>
+        <p:nvSpPr>
+          <p:cNvPr id="5" name="Rectangle 4"/>
+          <p:cNvSpPr/>
+          <p:nvPr/>
+        </p:nvSpPr>
+        <p:spPr>
+          <a:xfrm>
+            <a:off x="0" y="868680"/>
+            <a:ext cx="12191695" cy="41148"/>
+          </a:xfrm>
+          <a:prstGeom prst="rect">
+            <a:avLst/>
+          </a:prstGeom>
+          <a:solidFill>
+            <a:srgbClr val="ED7D31"/>
+          </a:solidFill>
+          <a:ln>
+            <a:noFill/>
+          </a:ln>
+          <a:effectLst/>
+        </p:spPr>
+        <p:style>
+          <a:lnRef idx="1">
+            <a:schemeClr val="accent1"/>
+          </a:lnRef>
+          <a:fillRef idx="3">
+            <a:schemeClr val="accent1"/>
+          </a:fillRef>
+          <a:effectRef idx="2">
+            <a:schemeClr val="accent1"/>
+          </a:effectRef>
+          <a:fontRef idx="minor">
+            <a:schemeClr val="lt1"/>
+          </a:fontRef>
+        </p:style>
+        <p:txBody>
+          <a:bodyPr rtlCol="0" anchor="ctr"/>
+          <a:lstStyle/>
+          <a:p>
+            <a:pPr algn="ctr"/>
+          </a:p>
+        </p:txBody>
+      </p:sp>
+      <p:sp>
+        <p:nvSpPr>
+          <p:cNvPr id="6" name="Rounded Rectangle 5"/>
+          <p:cNvSpPr/>
+          <p:nvPr/>
+        </p:nvSpPr>
+        <p:spPr>
+          <a:xfrm>
+            <a:off x="502920" y="1188720"/>
+            <a:ext cx="5486400" cy="1051560"/>
+          </a:xfrm>
+          <a:prstGeom prst="roundRect">
+            <a:avLst>
+              <a:gd name="adj" fmla="val 12000"/>
+            </a:avLst>
+          </a:prstGeom>
+          <a:solidFill>
+            <a:srgbClr val="F2F4F8"/>
+          </a:solidFill>
+          <a:ln w="15240">
+            <a:solidFill>
+              <a:srgbClr val="2E75B6"/>
+            </a:solidFill>
+          </a:ln>
+          <a:effectLst/>
+        </p:spPr>
+        <p:style>
+          <a:lnRef idx="1">
+            <a:schemeClr val="accent1"/>
+          </a:lnRef>
+          <a:fillRef idx="3">
+            <a:schemeClr val="accent1"/>
+          </a:fillRef>
+          <a:effectRef idx="2">
+            <a:schemeClr val="accent1"/>
+          </a:effectRef>
+          <a:fontRef idx="minor">
+            <a:schemeClr val="lt1"/>
+          </a:fontRef>
+        </p:style>
+        <p:txBody>
+          <a:bodyPr rtlCol="0" anchor="ctr" wrap="square" lIns="38100" rIns="38100" tIns="25400" bIns="25400"/>
+          <a:lstStyle/>
+          <a:p>
+            <a:pPr algn="ctr">
+              <a:spcAft>
+                <a:spcPts val="200"/>
+              </a:spcAft>
+            </a:pPr>
+            <a:r>
+              <a:rPr sz="1350" b="1" i="0">
+                <a:solidFill>
+                  <a:srgbClr val="1F3864"/>
+                </a:solidFill>
+                <a:latin typeface="微软雅黑"/>
+                <a:ea typeface="微软雅黑"/>
+              </a:rPr>
+              <a:t>连续形式</a:t>
+            </a:r>
+          </a:p>
+          <a:p>
+            <a:pPr algn="ctr">
+              <a:spcAft>
+                <a:spcPts val="200"/>
+              </a:spcAft>
+            </a:pPr>
+            <a:r>
+              <a:rPr sz="1650" b="1" i="0">
+                <a:solidFill>
+                  <a:srgbClr val="2E75B6"/>
+                </a:solidFill>
+                <a:latin typeface="微软雅黑"/>
+                <a:ea typeface="微软雅黑"/>
+              </a:rPr>
+              <a:t>u(t) = Kp·e(t) + Ki·∫e(t)dt + Kd·de/dt</a:t>
+            </a:r>
+          </a:p>
+          <a:p>
+            <a:pPr algn="ctr">
+              <a:spcAft>
+                <a:spcPts val="200"/>
+              </a:spcAft>
+            </a:pPr>
+            <a:r>
+              <a:rPr sz="1250" b="0" i="0">
+                <a:solidFill>
+                  <a:srgbClr val="595959"/>
+                </a:solidFill>
+                <a:latin typeface="微软雅黑"/>
+                <a:ea typeface="微软雅黑"/>
+              </a:rPr>
+              <a:t>e = 目标值 − 反馈值</a:t>
+            </a:r>
+          </a:p>
+        </p:txBody>
+      </p:sp>
+      <p:sp>
+        <p:nvSpPr>
+          <p:cNvPr id="7" name="Rounded Rectangle 6"/>
+          <p:cNvSpPr/>
+          <p:nvPr/>
+        </p:nvSpPr>
+        <p:spPr>
+          <a:xfrm>
+            <a:off x="6263640" y="1188720"/>
+            <a:ext cx="5532120" cy="1051560"/>
+          </a:xfrm>
+          <a:prstGeom prst="roundRect">
+            <a:avLst>
+              <a:gd name="adj" fmla="val 12000"/>
+            </a:avLst>
+          </a:prstGeom>
+          <a:solidFill>
+            <a:srgbClr val="E2EFDA"/>
+          </a:solidFill>
+          <a:ln w="15240">
+            <a:solidFill>
+              <a:srgbClr val="2E7D32"/>
+            </a:solidFill>
+          </a:ln>
+          <a:effectLst/>
+        </p:spPr>
+        <p:style>
+          <a:lnRef idx="1">
+            <a:schemeClr val="accent1"/>
+          </a:lnRef>
+          <a:fillRef idx="3">
+            <a:schemeClr val="accent1"/>
+          </a:fillRef>
+          <a:effectRef idx="2">
+            <a:schemeClr val="accent1"/>
+          </a:effectRef>
+          <a:fontRef idx="minor">
+            <a:schemeClr val="lt1"/>
+          </a:fontRef>
+        </p:style>
+        <p:txBody>
+          <a:bodyPr rtlCol="0" anchor="ctr" wrap="square" lIns="38100" rIns="38100" tIns="25400" bIns="25400"/>
+          <a:lstStyle/>
+          <a:p>
+            <a:pPr algn="ctr">
+              <a:spcAft>
+                <a:spcPts val="200"/>
+              </a:spcAft>
+            </a:pPr>
+            <a:r>
+              <a:rPr sz="1350" b="1" i="0">
+                <a:solidFill>
+                  <a:srgbClr val="1F3864"/>
+                </a:solidFill>
+                <a:latin typeface="微软雅黑"/>
+                <a:ea typeface="微软雅黑"/>
+              </a:rPr>
+              <a:t>离散实现(每拍执行)</a:t>
+            </a:r>
+          </a:p>
+          <a:p>
+            <a:pPr algn="ctr">
+              <a:spcAft>
+                <a:spcPts val="200"/>
+              </a:spcAft>
+            </a:pPr>
+            <a:r>
+              <a:rPr sz="1400" b="1" i="0">
+                <a:solidFill>
+                  <a:srgbClr val="2E7D32"/>
+                </a:solidFill>
+                <a:latin typeface="微软雅黑"/>
+                <a:ea typeface="微软雅黑"/>
+              </a:rPr>
+              <a:t>integral += e·dt;  deriv = (e−e_prev)/dt</a:t>
+            </a:r>
+          </a:p>
+          <a:p>
+            <a:pPr algn="ctr">
+              <a:spcAft>
+                <a:spcPts val="200"/>
+              </a:spcAft>
+            </a:pPr>
+            <a:r>
+              <a:rPr sz="1400" b="1" i="0">
+                <a:solidFill>
+                  <a:srgbClr val="2E7D32"/>
+                </a:solidFill>
+                <a:latin typeface="微软雅黑"/>
+                <a:ea typeface="微软雅黑"/>
+              </a:rPr>
+              <a:t>u = Kp·e + Ki·integral + Kd·deriv</a:t>
+            </a:r>
+          </a:p>
+        </p:txBody>
+      </p:sp>
+      <p:graphicFrame>
+        <p:nvGraphicFramePr>
+          <p:cNvPr id="8" name="Table 7"/>
+          <p:cNvGraphicFramePr>
+            <a:graphicFrameLocks noGrp="1"/>
+          </p:cNvGraphicFramePr>
+          <p:nvPr/>
+        </p:nvGraphicFramePr>
+        <p:xfrm>
+          <a:off x="502920" y="2514600"/>
+          <a:ext cx="11292840" cy="2267712"/>
+        </p:xfrm>
+        <a:graphic>
+          <a:graphicData uri="http://schemas.openxmlformats.org/drawingml/2006/table">
+            <a:tbl>
+              <a:tblPr firstRow="1" bandRow="1">
+                <a:tableStyleId>{5C22544A-7EE6-4342-B048-85BDC9FD1C3A}</a:tableStyleId>
+              </a:tblPr>
+              <a:tblGrid>
+                <a:gridCol w="1005840"/>
+                <a:gridCol w="3108960"/>
+                <a:gridCol w="3017520"/>
+                <a:gridCol w="4160520"/>
+              </a:tblGrid>
+              <a:tr h="566928">
+                <a:tc>
+                  <a:txBody>
+                    <a:bodyPr wrap="square"/>
+                    <a:lstStyle/>
+                    <a:p>
+                      <a:pPr algn="l"/>
+                      <a:r>
+                        <a:rPr sz="1300" b="1" i="0">
+                          <a:solidFill>
+                            <a:srgbClr val="FFFFFF"/>
+                          </a:solidFill>
+                          <a:latin typeface="微软雅黑"/>
+                          <a:ea typeface="微软雅黑"/>
+                        </a:rPr>
+                        <a:t>项</a:t>
+                      </a:r>
+                    </a:p>
+                  </a:txBody>
+                  <a:tcPr marL="50800" marR="50800" marT="12700" marB="12700" anchor="ctr">
+                    <a:solidFill>
+                      <a:srgbClr val="1F3864"/>
+                    </a:solidFill>
+                  </a:tcPr>
+                </a:tc>
+                <a:tc>
+                  <a:txBody>
+                    <a:bodyPr wrap="square"/>
+                    <a:lstStyle/>
+                    <a:p>
+                      <a:pPr algn="ctr"/>
+                      <a:r>
+                        <a:rPr sz="1300" b="1" i="0">
+                          <a:solidFill>
+                            <a:srgbClr val="FFFFFF"/>
+                          </a:solidFill>
+                          <a:latin typeface="微软雅黑"/>
+                          <a:ea typeface="微软雅黑"/>
+                        </a:rPr>
+                        <a:t>物理直觉</a:t>
+                      </a:r>
+                    </a:p>
+                  </a:txBody>
+                  <a:tcPr marL="50800" marR="50800" marT="12700" marB="12700" anchor="ctr">
+                    <a:solidFill>
+                      <a:srgbClr val="1F3864"/>
+                    </a:solidFill>
+                  </a:tcPr>
+                </a:tc>
+                <a:tc>
+                  <a:txBody>
+                    <a:bodyPr wrap="square"/>
+                    <a:lstStyle/>
+                    <a:p>
+                      <a:pPr algn="ctr"/>
+                      <a:r>
+                        <a:rPr sz="1300" b="1" i="0">
+                          <a:solidFill>
+                            <a:srgbClr val="FFFFFF"/>
+                          </a:solidFill>
+                          <a:latin typeface="微软雅黑"/>
+                          <a:ea typeface="微软雅黑"/>
+                        </a:rPr>
+                        <a:t>带来的好处</a:t>
+                      </a:r>
+                    </a:p>
+                  </a:txBody>
+                  <a:tcPr marL="50800" marR="50800" marT="12700" marB="12700" anchor="ctr">
+                    <a:solidFill>
+                      <a:srgbClr val="1F3864"/>
+                    </a:solidFill>
+                  </a:tcPr>
+                </a:tc>
+                <a:tc>
+                  <a:txBody>
+                    <a:bodyPr wrap="square"/>
+                    <a:lstStyle/>
+                    <a:p>
+                      <a:pPr algn="ctr"/>
+                      <a:r>
+                        <a:rPr sz="1300" b="1" i="0">
+                          <a:solidFill>
+                            <a:srgbClr val="FFFFFF"/>
+                          </a:solidFill>
+                          <a:latin typeface="微软雅黑"/>
+                          <a:ea typeface="微软雅黑"/>
+                        </a:rPr>
+                        <a:t>副作用(没有免费的午餐)</a:t>
+                      </a:r>
+                    </a:p>
+                  </a:txBody>
+                  <a:tcPr marL="50800" marR="50800" marT="12700" marB="12700" anchor="ctr">
+                    <a:solidFill>
+                      <a:srgbClr val="1F3864"/>
+                    </a:solidFill>
+                  </a:tcPr>
+                </a:tc>
+              </a:tr>
+              <a:tr h="566928">
+                <a:tc>
+                  <a:txBody>
+                    <a:bodyPr wrap="square"/>
+                    <a:lstStyle/>
+                    <a:p>
+                      <a:pPr algn="l"/>
+                      <a:r>
+                        <a:rPr sz="1300" b="0" i="0">
+                          <a:solidFill>
+                            <a:srgbClr val="595959"/>
+                          </a:solidFill>
+                          <a:latin typeface="微软雅黑"/>
+                          <a:ea typeface="微软雅黑"/>
+                        </a:rPr>
+                        <a:t>P 比例</a:t>
+                      </a:r>
+                    </a:p>
+                  </a:txBody>
+                  <a:tcPr marL="50800" marR="50800" marT="12700" marB="12700" anchor="ctr">
+                    <a:solidFill>
+                      <a:srgbClr val="FFFFFF"/>
+                    </a:solidFill>
+                  </a:tcPr>
+                </a:tc>
+                <a:tc>
+                  <a:txBody>
+                    <a:bodyPr wrap="square"/>
+                    <a:lstStyle/>
+                    <a:p>
+                      <a:pPr algn="ctr"/>
+                      <a:r>
+                        <a:rPr sz="1300" b="0" i="0">
+                          <a:solidFill>
+                            <a:srgbClr val="595959"/>
+                          </a:solidFill>
+                          <a:latin typeface="微软雅黑"/>
+                          <a:ea typeface="微软雅黑"/>
+                        </a:rPr>
+                        <a:t>'现在'的误差,立即纠正</a:t>
+                      </a:r>
+                    </a:p>
+                  </a:txBody>
+                  <a:tcPr marL="50800" marR="50800" marT="12700" marB="12700" anchor="ctr">
+                    <a:solidFill>
+                      <a:srgbClr val="FFFFFF"/>
+                    </a:solidFill>
+                  </a:tcPr>
+                </a:tc>
+                <a:tc>
+                  <a:txBody>
+                    <a:bodyPr wrap="square"/>
+                    <a:lstStyle/>
+                    <a:p>
+                      <a:pPr algn="ctr"/>
+                      <a:r>
+                        <a:rPr sz="1300" b="0" i="0">
+                          <a:solidFill>
+                            <a:srgbClr val="595959"/>
+                          </a:solidFill>
+                          <a:latin typeface="微软雅黑"/>
+                          <a:ea typeface="微软雅黑"/>
+                        </a:rPr>
+                        <a:t>响应快,主干增益</a:t>
+                      </a:r>
+                    </a:p>
+                  </a:txBody>
+                  <a:tcPr marL="50800" marR="50800" marT="12700" marB="12700" anchor="ctr">
+                    <a:solidFill>
+                      <a:srgbClr val="FFFFFF"/>
+                    </a:solidFill>
+                  </a:tcPr>
+                </a:tc>
+                <a:tc>
+                  <a:txBody>
+                    <a:bodyPr wrap="square"/>
+                    <a:lstStyle/>
+                    <a:p>
+                      <a:pPr algn="ctr"/>
+                      <a:r>
+                        <a:rPr sz="1300" b="0" i="0">
+                          <a:solidFill>
+                            <a:srgbClr val="595959"/>
+                          </a:solidFill>
+                          <a:latin typeface="微软雅黑"/>
+                          <a:ea typeface="微软雅黑"/>
+                        </a:rPr>
+                        <a:t>留稳态误差;过大致震荡</a:t>
+                      </a:r>
+                    </a:p>
+                  </a:txBody>
+                  <a:tcPr marL="50800" marR="50800" marT="12700" marB="12700" anchor="ctr">
+                    <a:solidFill>
+                      <a:srgbClr val="FFFFFF"/>
+                    </a:solidFill>
+                  </a:tcPr>
+                </a:tc>
+              </a:tr>
+              <a:tr h="566928">
+                <a:tc>
+                  <a:txBody>
+                    <a:bodyPr wrap="square"/>
+                    <a:lstStyle/>
+                    <a:p>
+                      <a:pPr algn="l"/>
+                      <a:r>
+                        <a:rPr sz="1300" b="0" i="0">
+                          <a:solidFill>
+                            <a:srgbClr val="595959"/>
+                          </a:solidFill>
+                          <a:latin typeface="微软雅黑"/>
+                          <a:ea typeface="微软雅黑"/>
+                        </a:rPr>
+                        <a:t>I 积分</a:t>
+                      </a:r>
+                    </a:p>
+                  </a:txBody>
+                  <a:tcPr marL="50800" marR="50800" marT="12700" marB="12700" anchor="ctr">
+                    <a:solidFill>
+                      <a:srgbClr val="F2F4F8"/>
+                    </a:solidFill>
+                  </a:tcPr>
+                </a:tc>
+                <a:tc>
+                  <a:txBody>
+                    <a:bodyPr wrap="square"/>
+                    <a:lstStyle/>
+                    <a:p>
+                      <a:pPr algn="ctr"/>
+                      <a:r>
+                        <a:rPr sz="1300" b="0" i="0">
+                          <a:solidFill>
+                            <a:srgbClr val="595959"/>
+                          </a:solidFill>
+                          <a:latin typeface="微软雅黑"/>
+                          <a:ea typeface="微软雅黑"/>
+                        </a:rPr>
+                        <a:t>'过去'误差的累积,不归零不罢休</a:t>
+                      </a:r>
+                    </a:p>
+                  </a:txBody>
+                  <a:tcPr marL="50800" marR="50800" marT="12700" marB="12700" anchor="ctr">
+                    <a:solidFill>
+                      <a:srgbClr val="F2F4F8"/>
+                    </a:solidFill>
+                  </a:tcPr>
+                </a:tc>
+                <a:tc>
+                  <a:txBody>
+                    <a:bodyPr wrap="square"/>
+                    <a:lstStyle/>
+                    <a:p>
+                      <a:pPr algn="ctr"/>
+                      <a:r>
+                        <a:rPr sz="1300" b="0" i="0">
+                          <a:solidFill>
+                            <a:srgbClr val="595959"/>
+                          </a:solidFill>
+                          <a:latin typeface="微软雅黑"/>
+                          <a:ea typeface="微软雅黑"/>
+                        </a:rPr>
+                        <a:t>消除稳态误差</a:t>
+                      </a:r>
+                    </a:p>
+                  </a:txBody>
+                  <a:tcPr marL="50800" marR="50800" marT="12700" marB="12700" anchor="ctr">
+                    <a:solidFill>
+                      <a:srgbClr val="F2F4F8"/>
+                    </a:solidFill>
+                  </a:tcPr>
+                </a:tc>
+                <a:tc>
+                  <a:txBody>
+                    <a:bodyPr wrap="square"/>
+                    <a:lstStyle/>
+                    <a:p>
+                      <a:pPr algn="ctr"/>
+                      <a:r>
+                        <a:rPr sz="1300" b="0" i="0">
+                          <a:solidFill>
+                            <a:srgbClr val="595959"/>
+                          </a:solidFill>
+                          <a:latin typeface="微软雅黑"/>
+                          <a:ea typeface="微软雅黑"/>
+                        </a:rPr>
+                        <a:t>响应慢;积分饱和→超调</a:t>
+                      </a:r>
+                    </a:p>
+                  </a:txBody>
+                  <a:tcPr marL="50800" marR="50800" marT="12700" marB="12700" anchor="ctr">
+                    <a:solidFill>
+                      <a:srgbClr val="F2F4F8"/>
+                    </a:solidFill>
+                  </a:tcPr>
+                </a:tc>
+              </a:tr>
+              <a:tr h="566928">
+                <a:tc>
+                  <a:txBody>
+                    <a:bodyPr wrap="square"/>
+                    <a:lstStyle/>
+                    <a:p>
+                      <a:pPr algn="l"/>
+                      <a:r>
+                        <a:rPr sz="1300" b="0" i="0">
+                          <a:solidFill>
+                            <a:srgbClr val="595959"/>
+                          </a:solidFill>
+                          <a:latin typeface="微软雅黑"/>
+                          <a:ea typeface="微软雅黑"/>
+                        </a:rPr>
+                        <a:t>D 微分</a:t>
+                      </a:r>
+                    </a:p>
+                  </a:txBody>
+                  <a:tcPr marL="50800" marR="50800" marT="12700" marB="12700" anchor="ctr">
+                    <a:solidFill>
+                      <a:srgbClr val="FFFFFF"/>
+                    </a:solidFill>
+                  </a:tcPr>
+                </a:tc>
+                <a:tc>
+                  <a:txBody>
+                    <a:bodyPr wrap="square"/>
+                    <a:lstStyle/>
+                    <a:p>
+                      <a:pPr algn="ctr"/>
+                      <a:r>
+                        <a:rPr sz="1300" b="0" i="0">
+                          <a:solidFill>
+                            <a:srgbClr val="595959"/>
+                          </a:solidFill>
+                          <a:latin typeface="微软雅黑"/>
+                          <a:ea typeface="微软雅黑"/>
+                        </a:rPr>
+                        <a:t>'未来'趋势的预判,提前刹车</a:t>
+                      </a:r>
+                    </a:p>
+                  </a:txBody>
+                  <a:tcPr marL="50800" marR="50800" marT="12700" marB="12700" anchor="ctr">
+                    <a:solidFill>
+                      <a:srgbClr val="FFFFFF"/>
+                    </a:solidFill>
+                  </a:tcPr>
+                </a:tc>
+                <a:tc>
+                  <a:txBody>
+                    <a:bodyPr wrap="square"/>
+                    <a:lstStyle/>
+                    <a:p>
+                      <a:pPr algn="ctr"/>
+                      <a:r>
+                        <a:rPr sz="1300" b="0" i="0">
+                          <a:solidFill>
+                            <a:srgbClr val="595959"/>
+                          </a:solidFill>
+                          <a:latin typeface="微软雅黑"/>
+                          <a:ea typeface="微软雅黑"/>
+                        </a:rPr>
+                        <a:t>阻尼,抑制震荡</a:t>
+                      </a:r>
+                    </a:p>
+                  </a:txBody>
+                  <a:tcPr marL="50800" marR="50800" marT="12700" marB="12700" anchor="ctr">
+                    <a:solidFill>
+                      <a:srgbClr val="FFFFFF"/>
+                    </a:solidFill>
+                  </a:tcPr>
+                </a:tc>
+                <a:tc>
+                  <a:txBody>
+                    <a:bodyPr wrap="square"/>
+                    <a:lstStyle/>
+                    <a:p>
+                      <a:pPr algn="ctr"/>
+                      <a:r>
+                        <a:rPr sz="1300" b="0" i="0">
+                          <a:solidFill>
+                            <a:srgbClr val="595959"/>
+                          </a:solidFill>
+                          <a:latin typeface="微软雅黑"/>
+                          <a:ea typeface="微软雅黑"/>
+                        </a:rPr>
+                        <a:t>放大噪声;打杆瞬间 kick</a:t>
+                      </a:r>
+                    </a:p>
+                  </a:txBody>
+                  <a:tcPr marL="50800" marR="50800" marT="12700" marB="12700" anchor="ctr">
+                    <a:solidFill>
+                      <a:srgbClr val="FFFFFF"/>
+                    </a:solidFill>
+                  </a:tcPr>
+                </a:tc>
+              </a:tr>
+            </a:tbl>
+          </a:graphicData>
+        </a:graphic>
+      </p:graphicFrame>
+      <p:sp>
+        <p:nvSpPr>
+          <p:cNvPr id="9" name="Rounded Rectangle 8"/>
+          <p:cNvSpPr/>
+          <p:nvPr/>
+        </p:nvSpPr>
+        <p:spPr>
+          <a:xfrm>
+            <a:off x="502920" y="5074920"/>
+            <a:ext cx="5486400" cy="1371600"/>
+          </a:xfrm>
+          <a:prstGeom prst="roundRect">
+            <a:avLst>
+              <a:gd name="adj" fmla="val 12000"/>
+            </a:avLst>
+          </a:prstGeom>
+          <a:solidFill>
+            <a:srgbClr val="FDF0E6"/>
+          </a:solidFill>
+          <a:ln w="15240">
+            <a:solidFill>
+              <a:srgbClr val="ED7D31"/>
+            </a:solidFill>
+          </a:ln>
+          <a:effectLst/>
+        </p:spPr>
+        <p:style>
+          <a:lnRef idx="1">
+            <a:schemeClr val="accent1"/>
+          </a:lnRef>
+          <a:fillRef idx="3">
+            <a:schemeClr val="accent1"/>
+          </a:fillRef>
+          <a:effectRef idx="2">
+            <a:schemeClr val="accent1"/>
+          </a:effectRef>
+          <a:fontRef idx="minor">
+            <a:schemeClr val="lt1"/>
+          </a:fontRef>
+        </p:style>
+        <p:txBody>
+          <a:bodyPr rtlCol="0" anchor="t" wrap="square" lIns="38100" rIns="38100" tIns="25400" bIns="25400"/>
+          <a:lstStyle/>
+          <a:p>
+            <a:pPr algn="l">
+              <a:spcAft>
+                <a:spcPts val="200"/>
+              </a:spcAft>
+            </a:pPr>
+            <a:r>
+              <a:rPr sz="1450" b="1" i="0">
+                <a:solidFill>
+                  <a:srgbClr val="1F3864"/>
+                </a:solidFill>
+                <a:latin typeface="微软雅黑"/>
+                <a:ea typeface="微软雅黑"/>
+              </a:rPr>
+              <a:t>工程整定顺序</a:t>
+            </a:r>
+          </a:p>
+          <a:p>
+            <a:pPr algn="l">
+              <a:spcAft>
+                <a:spcPts val="200"/>
+              </a:spcAft>
+            </a:pPr>
+            <a:r>
+              <a:rPr sz="1300" b="0" i="0">
+                <a:solidFill>
+                  <a:srgbClr val="595959"/>
+                </a:solidFill>
+                <a:latin typeface="微软雅黑"/>
+                <a:ea typeface="微软雅黑"/>
+              </a:rPr>
+              <a:t>① 先 P:加到临界震荡,回退 ~30%</a:t>
+            </a:r>
+          </a:p>
+          <a:p>
+            <a:pPr algn="l">
+              <a:spcAft>
+                <a:spcPts val="200"/>
+              </a:spcAft>
+            </a:pPr>
+            <a:r>
+              <a:rPr sz="1300" b="0" i="0">
+                <a:solidFill>
+                  <a:srgbClr val="595959"/>
+                </a:solidFill>
+                <a:latin typeface="微软雅黑"/>
+                <a:ea typeface="微软雅黑"/>
+              </a:rPr>
+              <a:t>② 再 D:压住震荡(加阻尼)</a:t>
+            </a:r>
+          </a:p>
+          <a:p>
+            <a:pPr algn="l">
+              <a:spcAft>
+                <a:spcPts val="200"/>
+              </a:spcAft>
+            </a:pPr>
+            <a:r>
+              <a:rPr sz="1300" b="0" i="0">
+                <a:solidFill>
+                  <a:srgbClr val="595959"/>
+                </a:solidFill>
+                <a:latin typeface="微软雅黑"/>
+                <a:ea typeface="微软雅黑"/>
+              </a:rPr>
+              <a:t>③ 最后小 I:只用来消静差</a:t>
+            </a:r>
+          </a:p>
+        </p:txBody>
+      </p:sp>
+      <p:sp>
+        <p:nvSpPr>
+          <p:cNvPr id="10" name="Rounded Rectangle 9"/>
+          <p:cNvSpPr/>
+          <p:nvPr/>
+        </p:nvSpPr>
+        <p:spPr>
+          <a:xfrm>
+            <a:off x="6263640" y="5074920"/>
+            <a:ext cx="5532120" cy="1371600"/>
+          </a:xfrm>
+          <a:prstGeom prst="roundRect">
+            <a:avLst>
+              <a:gd name="adj" fmla="val 12000"/>
+            </a:avLst>
+          </a:prstGeom>
+          <a:solidFill>
+            <a:srgbClr val="F2F4F8"/>
+          </a:solidFill>
+          <a:ln w="15240">
+            <a:solidFill>
+              <a:srgbClr val="2E75B6"/>
+            </a:solidFill>
+          </a:ln>
+          <a:effectLst/>
+        </p:spPr>
+        <p:style>
+          <a:lnRef idx="1">
+            <a:schemeClr val="accent1"/>
+          </a:lnRef>
+          <a:fillRef idx="3">
+            <a:schemeClr val="accent1"/>
+          </a:fillRef>
+          <a:effectRef idx="2">
+            <a:schemeClr val="accent1"/>
+          </a:effectRef>
+          <a:fontRef idx="minor">
+            <a:schemeClr val="lt1"/>
+          </a:fontRef>
+        </p:style>
+        <p:txBody>
+          <a:bodyPr rtlCol="0" anchor="t" wrap="square" lIns="38100" rIns="38100" tIns="25400" bIns="25400"/>
+          <a:lstStyle/>
+          <a:p>
+            <a:pPr algn="l">
+              <a:spcAft>
+                <a:spcPts val="200"/>
+              </a:spcAft>
+            </a:pPr>
+            <a:r>
+              <a:rPr sz="1400" b="1" i="0">
+                <a:solidFill>
+                  <a:srgbClr val="1F3864"/>
+                </a:solidFill>
+                <a:latin typeface="微软雅黑"/>
+                <a:ea typeface="微软雅黑"/>
+              </a:rPr>
+              <a:t>两个进阶细节(下页实现中落地)</a:t>
+            </a:r>
+          </a:p>
+          <a:p>
+            <a:pPr algn="l">
+              <a:spcAft>
+                <a:spcPts val="200"/>
+              </a:spcAft>
+            </a:pPr>
+            <a:r>
+              <a:rPr sz="1300" b="0" i="0">
+                <a:solidFill>
+                  <a:srgbClr val="595959"/>
+                </a:solidFill>
+                <a:latin typeface="微软雅黑"/>
+                <a:ea typeface="微软雅黑"/>
+              </a:rPr>
+              <a:t>▸ D 用测量值微分 → 消 derivative kick</a:t>
+            </a:r>
+          </a:p>
+          <a:p>
+            <a:pPr algn="l">
+              <a:spcAft>
+                <a:spcPts val="200"/>
+              </a:spcAft>
+            </a:pPr>
+            <a:r>
+              <a:rPr sz="1300" b="0" i="0">
+                <a:solidFill>
+                  <a:srgbClr val="595959"/>
+                </a:solidFill>
+                <a:latin typeface="微软雅黑"/>
+                <a:ea typeface="微软雅黑"/>
+              </a:rPr>
+              <a:t>▸ I 用输出限幅 + 回算 → 抗积分饱和</a:t>
+            </a:r>
+          </a:p>
+        </p:txBody>
+      </p:sp>
+    </p:spTree>
+  </p:cSld>
+  <p:clrMapOvr>
+    <a:masterClrMapping/>
+  </p:clrMapOvr>
+</p:sld>
+</file>
+
+<file path=ppt/slides/slide12.xml><?xml version="1.0" encoding="utf-8"?>
+<p:sld xmlns:a="http://schemas.openxmlformats.org/drawingml/2006/main" xmlns:p="http://schemas.openxmlformats.org/presentationml/2006/main" xmlns:r="http://schemas.openxmlformats.org/officeDocument/2006/relationships">
+  <p:cSld>
+    <p:spTree>
+      <p:nvGrpSpPr>
+        <p:cNvPr id="1" name=""/>
+        <p:cNvGrpSpPr/>
+        <p:nvPr/>
+      </p:nvGrpSpPr>
+      <p:grpSpPr/>
+      <p:sp>
+        <p:nvSpPr>
+          <p:cNvPr id="2" name="Rectangle 1"/>
+          <p:cNvSpPr/>
+          <p:nvPr/>
+        </p:nvSpPr>
+        <p:spPr>
+          <a:xfrm>
+            <a:off x="0" y="0"/>
+            <a:ext cx="12191695" cy="868680"/>
+          </a:xfrm>
+          <a:prstGeom prst="rect">
+            <a:avLst/>
+          </a:prstGeom>
+          <a:solidFill>
+            <a:srgbClr val="1F3864"/>
+          </a:solidFill>
+          <a:ln>
+            <a:noFill/>
+          </a:ln>
+          <a:effectLst/>
+        </p:spPr>
+        <p:style>
+          <a:lnRef idx="1">
+            <a:schemeClr val="accent1"/>
+          </a:lnRef>
+          <a:fillRef idx="3">
+            <a:schemeClr val="accent1"/>
+          </a:fillRef>
+          <a:effectRef idx="2">
+            <a:schemeClr val="accent1"/>
+          </a:effectRef>
+          <a:fontRef idx="minor">
+            <a:schemeClr val="lt1"/>
+          </a:fontRef>
+        </p:style>
+        <p:txBody>
+          <a:bodyPr rtlCol="0" anchor="ctr"/>
+          <a:lstStyle/>
+          <a:p>
+            <a:pPr algn="ctr"/>
+          </a:p>
+        </p:txBody>
+      </p:sp>
+      <p:sp>
+        <p:nvSpPr>
+          <p:cNvPr id="3" name="TextBox 2"/>
+          <p:cNvSpPr txBox="1"/>
+          <p:nvPr/>
+        </p:nvSpPr>
+        <p:spPr>
+          <a:xfrm>
+            <a:off x="502920" y="91440"/>
+            <a:ext cx="10241280" cy="731520"/>
+          </a:xfrm>
+          <a:prstGeom prst="rect">
+            <a:avLst/>
+          </a:prstGeom>
+          <a:noFill/>
+        </p:spPr>
+        <p:txBody>
+          <a:bodyPr wrap="square" anchor="ctr" lIns="25400" rIns="25400" tIns="12700" bIns="12700">
+            <a:spAutoFit/>
+          </a:bodyPr>
+          <a:lstStyle/>
+          <a:p>
+            <a:pPr algn="l">
+              <a:spcAft>
+                <a:spcPts val="400"/>
+              </a:spcAft>
+            </a:pPr>
+            <a:r>
+              <a:rPr sz="2600" b="1" i="0">
+                <a:solidFill>
+                  <a:srgbClr val="FFFFFF"/>
+                </a:solidFill>
+                <a:latin typeface="微软雅黑"/>
+                <a:ea typeface="微软雅黑"/>
+              </a:rPr>
+              <a:t>模块⑤ 串级 PID 控制器</a:t>
+            </a:r>
+            <a:r>
+              <a:rPr sz="1400" b="0" i="0">
+                <a:solidFill>
+                  <a:srgbClr val="BDD7EE"/>
+                </a:solidFill>
+                <a:latin typeface="微软雅黑"/>
+                <a:ea typeface="微软雅黑"/>
+              </a:rPr>
+              <a:t>   角度环 P + 角速度环 PID</a:t>
+            </a:r>
+          </a:p>
+        </p:txBody>
+      </p:sp>
+      <p:sp>
+        <p:nvSpPr>
+          <p:cNvPr id="4" name="TextBox 3"/>
+          <p:cNvSpPr txBox="1"/>
+          <p:nvPr/>
+        </p:nvSpPr>
+        <p:spPr>
+          <a:xfrm>
+            <a:off x="11292840" y="6382512"/>
+            <a:ext cx="822960" cy="365760"/>
+          </a:xfrm>
+          <a:prstGeom prst="rect">
+            <a:avLst/>
+          </a:prstGeom>
+          <a:noFill/>
+        </p:spPr>
+        <p:txBody>
+          <a:bodyPr wrap="square" anchor="t" lIns="25400" rIns="25400" tIns="12700" bIns="12700">
+            <a:spAutoFit/>
+          </a:bodyPr>
+          <a:lstStyle/>
+          <a:p>
+            <a:pPr algn="r">
+              <a:spcAft>
+                <a:spcPts val="400"/>
+              </a:spcAft>
+            </a:pPr>
+            <a:r>
+              <a:rPr sz="1200" b="0" i="0">
+                <a:solidFill>
+                  <a:srgbClr val="FFFFFF"/>
+                </a:solidFill>
+                <a:latin typeface="微软雅黑"/>
+                <a:ea typeface="微软雅黑"/>
+              </a:rPr>
+              <a:t>11</a:t>
             </a:r>
           </a:p>
         </p:txBody>
@@ -6549,7 +8294,7 @@
 </p:sld>
 </file>
 
-<file path=ppt/slides/slide11.xml><?xml version="1.0" encoding="utf-8"?>
+<file path=ppt/slides/slide13.xml><?xml version="1.0" encoding="utf-8"?>
 <p:sld xmlns:a="http://schemas.openxmlformats.org/drawingml/2006/main" xmlns:p="http://schemas.openxmlformats.org/presentationml/2006/main" xmlns:r="http://schemas.openxmlformats.org/officeDocument/2006/relationships">
   <p:cSld>
     <p:spTree>
@@ -6688,7 +8433,7 @@
                 <a:latin typeface="微软雅黑"/>
                 <a:ea typeface="微软雅黑"/>
               </a:rPr>
-              <a:t>10</a:t>
+              <a:t>12</a:t>
             </a:r>
           </a:p>
         </p:txBody>
@@ -7232,7 +8977,7 @@
 </p:sld>
 </file>
 
-<file path=ppt/slides/slide12.xml><?xml version="1.0" encoding="utf-8"?>
+<file path=ppt/slides/slide14.xml><?xml version="1.0" encoding="utf-8"?>
 <p:sld xmlns:a="http://schemas.openxmlformats.org/drawingml/2006/main" xmlns:p="http://schemas.openxmlformats.org/presentationml/2006/main" xmlns:r="http://schemas.openxmlformats.org/officeDocument/2006/relationships">
   <p:cSld>
     <p:spTree>
@@ -7371,7 +9116,7 @@
                 <a:latin typeface="微软雅黑"/>
                 <a:ea typeface="微软雅黑"/>
               </a:rPr>
-              <a:t>11</a:t>
+              <a:t>13</a:t>
             </a:r>
           </a:p>
         </p:txBody>
@@ -8486,7 +10231,7 @@
 </p:sld>
 </file>
 
-<file path=ppt/slides/slide13.xml><?xml version="1.0" encoding="utf-8"?>
+<file path=ppt/slides/slide15.xml><?xml version="1.0" encoding="utf-8"?>
 <p:sld xmlns:a="http://schemas.openxmlformats.org/drawingml/2006/main" xmlns:p="http://schemas.openxmlformats.org/presentationml/2006/main" xmlns:r="http://schemas.openxmlformats.org/officeDocument/2006/relationships">
   <p:cSld>
     <p:spTree>
@@ -8625,7 +10370,7 @@
                 <a:latin typeface="微软雅黑"/>
                 <a:ea typeface="微软雅黑"/>
               </a:rPr>
-              <a:t>12</a:t>
+              <a:t>14</a:t>
             </a:r>
           </a:p>
         </p:txBody>
@@ -9871,7 +11616,7 @@
 </p:sld>
 </file>
 
-<file path=ppt/slides/slide14.xml><?xml version="1.0" encoding="utf-8"?>
+<file path=ppt/slides/slide16.xml><?xml version="1.0" encoding="utf-8"?>
 <p:sld xmlns:a="http://schemas.openxmlformats.org/drawingml/2006/main" xmlns:p="http://schemas.openxmlformats.org/presentationml/2006/main" xmlns:r="http://schemas.openxmlformats.org/officeDocument/2006/relationships">
   <p:cSld>
     <p:spTree>
@@ -10010,7 +11755,7 @@
                 <a:latin typeface="微软雅黑"/>
                 <a:ea typeface="微软雅黑"/>
               </a:rPr>
-              <a:t>13</a:t>
+              <a:t>15</a:t>
             </a:r>
           </a:p>
         </p:txBody>
@@ -10687,7 +12432,7 @@
 </p:sld>
 </file>
 
-<file path=ppt/slides/slide15.xml><?xml version="1.0" encoding="utf-8"?>
+<file path=ppt/slides/slide17.xml><?xml version="1.0" encoding="utf-8"?>
 <p:sld xmlns:a="http://schemas.openxmlformats.org/drawingml/2006/main" xmlns:p="http://schemas.openxmlformats.org/presentationml/2006/main" xmlns:r="http://schemas.openxmlformats.org/officeDocument/2006/relationships">
   <p:cSld>
     <p:spTree>
@@ -10826,7 +12571,7 @@
                 <a:latin typeface="微软雅黑"/>
                 <a:ea typeface="微软雅黑"/>
               </a:rPr>
-              <a:t>14</a:t>
+              <a:t>16</a:t>
             </a:r>
           </a:p>
         </p:txBody>
@@ -12014,7 +13759,250 @@
 </p:sld>
 </file>
 
-<file path=ppt/slides/slide16.xml><?xml version="1.0" encoding="utf-8"?>
+<file path=ppt/slides/slide18.xml><?xml version="1.0" encoding="utf-8"?>
+<p:sld xmlns:a="http://schemas.openxmlformats.org/drawingml/2006/main" xmlns:p="http://schemas.openxmlformats.org/presentationml/2006/main" xmlns:r="http://schemas.openxmlformats.org/officeDocument/2006/relationships">
+  <p:cSld>
+    <p:spTree>
+      <p:nvGrpSpPr>
+        <p:cNvPr id="1" name=""/>
+        <p:cNvGrpSpPr/>
+        <p:nvPr/>
+      </p:nvGrpSpPr>
+      <p:grpSpPr/>
+      <p:sp>
+        <p:nvSpPr>
+          <p:cNvPr id="2" name="Rectangle 1"/>
+          <p:cNvSpPr/>
+          <p:nvPr/>
+        </p:nvSpPr>
+        <p:spPr>
+          <a:xfrm>
+            <a:off x="0" y="0"/>
+            <a:ext cx="12191695" cy="6858000"/>
+          </a:xfrm>
+          <a:prstGeom prst="rect">
+            <a:avLst/>
+          </a:prstGeom>
+          <a:solidFill>
+            <a:srgbClr val="1F3864"/>
+          </a:solidFill>
+          <a:ln>
+            <a:noFill/>
+          </a:ln>
+          <a:effectLst/>
+        </p:spPr>
+        <p:style>
+          <a:lnRef idx="1">
+            <a:schemeClr val="accent1"/>
+          </a:lnRef>
+          <a:fillRef idx="3">
+            <a:schemeClr val="accent1"/>
+          </a:fillRef>
+          <a:effectRef idx="2">
+            <a:schemeClr val="accent1"/>
+          </a:effectRef>
+          <a:fontRef idx="minor">
+            <a:schemeClr val="lt1"/>
+          </a:fontRef>
+        </p:style>
+        <p:txBody>
+          <a:bodyPr rtlCol="0" anchor="ctr"/>
+          <a:lstStyle/>
+          <a:p>
+            <a:pPr algn="ctr"/>
+          </a:p>
+        </p:txBody>
+      </p:sp>
+      <p:sp>
+        <p:nvSpPr>
+          <p:cNvPr id="3" name="Rectangle 2"/>
+          <p:cNvSpPr/>
+          <p:nvPr/>
+        </p:nvSpPr>
+        <p:spPr>
+          <a:xfrm>
+            <a:off x="0" y="4297680"/>
+            <a:ext cx="12191695" cy="45720"/>
+          </a:xfrm>
+          <a:prstGeom prst="rect">
+            <a:avLst/>
+          </a:prstGeom>
+          <a:solidFill>
+            <a:srgbClr val="ED7D31"/>
+          </a:solidFill>
+          <a:ln>
+            <a:noFill/>
+          </a:ln>
+          <a:effectLst/>
+        </p:spPr>
+        <p:style>
+          <a:lnRef idx="1">
+            <a:schemeClr val="accent1"/>
+          </a:lnRef>
+          <a:fillRef idx="3">
+            <a:schemeClr val="accent1"/>
+          </a:fillRef>
+          <a:effectRef idx="2">
+            <a:schemeClr val="accent1"/>
+          </a:effectRef>
+          <a:fontRef idx="minor">
+            <a:schemeClr val="lt1"/>
+          </a:fontRef>
+        </p:style>
+        <p:txBody>
+          <a:bodyPr rtlCol="0" anchor="ctr"/>
+          <a:lstStyle/>
+          <a:p>
+            <a:pPr algn="ctr"/>
+          </a:p>
+        </p:txBody>
+      </p:sp>
+      <p:sp>
+        <p:nvSpPr>
+          <p:cNvPr id="4" name="TextBox 3"/>
+          <p:cNvSpPr txBox="1"/>
+          <p:nvPr/>
+        </p:nvSpPr>
+        <p:spPr>
+          <a:xfrm>
+            <a:off x="914400" y="1920240"/>
+            <a:ext cx="10332720" cy="914400"/>
+          </a:xfrm>
+          <a:prstGeom prst="rect">
+            <a:avLst/>
+          </a:prstGeom>
+          <a:noFill/>
+        </p:spPr>
+        <p:txBody>
+          <a:bodyPr wrap="square" anchor="t" lIns="25400" rIns="25400" tIns="12700" bIns="12700">
+            <a:spAutoFit/>
+          </a:bodyPr>
+          <a:lstStyle/>
+          <a:p>
+            <a:pPr algn="l">
+              <a:spcAft>
+                <a:spcPts val="400"/>
+              </a:spcAft>
+            </a:pPr>
+            <a:r>
+              <a:rPr sz="4400" b="1" i="0">
+                <a:solidFill>
+                  <a:srgbClr val="FFFFFF"/>
+                </a:solidFill>
+                <a:latin typeface="微软雅黑"/>
+                <a:ea typeface="微软雅黑"/>
+              </a:rPr>
+              <a:t>谢谢聆听</a:t>
+            </a:r>
+          </a:p>
+        </p:txBody>
+      </p:sp>
+      <p:sp>
+        <p:nvSpPr>
+          <p:cNvPr id="5" name="TextBox 4"/>
+          <p:cNvSpPr txBox="1"/>
+          <p:nvPr/>
+        </p:nvSpPr>
+        <p:spPr>
+          <a:xfrm>
+            <a:off x="914400" y="3063240"/>
+            <a:ext cx="10332720" cy="640080"/>
+          </a:xfrm>
+          <a:prstGeom prst="rect">
+            <a:avLst/>
+          </a:prstGeom>
+          <a:noFill/>
+        </p:spPr>
+        <p:txBody>
+          <a:bodyPr wrap="square" anchor="t" lIns="25400" rIns="25400" tIns="12700" bIns="12700">
+            <a:spAutoFit/>
+          </a:bodyPr>
+          <a:lstStyle/>
+          <a:p>
+            <a:pPr algn="l">
+              <a:spcAft>
+                <a:spcPts val="400"/>
+              </a:spcAft>
+            </a:pPr>
+            <a:r>
+              <a:rPr sz="1800" b="0" i="0">
+                <a:solidFill>
+                  <a:srgbClr val="BDD7EE"/>
+                </a:solidFill>
+                <a:latin typeface="微软雅黑"/>
+                <a:ea typeface="微软雅黑"/>
+              </a:rPr>
+              <a:t>用控制理论 + 嵌入式工程能力,打通'算法-实时系统-硬件'的闭环</a:t>
+            </a:r>
+          </a:p>
+        </p:txBody>
+      </p:sp>
+      <p:sp>
+        <p:nvSpPr>
+          <p:cNvPr id="6" name="TextBox 5"/>
+          <p:cNvSpPr txBox="1"/>
+          <p:nvPr/>
+        </p:nvSpPr>
+        <p:spPr>
+          <a:xfrm>
+            <a:off x="914400" y="4572000"/>
+            <a:ext cx="10332720" cy="1280160"/>
+          </a:xfrm>
+          <a:prstGeom prst="rect">
+            <a:avLst/>
+          </a:prstGeom>
+          <a:noFill/>
+        </p:spPr>
+        <p:txBody>
+          <a:bodyPr wrap="square" anchor="t" lIns="25400" rIns="25400" tIns="12700" bIns="12700">
+            <a:spAutoFit/>
+          </a:bodyPr>
+          <a:lstStyle/>
+          <a:p>
+            <a:pPr algn="l">
+              <a:spcAft>
+                <a:spcPts val="400"/>
+              </a:spcAft>
+            </a:pPr>
+            <a:r>
+              <a:rPr sz="2000" b="1" i="0">
+                <a:solidFill>
+                  <a:srgbClr val="FFFFFF"/>
+                </a:solidFill>
+                <a:latin typeface="微软雅黑"/>
+                <a:ea typeface="微软雅黑"/>
+              </a:rPr>
+              <a:t>Q &amp; A   ·   欢迎拍砖</a:t>
+            </a:r>
+          </a:p>
+          <a:p>
+            <a:pPr algn="l">
+              <a:spcAft>
+                <a:spcPts val="400"/>
+              </a:spcAft>
+            </a:pPr>
+            <a:r>
+              <a:rPr sz="1400" b="0" i="0">
+                <a:solidFill>
+                  <a:srgbClr val="8EAADB"/>
+                </a:solidFill>
+                <a:latin typeface="微软雅黑"/>
+                <a:ea typeface="微软雅黑"/>
+              </a:rPr>
+              <a:t>代码仓库: github.com/xiexiaoan147-cyber/STM32F4_Drone</a:t>
+            </a:r>
+          </a:p>
+        </p:txBody>
+      </p:sp>
+    </p:spTree>
+  </p:cSld>
+  <p:clrMapOvr>
+    <a:masterClrMapping/>
+  </p:clrMapOvr>
+</p:sld>
+</file>
+
+<file path=ppt/slides/slide2.xml><?xml version="1.0" encoding="utf-8"?>
 <p:sld xmlns:a="http://schemas.openxmlformats.org/drawingml/2006/main" xmlns:p="http://schemas.openxmlformats.org/presentationml/2006/main" xmlns:r="http://schemas.openxmlformats.org/officeDocument/2006/relationships">
   <p:cSld>
     <p:spTree>
@@ -12103,17 +14091,7 @@
                 <a:latin typeface="微软雅黑"/>
                 <a:ea typeface="微软雅黑"/>
               </a:rPr>
-              <a:t>工程化与验证</a:t>
-            </a:r>
-            <a:r>
-              <a:rPr sz="1400" b="0" i="0">
-                <a:solidFill>
-                  <a:srgbClr val="BDD7EE"/>
-                </a:solidFill>
-                <a:latin typeface="微软雅黑"/>
-                <a:ea typeface="微软雅黑"/>
-              </a:rPr>
-              <a:t>   让代码'敢上电机'的信心从哪来</a:t>
+              <a:t>分享脉络</a:t>
             </a:r>
           </a:p>
         </p:txBody>
@@ -12153,7 +14131,7 @@
                 <a:latin typeface="微软雅黑"/>
                 <a:ea typeface="微软雅黑"/>
               </a:rPr>
-              <a:t>15</a:t>
+              <a:t>01</a:t>
             </a:r>
           </a:p>
         </p:txBody>
@@ -12210,2368 +14188,7 @@
         </p:nvSpPr>
         <p:spPr>
           <a:xfrm>
-            <a:off x="502920" y="1188720"/>
-            <a:ext cx="3657600" cy="4937760"/>
-          </a:xfrm>
-          <a:prstGeom prst="roundRect">
-            <a:avLst>
-              <a:gd name="adj" fmla="val 12000"/>
-            </a:avLst>
-          </a:prstGeom>
-          <a:solidFill>
-            <a:srgbClr val="F2F4F8"/>
-          </a:solidFill>
-          <a:ln w="15240">
-            <a:solidFill>
-              <a:srgbClr val="2E75B6"/>
-            </a:solidFill>
-          </a:ln>
-          <a:effectLst/>
-        </p:spPr>
-        <p:style>
-          <a:lnRef idx="1">
-            <a:schemeClr val="accent1"/>
-          </a:lnRef>
-          <a:fillRef idx="3">
-            <a:schemeClr val="accent1"/>
-          </a:fillRef>
-          <a:effectRef idx="2">
-            <a:schemeClr val="accent1"/>
-          </a:effectRef>
-          <a:fontRef idx="minor">
-            <a:schemeClr val="lt1"/>
-          </a:fontRef>
-        </p:style>
-        <p:txBody>
-          <a:bodyPr rtlCol="0" anchor="t" wrap="square" lIns="38100" rIns="38100" tIns="25400" bIns="25400"/>
-          <a:lstStyle/>
-          <a:p>
-            <a:pPr algn="l">
-              <a:spcAft>
-                <a:spcPts val="200"/>
-              </a:spcAft>
-            </a:pPr>
-            <a:r>
-              <a:rPr sz="1500" b="1" i="0">
-                <a:solidFill>
-                  <a:srgbClr val="1F3864"/>
-                </a:solidFill>
-                <a:latin typeface="微软雅黑"/>
-                <a:ea typeface="微软雅黑"/>
-              </a:rPr>
-              <a:t>构建体系</a:t>
-            </a:r>
-          </a:p>
-          <a:p>
-            <a:pPr algn="l">
-              <a:spcAft>
-                <a:spcPts val="200"/>
-              </a:spcAft>
-            </a:pPr>
-            <a:r>
-              <a:rPr sz="400" b="0" i="0">
-                <a:solidFill>
-                  <a:srgbClr val="595959"/>
-                </a:solidFill>
-                <a:latin typeface="微软雅黑"/>
-                <a:ea typeface="微软雅黑"/>
-              </a:rPr>
-              <a:t/>
-            </a:r>
-          </a:p>
-          <a:p>
-            <a:pPr algn="l">
-              <a:spcAft>
-                <a:spcPts val="200"/>
-              </a:spcAft>
-            </a:pPr>
-            <a:r>
-              <a:rPr sz="1350" b="0" i="0">
-                <a:solidFill>
-                  <a:srgbClr val="595959"/>
-                </a:solidFill>
-                <a:latin typeface="微软雅黑"/>
-                <a:ea typeface="微软雅黑"/>
-              </a:rPr>
-              <a:t>▸ Makefile + GCC-ARM 交叉编译</a:t>
-            </a:r>
-          </a:p>
-          <a:p>
-            <a:pPr algn="l">
-              <a:spcAft>
-                <a:spcPts val="200"/>
-              </a:spcAft>
-            </a:pPr>
-            <a:r>
-              <a:rPr sz="1350" b="0" i="0">
-                <a:solidFill>
-                  <a:srgbClr val="595959"/>
-                </a:solidFill>
-                <a:latin typeface="微软雅黑"/>
-                <a:ea typeface="微软雅黑"/>
-              </a:rPr>
-              <a:t>▸ 手写 F411 链接脚本(512K/128K)</a:t>
-            </a:r>
-          </a:p>
-          <a:p>
-            <a:pPr algn="l">
-              <a:spcAft>
-                <a:spcPts val="200"/>
-              </a:spcAft>
-            </a:pPr>
-            <a:r>
-              <a:rPr sz="1350" b="0" i="0">
-                <a:solidFill>
-                  <a:srgbClr val="595959"/>
-                </a:solidFill>
-                <a:latin typeface="微软雅黑"/>
-                <a:ea typeface="微软雅黑"/>
-              </a:rPr>
-              <a:t>▸ vendor: HAL/CMSIS/FreeRTOS 源码</a:t>
-            </a:r>
-          </a:p>
-          <a:p>
-            <a:pPr algn="l">
-              <a:spcAft>
-                <a:spcPts val="200"/>
-              </a:spcAft>
-            </a:pPr>
-            <a:r>
-              <a:rPr sz="1350" b="0" i="0">
-                <a:solidFill>
-                  <a:srgbClr val="595959"/>
-                </a:solidFill>
-                <a:latin typeface="微软雅黑"/>
-                <a:ea typeface="微软雅黑"/>
-              </a:rPr>
-              <a:t>▸ 产物 elf/bin/hex + map(size 可查)</a:t>
-            </a:r>
-          </a:p>
-          <a:p>
-            <a:pPr algn="l">
-              <a:spcAft>
-                <a:spcPts val="200"/>
-              </a:spcAft>
-            </a:pPr>
-            <a:r>
-              <a:rPr sz="800" b="0" i="0">
-                <a:solidFill>
-                  <a:srgbClr val="595959"/>
-                </a:solidFill>
-                <a:latin typeface="微软雅黑"/>
-                <a:ea typeface="微软雅黑"/>
-              </a:rPr>
-              <a:t/>
-            </a:r>
-          </a:p>
-          <a:p>
-            <a:pPr algn="l">
-              <a:spcAft>
-                <a:spcPts val="200"/>
-              </a:spcAft>
-            </a:pPr>
-            <a:r>
-              <a:rPr sz="1250" b="0" i="0">
-                <a:solidFill>
-                  <a:srgbClr val="2E75B6"/>
-                </a:solidFill>
-                <a:latin typeface="微软雅黑"/>
-                <a:ea typeface="微软雅黑"/>
-              </a:rPr>
-              <a:t>--gc-sections 裁剪 + newlib-nano</a:t>
-            </a:r>
-          </a:p>
-          <a:p>
-            <a:pPr algn="l">
-              <a:spcAft>
-                <a:spcPts val="200"/>
-              </a:spcAft>
-            </a:pPr>
-            <a:r>
-              <a:rPr sz="1250" b="0" i="0">
-                <a:solidFill>
-                  <a:srgbClr val="2E75B6"/>
-                </a:solidFill>
-                <a:latin typeface="微软雅黑"/>
-                <a:ea typeface="微软雅黑"/>
-              </a:rPr>
-              <a:t>-u _printf_float 支持 %f 日志</a:t>
-            </a:r>
-          </a:p>
-        </p:txBody>
-      </p:sp>
-      <p:sp>
-        <p:nvSpPr>
-          <p:cNvPr id="7" name="Rounded Rectangle 6"/>
-          <p:cNvSpPr/>
-          <p:nvPr/>
-        </p:nvSpPr>
-        <p:spPr>
-          <a:xfrm>
-            <a:off x="4343400" y="1188720"/>
-            <a:ext cx="3657600" cy="4937760"/>
-          </a:xfrm>
-          <a:prstGeom prst="roundRect">
-            <a:avLst>
-              <a:gd name="adj" fmla="val 12000"/>
-            </a:avLst>
-          </a:prstGeom>
-          <a:solidFill>
-            <a:srgbClr val="E2EFDA"/>
-          </a:solidFill>
-          <a:ln w="15240">
-            <a:solidFill>
-              <a:srgbClr val="2E7D32"/>
-            </a:solidFill>
-          </a:ln>
-          <a:effectLst/>
-        </p:spPr>
-        <p:style>
-          <a:lnRef idx="1">
-            <a:schemeClr val="accent1"/>
-          </a:lnRef>
-          <a:fillRef idx="3">
-            <a:schemeClr val="accent1"/>
-          </a:fillRef>
-          <a:effectRef idx="2">
-            <a:schemeClr val="accent1"/>
-          </a:effectRef>
-          <a:fontRef idx="minor">
-            <a:schemeClr val="lt1"/>
-          </a:fontRef>
-        </p:style>
-        <p:txBody>
-          <a:bodyPr rtlCol="0" anchor="t" wrap="square" lIns="38100" rIns="38100" tIns="25400" bIns="25400"/>
-          <a:lstStyle/>
-          <a:p>
-            <a:pPr algn="l">
-              <a:spcAft>
-                <a:spcPts val="200"/>
-              </a:spcAft>
-            </a:pPr>
-            <a:r>
-              <a:rPr sz="1500" b="1" i="0">
-                <a:solidFill>
-                  <a:srgbClr val="2E7D32"/>
-                </a:solidFill>
-                <a:latin typeface="微软雅黑"/>
-                <a:ea typeface="微软雅黑"/>
-              </a:rPr>
-              <a:t>主机端回归测试</a:t>
-            </a:r>
-          </a:p>
-          <a:p>
-            <a:pPr algn="l">
-              <a:spcAft>
-                <a:spcPts val="200"/>
-              </a:spcAft>
-            </a:pPr>
-            <a:r>
-              <a:rPr sz="400" b="0" i="0">
-                <a:solidFill>
-                  <a:srgbClr val="595959"/>
-                </a:solidFill>
-                <a:latin typeface="微软雅黑"/>
-                <a:ea typeface="微软雅黑"/>
-              </a:rPr>
-              <a:t/>
-            </a:r>
-          </a:p>
-          <a:p>
-            <a:pPr algn="l">
-              <a:spcAft>
-                <a:spcPts val="200"/>
-              </a:spcAft>
-            </a:pPr>
-            <a:r>
-              <a:rPr sz="1350" b="0" i="0">
-                <a:solidFill>
-                  <a:srgbClr val="595959"/>
-                </a:solidFill>
-                <a:latin typeface="微软雅黑"/>
-                <a:ea typeface="微软雅黑"/>
-              </a:rPr>
-              <a:t>▸ 桩掉 HAL/RTOS/混控,纯逻辑验证</a:t>
-            </a:r>
-          </a:p>
-          <a:p>
-            <a:pPr algn="l">
-              <a:spcAft>
-                <a:spcPts val="200"/>
-              </a:spcAft>
-            </a:pPr>
-            <a:r>
-              <a:rPr sz="1350" b="1" i="0">
-                <a:solidFill>
-                  <a:srgbClr val="2E7D32"/>
-                </a:solidFill>
-                <a:latin typeface="微软雅黑"/>
-                <a:ea typeface="微软雅黑"/>
-              </a:rPr>
-              <a:t>▸ 11 组场景 · 27 项断言全过</a:t>
-            </a:r>
-          </a:p>
-          <a:p>
-            <a:pPr algn="l">
-              <a:spcAft>
-                <a:spcPts val="200"/>
-              </a:spcAft>
-            </a:pPr>
-            <a:r>
-              <a:rPr sz="400" b="0" i="0">
-                <a:solidFill>
-                  <a:srgbClr val="595959"/>
-                </a:solidFill>
-                <a:latin typeface="微软雅黑"/>
-                <a:ea typeface="微软雅黑"/>
-              </a:rPr>
-              <a:t/>
-            </a:r>
-          </a:p>
-          <a:p>
-            <a:pPr algn="l">
-              <a:spcAft>
-                <a:spcPts val="200"/>
-              </a:spcAft>
-            </a:pPr>
-            <a:r>
-              <a:rPr sz="1250" b="0" i="0">
-                <a:solidFill>
-                  <a:srgbClr val="595959"/>
-                </a:solidFill>
-                <a:latin typeface="微软雅黑"/>
-                <a:ea typeface="微软雅黑"/>
-              </a:rPr>
-              <a:t>覆盖:状态机全路径/az闭环方向</a:t>
-            </a:r>
-          </a:p>
-          <a:p>
-            <a:pPr algn="l">
-              <a:spcAft>
-                <a:spcPts val="200"/>
-              </a:spcAft>
-            </a:pPr>
-            <a:r>
-              <a:rPr sz="1250" b="0" i="0">
-                <a:solidFill>
-                  <a:srgbClr val="595959"/>
-                </a:solidFill>
-                <a:latin typeface="微软雅黑"/>
-                <a:ea typeface="微软雅黑"/>
-              </a:rPr>
-              <a:t>PID无D踢腿/积分限幅/急停恢复</a:t>
-            </a:r>
-          </a:p>
-          <a:p>
-            <a:pPr algn="l">
-              <a:spcAft>
-                <a:spcPts val="200"/>
-              </a:spcAft>
-            </a:pPr>
-            <a:r>
-              <a:rPr sz="1250" b="0" i="0">
-                <a:solidFill>
-                  <a:srgbClr val="595959"/>
-                </a:solidFill>
-                <a:latin typeface="微软雅黑"/>
-                <a:ea typeface="微软雅黑"/>
-              </a:rPr>
-              <a:t>NaN防护/失控缓降/心跳机制</a:t>
-            </a:r>
-          </a:p>
-          <a:p>
-            <a:pPr algn="l">
-              <a:spcAft>
-                <a:spcPts val="200"/>
-              </a:spcAft>
-            </a:pPr>
-            <a:r>
-              <a:rPr sz="800" b="0" i="0">
-                <a:solidFill>
-                  <a:srgbClr val="595959"/>
-                </a:solidFill>
-                <a:latin typeface="微软雅黑"/>
-                <a:ea typeface="微软雅黑"/>
-              </a:rPr>
-              <a:t/>
-            </a:r>
-          </a:p>
-          <a:p>
-            <a:pPr algn="l">
-              <a:spcAft>
-                <a:spcPts val="200"/>
-              </a:spcAft>
-            </a:pPr>
-            <a:r>
-              <a:rPr sz="1300" b="1" i="0">
-                <a:solidFill>
-                  <a:srgbClr val="1F3864"/>
-                </a:solidFill>
-                <a:latin typeface="微软雅黑"/>
-                <a:ea typeface="微软雅黑"/>
-              </a:rPr>
-              <a:t>→ 改控制逻辑可秒级回归</a:t>
-            </a:r>
-          </a:p>
-        </p:txBody>
-      </p:sp>
-      <p:sp>
-        <p:nvSpPr>
-          <p:cNvPr id="8" name="Rounded Rectangle 7"/>
-          <p:cNvSpPr/>
-          <p:nvPr/>
-        </p:nvSpPr>
-        <p:spPr>
-          <a:xfrm>
-            <a:off x="8183879" y="1188720"/>
-            <a:ext cx="3611880" cy="4937760"/>
-          </a:xfrm>
-          <a:prstGeom prst="roundRect">
-            <a:avLst>
-              <a:gd name="adj" fmla="val 12000"/>
-            </a:avLst>
-          </a:prstGeom>
-          <a:solidFill>
-            <a:srgbClr val="FDF0E6"/>
-          </a:solidFill>
-          <a:ln w="15240">
-            <a:solidFill>
-              <a:srgbClr val="ED7D31"/>
-            </a:solidFill>
-          </a:ln>
-          <a:effectLst/>
-        </p:spPr>
-        <p:style>
-          <a:lnRef idx="1">
-            <a:schemeClr val="accent1"/>
-          </a:lnRef>
-          <a:fillRef idx="3">
-            <a:schemeClr val="accent1"/>
-          </a:fillRef>
-          <a:effectRef idx="2">
-            <a:schemeClr val="accent1"/>
-          </a:effectRef>
-          <a:fontRef idx="minor">
-            <a:schemeClr val="lt1"/>
-          </a:fontRef>
-        </p:style>
-        <p:txBody>
-          <a:bodyPr rtlCol="0" anchor="t" wrap="square" lIns="38100" rIns="38100" tIns="25400" bIns="25400"/>
-          <a:lstStyle/>
-          <a:p>
-            <a:pPr algn="l">
-              <a:spcAft>
-                <a:spcPts val="200"/>
-              </a:spcAft>
-            </a:pPr>
-            <a:r>
-              <a:rPr sz="1500" b="1" i="0">
-                <a:solidFill>
-                  <a:srgbClr val="ED7D31"/>
-                </a:solidFill>
-                <a:latin typeface="微软雅黑"/>
-                <a:ea typeface="微软雅黑"/>
-              </a:rPr>
-              <a:t>静态检查 + 诚实边界</a:t>
-            </a:r>
-          </a:p>
-          <a:p>
-            <a:pPr algn="l">
-              <a:spcAft>
-                <a:spcPts val="200"/>
-              </a:spcAft>
-            </a:pPr>
-            <a:r>
-              <a:rPr sz="400" b="0" i="0">
-                <a:solidFill>
-                  <a:srgbClr val="595959"/>
-                </a:solidFill>
-                <a:latin typeface="微软雅黑"/>
-                <a:ea typeface="微软雅黑"/>
-              </a:rPr>
-              <a:t/>
-            </a:r>
-          </a:p>
-          <a:p>
-            <a:pPr algn="l">
-              <a:spcAft>
-                <a:spcPts val="200"/>
-              </a:spcAft>
-            </a:pPr>
-            <a:r>
-              <a:rPr sz="1350" b="0" i="0">
-                <a:solidFill>
-                  <a:srgbClr val="595959"/>
-                </a:solidFill>
-                <a:latin typeface="微软雅黑"/>
-                <a:ea typeface="微软雅黑"/>
-              </a:rPr>
-              <a:t>▸ 全树 39 源文件 -fsyntax-only</a:t>
-            </a:r>
-          </a:p>
-          <a:p>
-            <a:pPr algn="l">
-              <a:spcAft>
-                <a:spcPts val="200"/>
-              </a:spcAft>
-            </a:pPr>
-            <a:r>
-              <a:rPr sz="1200" b="0" i="0">
-                <a:solidFill>
-                  <a:srgbClr val="595959"/>
-                </a:solidFill>
-                <a:latin typeface="微软雅黑"/>
-                <a:ea typeface="微软雅黑"/>
-              </a:rPr>
-              <a:t>   (应用+HAL+FreeRTOS 真实头)</a:t>
-            </a:r>
-          </a:p>
-          <a:p>
-            <a:pPr algn="l">
-              <a:spcAft>
-                <a:spcPts val="200"/>
-              </a:spcAft>
-            </a:pPr>
-            <a:r>
-              <a:rPr sz="800" b="0" i="0">
-                <a:solidFill>
-                  <a:srgbClr val="595959"/>
-                </a:solidFill>
-                <a:latin typeface="微软雅黑"/>
-                <a:ea typeface="微软雅黑"/>
-              </a:rPr>
-              <a:t/>
-            </a:r>
-          </a:p>
-          <a:p>
-            <a:pPr algn="l">
-              <a:spcAft>
-                <a:spcPts val="200"/>
-              </a:spcAft>
-            </a:pPr>
-            <a:r>
-              <a:rPr sz="1350" b="1" i="0">
-                <a:solidFill>
-                  <a:srgbClr val="C00000"/>
-                </a:solidFill>
-                <a:latin typeface="微软雅黑"/>
-                <a:ea typeface="微软雅黑"/>
-              </a:rPr>
-              <a:t>尚未完成(如实):</a:t>
-            </a:r>
-          </a:p>
-          <a:p>
-            <a:pPr algn="l">
-              <a:spcAft>
-                <a:spcPts val="200"/>
-              </a:spcAft>
-            </a:pPr>
-            <a:r>
-              <a:rPr sz="1250" b="0" i="0">
-                <a:solidFill>
-                  <a:srgbClr val="C00000"/>
-                </a:solidFill>
-                <a:latin typeface="微软雅黑"/>
-                <a:ea typeface="微软雅黑"/>
-              </a:rPr>
-              <a:t>○ 沙箱无 arm 工具链,</a:t>
-            </a:r>
-          </a:p>
-          <a:p>
-            <a:pPr algn="l">
-              <a:spcAft>
-                <a:spcPts val="200"/>
-              </a:spcAft>
-            </a:pPr>
-            <a:r>
-              <a:rPr sz="1250" b="0" i="0">
-                <a:solidFill>
-                  <a:srgbClr val="C00000"/>
-                </a:solidFill>
-                <a:latin typeface="微软雅黑"/>
-                <a:ea typeface="微软雅黑"/>
-              </a:rPr>
-              <a:t>   实机编译待本地 make</a:t>
-            </a:r>
-          </a:p>
-          <a:p>
-            <a:pPr algn="l">
-              <a:spcAft>
-                <a:spcPts val="200"/>
-              </a:spcAft>
-            </a:pPr>
-            <a:r>
-              <a:rPr sz="1250" b="0" i="0">
-                <a:solidFill>
-                  <a:srgbClr val="C00000"/>
-                </a:solidFill>
-                <a:latin typeface="微软雅黑"/>
-                <a:ea typeface="微软雅黑"/>
-              </a:rPr>
-              <a:t>○ 台架验证进行中</a:t>
-            </a:r>
-          </a:p>
-          <a:p>
-            <a:pPr algn="l">
-              <a:spcAft>
-                <a:spcPts val="200"/>
-              </a:spcAft>
-            </a:pPr>
-            <a:r>
-              <a:rPr sz="800" b="0" i="0">
-                <a:solidFill>
-                  <a:srgbClr val="595959"/>
-                </a:solidFill>
-                <a:latin typeface="微软雅黑"/>
-                <a:ea typeface="微软雅黑"/>
-              </a:rPr>
-              <a:t/>
-            </a:r>
-          </a:p>
-          <a:p>
-            <a:pPr algn="l">
-              <a:spcAft>
-                <a:spcPts val="200"/>
-              </a:spcAft>
-            </a:pPr>
-            <a:r>
-              <a:rPr sz="1300" b="1" i="0">
-                <a:solidFill>
-                  <a:srgbClr val="1F3864"/>
-                </a:solidFill>
-                <a:latin typeface="微软雅黑"/>
-                <a:ea typeface="微软雅黑"/>
-              </a:rPr>
-              <a:t>原则:验证到哪,说到哪</a:t>
-            </a:r>
-          </a:p>
-        </p:txBody>
-      </p:sp>
-    </p:spTree>
-  </p:cSld>
-  <p:clrMapOvr>
-    <a:masterClrMapping/>
-  </p:clrMapOvr>
-</p:sld>
-</file>
-
-<file path=ppt/slides/slide17.xml><?xml version="1.0" encoding="utf-8"?>
-<p:sld xmlns:a="http://schemas.openxmlformats.org/drawingml/2006/main" xmlns:p="http://schemas.openxmlformats.org/presentationml/2006/main" xmlns:r="http://schemas.openxmlformats.org/officeDocument/2006/relationships">
-  <p:cSld>
-    <p:spTree>
-      <p:nvGrpSpPr>
-        <p:cNvPr id="1" name=""/>
-        <p:cNvGrpSpPr/>
-        <p:nvPr/>
-      </p:nvGrpSpPr>
-      <p:grpSpPr/>
-      <p:sp>
-        <p:nvSpPr>
-          <p:cNvPr id="2" name="Rectangle 1"/>
-          <p:cNvSpPr/>
-          <p:nvPr/>
-        </p:nvSpPr>
-        <p:spPr>
-          <a:xfrm>
-            <a:off x="0" y="0"/>
-            <a:ext cx="12191695" cy="868680"/>
-          </a:xfrm>
-          <a:prstGeom prst="rect">
-            <a:avLst/>
-          </a:prstGeom>
-          <a:solidFill>
-            <a:srgbClr val="1F3864"/>
-          </a:solidFill>
-          <a:ln>
-            <a:noFill/>
-          </a:ln>
-          <a:effectLst/>
-        </p:spPr>
-        <p:style>
-          <a:lnRef idx="1">
-            <a:schemeClr val="accent1"/>
-          </a:lnRef>
-          <a:fillRef idx="3">
-            <a:schemeClr val="accent1"/>
-          </a:fillRef>
-          <a:effectRef idx="2">
-            <a:schemeClr val="accent1"/>
-          </a:effectRef>
-          <a:fontRef idx="minor">
-            <a:schemeClr val="lt1"/>
-          </a:fontRef>
-        </p:style>
-        <p:txBody>
-          <a:bodyPr rtlCol="0" anchor="ctr"/>
-          <a:lstStyle/>
-          <a:p>
-            <a:pPr algn="ctr"/>
-          </a:p>
-        </p:txBody>
-      </p:sp>
-      <p:sp>
-        <p:nvSpPr>
-          <p:cNvPr id="3" name="TextBox 2"/>
-          <p:cNvSpPr txBox="1"/>
-          <p:nvPr/>
-        </p:nvSpPr>
-        <p:spPr>
-          <a:xfrm>
-            <a:off x="502920" y="91440"/>
-            <a:ext cx="10241280" cy="731520"/>
-          </a:xfrm>
-          <a:prstGeom prst="rect">
-            <a:avLst/>
-          </a:prstGeom>
-          <a:noFill/>
-        </p:spPr>
-        <p:txBody>
-          <a:bodyPr wrap="square" anchor="ctr" lIns="25400" rIns="25400" tIns="12700" bIns="12700">
-            <a:spAutoFit/>
-          </a:bodyPr>
-          <a:lstStyle/>
-          <a:p>
-            <a:pPr algn="l">
-              <a:spcAft>
-                <a:spcPts val="400"/>
-              </a:spcAft>
-            </a:pPr>
-            <a:r>
-              <a:rPr sz="2600" b="1" i="0">
-                <a:solidFill>
-                  <a:srgbClr val="FFFFFF"/>
-                </a:solidFill>
-                <a:latin typeface="微软雅黑"/>
-                <a:ea typeface="微软雅黑"/>
-              </a:rPr>
-              <a:t>踩坑实录</a:t>
-            </a:r>
-            <a:r>
-              <a:rPr sz="1400" b="0" i="0">
-                <a:solidFill>
-                  <a:srgbClr val="BDD7EE"/>
-                </a:solidFill>
-                <a:latin typeface="微软雅黑"/>
-                <a:ea typeface="微软雅黑"/>
-              </a:rPr>
-              <a:t>   四个最有代表性的 bug</a:t>
-            </a:r>
-          </a:p>
-        </p:txBody>
-      </p:sp>
-      <p:sp>
-        <p:nvSpPr>
-          <p:cNvPr id="4" name="TextBox 3"/>
-          <p:cNvSpPr txBox="1"/>
-          <p:nvPr/>
-        </p:nvSpPr>
-        <p:spPr>
-          <a:xfrm>
-            <a:off x="11292840" y="6382512"/>
-            <a:ext cx="822960" cy="365760"/>
-          </a:xfrm>
-          <a:prstGeom prst="rect">
-            <a:avLst/>
-          </a:prstGeom>
-          <a:noFill/>
-        </p:spPr>
-        <p:txBody>
-          <a:bodyPr wrap="square" anchor="t" lIns="25400" rIns="25400" tIns="12700" bIns="12700">
-            <a:spAutoFit/>
-          </a:bodyPr>
-          <a:lstStyle/>
-          <a:p>
-            <a:pPr algn="r">
-              <a:spcAft>
-                <a:spcPts val="400"/>
-              </a:spcAft>
-            </a:pPr>
-            <a:r>
-              <a:rPr sz="1200" b="0" i="0">
-                <a:solidFill>
-                  <a:srgbClr val="FFFFFF"/>
-                </a:solidFill>
-                <a:latin typeface="微软雅黑"/>
-                <a:ea typeface="微软雅黑"/>
-              </a:rPr>
-              <a:t>16</a:t>
-            </a:r>
-          </a:p>
-        </p:txBody>
-      </p:sp>
-      <p:sp>
-        <p:nvSpPr>
-          <p:cNvPr id="5" name="Rectangle 4"/>
-          <p:cNvSpPr/>
-          <p:nvPr/>
-        </p:nvSpPr>
-        <p:spPr>
-          <a:xfrm>
-            <a:off x="0" y="868680"/>
-            <a:ext cx="12191695" cy="41148"/>
-          </a:xfrm>
-          <a:prstGeom prst="rect">
-            <a:avLst/>
-          </a:prstGeom>
-          <a:solidFill>
-            <a:srgbClr val="ED7D31"/>
-          </a:solidFill>
-          <a:ln>
-            <a:noFill/>
-          </a:ln>
-          <a:effectLst/>
-        </p:spPr>
-        <p:style>
-          <a:lnRef idx="1">
-            <a:schemeClr val="accent1"/>
-          </a:lnRef>
-          <a:fillRef idx="3">
-            <a:schemeClr val="accent1"/>
-          </a:fillRef>
-          <a:effectRef idx="2">
-            <a:schemeClr val="accent1"/>
-          </a:effectRef>
-          <a:fontRef idx="minor">
-            <a:schemeClr val="lt1"/>
-          </a:fontRef>
-        </p:style>
-        <p:txBody>
-          <a:bodyPr rtlCol="0" anchor="ctr"/>
-          <a:lstStyle/>
-          <a:p>
-            <a:pPr algn="ctr"/>
-          </a:p>
-        </p:txBody>
-      </p:sp>
-      <p:sp>
-        <p:nvSpPr>
-          <p:cNvPr id="6" name="Rounded Rectangle 5"/>
-          <p:cNvSpPr/>
-          <p:nvPr/>
-        </p:nvSpPr>
-        <p:spPr>
-          <a:xfrm>
-            <a:off x="502920" y="1280160"/>
-            <a:ext cx="5532120" cy="2331720"/>
-          </a:xfrm>
-          <a:prstGeom prst="roundRect">
-            <a:avLst>
-              <a:gd name="adj" fmla="val 12000"/>
-            </a:avLst>
-          </a:prstGeom>
-          <a:solidFill>
-            <a:srgbClr val="F2F4F8"/>
-          </a:solidFill>
-          <a:ln w="15240">
-            <a:solidFill>
-              <a:srgbClr val="C00000"/>
-            </a:solidFill>
-          </a:ln>
-          <a:effectLst/>
-        </p:spPr>
-        <p:style>
-          <a:lnRef idx="1">
-            <a:schemeClr val="accent1"/>
-          </a:lnRef>
-          <a:fillRef idx="3">
-            <a:schemeClr val="accent1"/>
-          </a:fillRef>
-          <a:effectRef idx="2">
-            <a:schemeClr val="accent1"/>
-          </a:effectRef>
-          <a:fontRef idx="minor">
-            <a:schemeClr val="lt1"/>
-          </a:fontRef>
-        </p:style>
-        <p:txBody>
-          <a:bodyPr rtlCol="0" anchor="t" wrap="square" lIns="38100" rIns="38100" tIns="25400" bIns="25400"/>
-          <a:lstStyle/>
-          <a:p>
-            <a:pPr algn="l">
-              <a:spcAft>
-                <a:spcPts val="200"/>
-              </a:spcAft>
-            </a:pPr>
-            <a:r>
-              <a:rPr sz="1550" b="1" i="0">
-                <a:solidFill>
-                  <a:srgbClr val="C00000"/>
-                </a:solidFill>
-                <a:latin typeface="微软雅黑"/>
-                <a:ea typeface="微软雅黑"/>
-              </a:rPr>
-              <a:t>坑1: 转置旋转矩阵</a:t>
-            </a:r>
-          </a:p>
-          <a:p>
-            <a:pPr algn="l">
-              <a:spcAft>
-                <a:spcPts val="200"/>
-              </a:spcAft>
-            </a:pPr>
-            <a:r>
-              <a:rPr sz="1250" b="0" i="0">
-                <a:solidFill>
-                  <a:srgbClr val="595959"/>
-                </a:solidFill>
-                <a:latin typeface="微软雅黑"/>
-                <a:ea typeface="微软雅黑"/>
-              </a:rPr>
-              <a:t>现象:大倾角悬停油门误判</a:t>
-            </a:r>
-          </a:p>
-          <a:p>
-            <a:pPr algn="l">
-              <a:spcAft>
-                <a:spcPts val="200"/>
-              </a:spcAft>
-            </a:pPr>
-            <a:r>
-              <a:rPr sz="1250" b="0" i="0">
-                <a:solidFill>
-                  <a:srgbClr val="595959"/>
-                </a:solidFill>
-                <a:latin typeface="微软雅黑"/>
-                <a:ea typeface="微软雅黑"/>
-              </a:rPr>
-              <a:t>根因:az 系数两项符号写反,等价用了 Rᵀ</a:t>
-            </a:r>
-          </a:p>
-          <a:p>
-            <a:pPr algn="l">
-              <a:spcAft>
-                <a:spcPts val="200"/>
-              </a:spcAft>
-            </a:pPr>
-            <a:r>
-              <a:rPr sz="1250" b="1" i="0">
-                <a:solidFill>
-                  <a:srgbClr val="C00000"/>
-                </a:solidFill>
-                <a:latin typeface="微软雅黑"/>
-                <a:ea typeface="微软雅黑"/>
-              </a:rPr>
-              <a:t>修复:对照推导改系数 + 回归用例</a:t>
-            </a:r>
-          </a:p>
-        </p:txBody>
-      </p:sp>
-      <p:sp>
-        <p:nvSpPr>
-          <p:cNvPr id="7" name="Rounded Rectangle 6"/>
-          <p:cNvSpPr/>
-          <p:nvPr/>
-        </p:nvSpPr>
-        <p:spPr>
-          <a:xfrm>
-            <a:off x="6217920" y="1280160"/>
-            <a:ext cx="5532120" cy="2331720"/>
-          </a:xfrm>
-          <a:prstGeom prst="roundRect">
-            <a:avLst>
-              <a:gd name="adj" fmla="val 12000"/>
-            </a:avLst>
-          </a:prstGeom>
-          <a:solidFill>
-            <a:srgbClr val="F2F4F8"/>
-          </a:solidFill>
-          <a:ln w="15240">
-            <a:solidFill>
-              <a:srgbClr val="ED7D31"/>
-            </a:solidFill>
-          </a:ln>
-          <a:effectLst/>
-        </p:spPr>
-        <p:style>
-          <a:lnRef idx="1">
-            <a:schemeClr val="accent1"/>
-          </a:lnRef>
-          <a:fillRef idx="3">
-            <a:schemeClr val="accent1"/>
-          </a:fillRef>
-          <a:effectRef idx="2">
-            <a:schemeClr val="accent1"/>
-          </a:effectRef>
-          <a:fontRef idx="minor">
-            <a:schemeClr val="lt1"/>
-          </a:fontRef>
-        </p:style>
-        <p:txBody>
-          <a:bodyPr rtlCol="0" anchor="t" wrap="square" lIns="38100" rIns="38100" tIns="25400" bIns="25400"/>
-          <a:lstStyle/>
-          <a:p>
-            <a:pPr algn="l">
-              <a:spcAft>
-                <a:spcPts val="200"/>
-              </a:spcAft>
-            </a:pPr>
-            <a:r>
-              <a:rPr sz="1550" b="1" i="0">
-                <a:solidFill>
-                  <a:srgbClr val="ED7D31"/>
-                </a:solidFill>
-                <a:latin typeface="微软雅黑"/>
-                <a:ea typeface="微软雅黑"/>
-              </a:rPr>
-              <a:t>坑2: HAL 时基冻结</a:t>
-            </a:r>
-          </a:p>
-          <a:p>
-            <a:pPr algn="l">
-              <a:spcAft>
-                <a:spcPts val="200"/>
-              </a:spcAft>
-            </a:pPr>
-            <a:r>
-              <a:rPr sz="1250" b="0" i="0">
-                <a:solidFill>
-                  <a:srgbClr val="595959"/>
-                </a:solidFill>
-                <a:latin typeface="微软雅黑"/>
-                <a:ea typeface="微软雅黑"/>
-              </a:rPr>
-              <a:t>现象:RTOS 启动后 I²C 全部超时</a:t>
-            </a:r>
-          </a:p>
-          <a:p>
-            <a:pPr algn="l">
-              <a:spcAft>
-                <a:spcPts val="200"/>
-              </a:spcAft>
-            </a:pPr>
-            <a:r>
-              <a:rPr sz="1250" b="0" i="0">
-                <a:solidFill>
-                  <a:srgbClr val="595959"/>
-                </a:solidFill>
-                <a:latin typeface="微软雅黑"/>
-                <a:ea typeface="微软雅黑"/>
-              </a:rPr>
-              <a:t>根因:内核接管 SysTick,HAL_IncTick 没人调</a:t>
-            </a:r>
-          </a:p>
-          <a:p>
-            <a:pPr algn="l">
-              <a:spcAft>
-                <a:spcPts val="200"/>
-              </a:spcAft>
-            </a:pPr>
-            <a:r>
-              <a:rPr sz="1250" b="1" i="0">
-                <a:solidFill>
-                  <a:srgbClr val="ED7D31"/>
-                </a:solidFill>
-                <a:latin typeface="微软雅黑"/>
-                <a:ea typeface="微软雅黑"/>
-              </a:rPr>
-              <a:t>修复:SysTick 中断里双跳 HAL+RTOS</a:t>
-            </a:r>
-          </a:p>
-        </p:txBody>
-      </p:sp>
-      <p:sp>
-        <p:nvSpPr>
-          <p:cNvPr id="8" name="Rounded Rectangle 7"/>
-          <p:cNvSpPr/>
-          <p:nvPr/>
-        </p:nvSpPr>
-        <p:spPr>
-          <a:xfrm>
-            <a:off x="502920" y="3794760"/>
-            <a:ext cx="5532120" cy="2331720"/>
-          </a:xfrm>
-          <a:prstGeom prst="roundRect">
-            <a:avLst>
-              <a:gd name="adj" fmla="val 12000"/>
-            </a:avLst>
-          </a:prstGeom>
-          <a:solidFill>
-            <a:srgbClr val="F2F4F8"/>
-          </a:solidFill>
-          <a:ln w="15240">
-            <a:solidFill>
-              <a:srgbClr val="2E75B6"/>
-            </a:solidFill>
-          </a:ln>
-          <a:effectLst/>
-        </p:spPr>
-        <p:style>
-          <a:lnRef idx="1">
-            <a:schemeClr val="accent1"/>
-          </a:lnRef>
-          <a:fillRef idx="3">
-            <a:schemeClr val="accent1"/>
-          </a:fillRef>
-          <a:effectRef idx="2">
-            <a:schemeClr val="accent1"/>
-          </a:effectRef>
-          <a:fontRef idx="minor">
-            <a:schemeClr val="lt1"/>
-          </a:fontRef>
-        </p:style>
-        <p:txBody>
-          <a:bodyPr rtlCol="0" anchor="t" wrap="square" lIns="38100" rIns="38100" tIns="25400" bIns="25400"/>
-          <a:lstStyle/>
-          <a:p>
-            <a:pPr algn="l">
-              <a:spcAft>
-                <a:spcPts val="200"/>
-              </a:spcAft>
-            </a:pPr>
-            <a:r>
-              <a:rPr sz="1550" b="1" i="0">
-                <a:solidFill>
-                  <a:srgbClr val="2E75B6"/>
-                </a:solidFill>
-                <a:latin typeface="微软雅黑"/>
-                <a:ea typeface="微软雅黑"/>
-              </a:rPr>
-              <a:t>坑3: I²C 并发竞争</a:t>
-            </a:r>
-          </a:p>
-          <a:p>
-            <a:pPr algn="l">
-              <a:spcAft>
-                <a:spcPts val="200"/>
-              </a:spcAft>
-            </a:pPr>
-            <a:r>
-              <a:rPr sz="1250" b="0" i="0">
-                <a:solidFill>
-                  <a:srgbClr val="595959"/>
-                </a:solidFill>
-                <a:latin typeface="微软雅黑"/>
-                <a:ea typeface="微软雅黑"/>
-              </a:rPr>
-              <a:t>现象:校准期两任务同时读总线</a:t>
-            </a:r>
-          </a:p>
-          <a:p>
-            <a:pPr algn="l">
-              <a:spcAft>
-                <a:spcPts val="200"/>
-              </a:spcAft>
-            </a:pPr>
-            <a:r>
-              <a:rPr sz="1250" b="0" i="0">
-                <a:solidFill>
-                  <a:srgbClr val="595959"/>
-                </a:solidFill>
-                <a:latin typeface="微软雅黑"/>
-                <a:ea typeface="微软雅黑"/>
-              </a:rPr>
-              <a:t>根因:HAL I²C 句柄无锁,状态被破坏</a:t>
-            </a:r>
-          </a:p>
-          <a:p>
-            <a:pPr algn="l">
-              <a:spcAft>
-                <a:spcPts val="200"/>
-              </a:spcAft>
-            </a:pPr>
-            <a:r>
-              <a:rPr sz="1250" b="1" i="0">
-                <a:solidFill>
-                  <a:srgbClr val="2E75B6"/>
-                </a:solidFill>
-                <a:latin typeface="微软雅黑"/>
-                <a:ea typeface="微软雅黑"/>
-              </a:rPr>
-              <a:t>修复:校准移入采集任务,单一拥有者</a:t>
-            </a:r>
-          </a:p>
-        </p:txBody>
-      </p:sp>
-      <p:sp>
-        <p:nvSpPr>
-          <p:cNvPr id="9" name="Rounded Rectangle 8"/>
-          <p:cNvSpPr/>
-          <p:nvPr/>
-        </p:nvSpPr>
-        <p:spPr>
-          <a:xfrm>
-            <a:off x="6217920" y="3794760"/>
-            <a:ext cx="5532120" cy="2331720"/>
-          </a:xfrm>
-          <a:prstGeom prst="roundRect">
-            <a:avLst>
-              <a:gd name="adj" fmla="val 12000"/>
-            </a:avLst>
-          </a:prstGeom>
-          <a:solidFill>
-            <a:srgbClr val="F2F4F8"/>
-          </a:solidFill>
-          <a:ln w="15240">
-            <a:solidFill>
-              <a:srgbClr val="2E7D32"/>
-            </a:solidFill>
-          </a:ln>
-          <a:effectLst/>
-        </p:spPr>
-        <p:style>
-          <a:lnRef idx="1">
-            <a:schemeClr val="accent1"/>
-          </a:lnRef>
-          <a:fillRef idx="3">
-            <a:schemeClr val="accent1"/>
-          </a:fillRef>
-          <a:effectRef idx="2">
-            <a:schemeClr val="accent1"/>
-          </a:effectRef>
-          <a:fontRef idx="minor">
-            <a:schemeClr val="lt1"/>
-          </a:fontRef>
-        </p:style>
-        <p:txBody>
-          <a:bodyPr rtlCol="0" anchor="t" wrap="square" lIns="38100" rIns="38100" tIns="25400" bIns="25400"/>
-          <a:lstStyle/>
-          <a:p>
-            <a:pPr algn="l">
-              <a:spcAft>
-                <a:spcPts val="200"/>
-              </a:spcAft>
-            </a:pPr>
-            <a:r>
-              <a:rPr sz="1550" b="1" i="0">
-                <a:solidFill>
-                  <a:srgbClr val="2E7D32"/>
-                </a:solidFill>
-                <a:latin typeface="微软雅黑"/>
-                <a:ea typeface="微软雅黑"/>
-              </a:rPr>
-              <a:t>坑4: 队列速率失配</a:t>
-            </a:r>
-          </a:p>
-          <a:p>
-            <a:pPr algn="l">
-              <a:spcAft>
-                <a:spcPts val="200"/>
-              </a:spcAft>
-            </a:pPr>
-            <a:r>
-              <a:rPr sz="1250" b="0" i="0">
-                <a:solidFill>
-                  <a:srgbClr val="595959"/>
-                </a:solidFill>
-                <a:latin typeface="微软雅黑"/>
-                <a:ea typeface="微软雅黑"/>
-              </a:rPr>
-              <a:t>现象:500Hz 生产/200Hz 消费,7s 后恒满</a:t>
-            </a:r>
-          </a:p>
-          <a:p>
-            <a:pPr algn="l">
-              <a:spcAft>
-                <a:spcPts val="200"/>
-              </a:spcAft>
-            </a:pPr>
-            <a:r>
-              <a:rPr sz="1250" b="0" i="0">
-                <a:solidFill>
-                  <a:srgbClr val="595959"/>
-                </a:solidFill>
-                <a:latin typeface="微软雅黑"/>
-                <a:ea typeface="微软雅黑"/>
-              </a:rPr>
-              <a:t>根因:任务频率与采样率不匹配</a:t>
-            </a:r>
-          </a:p>
-          <a:p>
-            <a:pPr algn="l">
-              <a:spcAft>
-                <a:spcPts val="200"/>
-              </a:spcAft>
-            </a:pPr>
-            <a:r>
-              <a:rPr sz="1250" b="1" i="0">
-                <a:solidFill>
-                  <a:srgbClr val="2E7D32"/>
-                </a:solidFill>
-                <a:latin typeface="微软雅黑"/>
-                <a:ea typeface="微软雅黑"/>
-              </a:rPr>
-              <a:t>修复:解算任务提至 500Hz 对齐</a:t>
-            </a:r>
-          </a:p>
-        </p:txBody>
-      </p:sp>
-    </p:spTree>
-  </p:cSld>
-  <p:clrMapOvr>
-    <a:masterClrMapping/>
-  </p:clrMapOvr>
-</p:sld>
-</file>
-
-<file path=ppt/slides/slide18.xml><?xml version="1.0" encoding="utf-8"?>
-<p:sld xmlns:a="http://schemas.openxmlformats.org/drawingml/2006/main" xmlns:p="http://schemas.openxmlformats.org/presentationml/2006/main" xmlns:r="http://schemas.openxmlformats.org/officeDocument/2006/relationships">
-  <p:cSld>
-    <p:spTree>
-      <p:nvGrpSpPr>
-        <p:cNvPr id="1" name=""/>
-        <p:cNvGrpSpPr/>
-        <p:nvPr/>
-      </p:nvGrpSpPr>
-      <p:grpSpPr/>
-      <p:sp>
-        <p:nvSpPr>
-          <p:cNvPr id="2" name="Rectangle 1"/>
-          <p:cNvSpPr/>
-          <p:nvPr/>
-        </p:nvSpPr>
-        <p:spPr>
-          <a:xfrm>
-            <a:off x="0" y="0"/>
-            <a:ext cx="12191695" cy="868680"/>
-          </a:xfrm>
-          <a:prstGeom prst="rect">
-            <a:avLst/>
-          </a:prstGeom>
-          <a:solidFill>
-            <a:srgbClr val="1F3864"/>
-          </a:solidFill>
-          <a:ln>
-            <a:noFill/>
-          </a:ln>
-          <a:effectLst/>
-        </p:spPr>
-        <p:style>
-          <a:lnRef idx="1">
-            <a:schemeClr val="accent1"/>
-          </a:lnRef>
-          <a:fillRef idx="3">
-            <a:schemeClr val="accent1"/>
-          </a:fillRef>
-          <a:effectRef idx="2">
-            <a:schemeClr val="accent1"/>
-          </a:effectRef>
-          <a:fontRef idx="minor">
-            <a:schemeClr val="lt1"/>
-          </a:fontRef>
-        </p:style>
-        <p:txBody>
-          <a:bodyPr rtlCol="0" anchor="ctr"/>
-          <a:lstStyle/>
-          <a:p>
-            <a:pPr algn="ctr"/>
-          </a:p>
-        </p:txBody>
-      </p:sp>
-      <p:sp>
-        <p:nvSpPr>
-          <p:cNvPr id="3" name="TextBox 2"/>
-          <p:cNvSpPr txBox="1"/>
-          <p:nvPr/>
-        </p:nvSpPr>
-        <p:spPr>
-          <a:xfrm>
-            <a:off x="502920" y="91440"/>
-            <a:ext cx="10241280" cy="731520"/>
-          </a:xfrm>
-          <a:prstGeom prst="rect">
-            <a:avLst/>
-          </a:prstGeom>
-          <a:noFill/>
-        </p:spPr>
-        <p:txBody>
-          <a:bodyPr wrap="square" anchor="ctr" lIns="25400" rIns="25400" tIns="12700" bIns="12700">
-            <a:spAutoFit/>
-          </a:bodyPr>
-          <a:lstStyle/>
-          <a:p>
-            <a:pPr algn="l">
-              <a:spcAft>
-                <a:spcPts val="400"/>
-              </a:spcAft>
-            </a:pPr>
-            <a:r>
-              <a:rPr sz="2600" b="1" i="0">
-                <a:solidFill>
-                  <a:srgbClr val="FFFFFF"/>
-                </a:solidFill>
-                <a:latin typeface="微软雅黑"/>
-                <a:ea typeface="微软雅黑"/>
-              </a:rPr>
-              <a:t>后续计划 &amp; Q&amp;A</a:t>
-            </a:r>
-          </a:p>
-        </p:txBody>
-      </p:sp>
-      <p:sp>
-        <p:nvSpPr>
-          <p:cNvPr id="4" name="TextBox 3"/>
-          <p:cNvSpPr txBox="1"/>
-          <p:nvPr/>
-        </p:nvSpPr>
-        <p:spPr>
-          <a:xfrm>
-            <a:off x="11292840" y="6382512"/>
-            <a:ext cx="822960" cy="365760"/>
-          </a:xfrm>
-          <a:prstGeom prst="rect">
-            <a:avLst/>
-          </a:prstGeom>
-          <a:noFill/>
-        </p:spPr>
-        <p:txBody>
-          <a:bodyPr wrap="square" anchor="t" lIns="25400" rIns="25400" tIns="12700" bIns="12700">
-            <a:spAutoFit/>
-          </a:bodyPr>
-          <a:lstStyle/>
-          <a:p>
-            <a:pPr algn="r">
-              <a:spcAft>
-                <a:spcPts val="400"/>
-              </a:spcAft>
-            </a:pPr>
-            <a:r>
-              <a:rPr sz="1200" b="0" i="0">
-                <a:solidFill>
-                  <a:srgbClr val="FFFFFF"/>
-                </a:solidFill>
-                <a:latin typeface="微软雅黑"/>
-                <a:ea typeface="微软雅黑"/>
-              </a:rPr>
-              <a:t>17</a:t>
-            </a:r>
-          </a:p>
-        </p:txBody>
-      </p:sp>
-      <p:sp>
-        <p:nvSpPr>
-          <p:cNvPr id="5" name="Rectangle 4"/>
-          <p:cNvSpPr/>
-          <p:nvPr/>
-        </p:nvSpPr>
-        <p:spPr>
-          <a:xfrm>
-            <a:off x="0" y="868680"/>
-            <a:ext cx="12191695" cy="41148"/>
-          </a:xfrm>
-          <a:prstGeom prst="rect">
-            <a:avLst/>
-          </a:prstGeom>
-          <a:solidFill>
-            <a:srgbClr val="ED7D31"/>
-          </a:solidFill>
-          <a:ln>
-            <a:noFill/>
-          </a:ln>
-          <a:effectLst/>
-        </p:spPr>
-        <p:style>
-          <a:lnRef idx="1">
-            <a:schemeClr val="accent1"/>
-          </a:lnRef>
-          <a:fillRef idx="3">
-            <a:schemeClr val="accent1"/>
-          </a:fillRef>
-          <a:effectRef idx="2">
-            <a:schemeClr val="accent1"/>
-          </a:effectRef>
-          <a:fontRef idx="minor">
-            <a:schemeClr val="lt1"/>
-          </a:fontRef>
-        </p:style>
-        <p:txBody>
-          <a:bodyPr rtlCol="0" anchor="ctr"/>
-          <a:lstStyle/>
-          <a:p>
-            <a:pPr algn="ctr"/>
-          </a:p>
-        </p:txBody>
-      </p:sp>
-      <p:sp>
-        <p:nvSpPr>
-          <p:cNvPr id="6" name="Rounded Rectangle 5"/>
-          <p:cNvSpPr/>
-          <p:nvPr/>
-        </p:nvSpPr>
-        <p:spPr>
-          <a:xfrm>
-            <a:off x="502920" y="1463040"/>
-            <a:ext cx="2103120" cy="1371600"/>
-          </a:xfrm>
-          <a:prstGeom prst="roundRect">
-            <a:avLst>
-              <a:gd name="adj" fmla="val 12000"/>
-            </a:avLst>
-          </a:prstGeom>
-          <a:solidFill>
-            <a:srgbClr val="F2F4F8"/>
-          </a:solidFill>
-          <a:ln w="15240">
-            <a:solidFill>
-              <a:srgbClr val="2E75B6"/>
-            </a:solidFill>
-          </a:ln>
-          <a:effectLst/>
-        </p:spPr>
-        <p:style>
-          <a:lnRef idx="1">
-            <a:schemeClr val="accent1"/>
-          </a:lnRef>
-          <a:fillRef idx="3">
-            <a:schemeClr val="accent1"/>
-          </a:fillRef>
-          <a:effectRef idx="2">
-            <a:schemeClr val="accent1"/>
-          </a:effectRef>
-          <a:fontRef idx="minor">
-            <a:schemeClr val="lt1"/>
-          </a:fontRef>
-        </p:style>
-        <p:txBody>
-          <a:bodyPr rtlCol="0" anchor="ctr" wrap="square" lIns="38100" rIns="38100" tIns="25400" bIns="25400"/>
-          <a:lstStyle/>
-          <a:p>
-            <a:pPr algn="ctr">
-              <a:spcAft>
-                <a:spcPts val="200"/>
-              </a:spcAft>
-            </a:pPr>
-            <a:r>
-              <a:rPr sz="1450" b="1" i="0">
-                <a:solidFill>
-                  <a:srgbClr val="1F3864"/>
-                </a:solidFill>
-                <a:latin typeface="微软雅黑"/>
-                <a:ea typeface="微软雅黑"/>
-              </a:rPr>
-              <a:t>NOW</a:t>
-            </a:r>
-          </a:p>
-          <a:p>
-            <a:pPr algn="ctr">
-              <a:spcAft>
-                <a:spcPts val="200"/>
-              </a:spcAft>
-            </a:pPr>
-            <a:r>
-              <a:rPr sz="1150" b="0" i="0">
-                <a:solidFill>
-                  <a:srgbClr val="595959"/>
-                </a:solidFill>
-                <a:latin typeface="微软雅黑"/>
-                <a:ea typeface="微软雅黑"/>
-              </a:rPr>
-              <a:t>代码+回归测试</a:t>
-            </a:r>
-          </a:p>
-        </p:txBody>
-      </p:sp>
-      <p:cxnSp>
-        <p:nvCxnSpPr>
-          <p:cNvPr id="7" name="Connector 6"/>
-          <p:cNvCxnSpPr/>
-          <p:nvPr/>
-        </p:nvCxnSpPr>
-        <p:spPr>
-          <a:xfrm>
-            <a:off x="2606039" y="2148840"/>
-            <a:ext cx="201169" cy="0"/>
-          </a:xfrm>
-          <a:prstGeom prst="line">
-            <a:avLst/>
-          </a:prstGeom>
-          <a:ln w="25400">
-            <a:solidFill>
-              <a:srgbClr val="1F3864"/>
-            </a:solidFill>
-            <a:tailEnd type="triangle" w="med" len="med"/>
-          </a:ln>
-          <a:effectLst/>
-        </p:spPr>
-        <p:style>
-          <a:lnRef idx="2">
-            <a:schemeClr val="accent1"/>
-          </a:lnRef>
-          <a:fillRef idx="0">
-            <a:schemeClr val="accent1"/>
-          </a:fillRef>
-          <a:effectRef idx="1">
-            <a:schemeClr val="accent1"/>
-          </a:effectRef>
-          <a:fontRef idx="minor">
-            <a:schemeClr val="tx1"/>
-          </a:fontRef>
-        </p:style>
-      </p:cxnSp>
-      <p:sp>
-        <p:nvSpPr>
-          <p:cNvPr id="8" name="Rounded Rectangle 7"/>
-          <p:cNvSpPr/>
-          <p:nvPr/>
-        </p:nvSpPr>
-        <p:spPr>
-          <a:xfrm>
-            <a:off x="2807208" y="1463040"/>
-            <a:ext cx="2103120" cy="1371600"/>
-          </a:xfrm>
-          <a:prstGeom prst="roundRect">
-            <a:avLst>
-              <a:gd name="adj" fmla="val 12000"/>
-            </a:avLst>
-          </a:prstGeom>
-          <a:solidFill>
-            <a:srgbClr val="DEEBF7"/>
-          </a:solidFill>
-          <a:ln w="15240">
-            <a:solidFill>
-              <a:srgbClr val="2E75B6"/>
-            </a:solidFill>
-          </a:ln>
-          <a:effectLst/>
-        </p:spPr>
-        <p:style>
-          <a:lnRef idx="1">
-            <a:schemeClr val="accent1"/>
-          </a:lnRef>
-          <a:fillRef idx="3">
-            <a:schemeClr val="accent1"/>
-          </a:fillRef>
-          <a:effectRef idx="2">
-            <a:schemeClr val="accent1"/>
-          </a:effectRef>
-          <a:fontRef idx="minor">
-            <a:schemeClr val="lt1"/>
-          </a:fontRef>
-        </p:style>
-        <p:txBody>
-          <a:bodyPr rtlCol="0" anchor="ctr" wrap="square" lIns="38100" rIns="38100" tIns="25400" bIns="25400"/>
-          <a:lstStyle/>
-          <a:p>
-            <a:pPr algn="ctr">
-              <a:spcAft>
-                <a:spcPts val="200"/>
-              </a:spcAft>
-            </a:pPr>
-            <a:r>
-              <a:rPr sz="1450" b="1" i="0">
-                <a:solidFill>
-                  <a:srgbClr val="1F3864"/>
-                </a:solidFill>
-                <a:latin typeface="微软雅黑"/>
-                <a:ea typeface="微软雅黑"/>
-              </a:rPr>
-              <a:t>STEP1</a:t>
-            </a:r>
-          </a:p>
-          <a:p>
-            <a:pPr algn="ctr">
-              <a:spcAft>
-                <a:spcPts val="200"/>
-              </a:spcAft>
-            </a:pPr>
-            <a:r>
-              <a:rPr sz="1150" b="0" i="0">
-                <a:solidFill>
-                  <a:srgbClr val="595959"/>
-                </a:solidFill>
-                <a:latin typeface="微软雅黑"/>
-                <a:ea typeface="微软雅黑"/>
-              </a:rPr>
-              <a:t>实机编译+台架:姿态跟随/电机响应</a:t>
-            </a:r>
-          </a:p>
-        </p:txBody>
-      </p:sp>
-      <p:cxnSp>
-        <p:nvCxnSpPr>
-          <p:cNvPr id="9" name="Connector 8"/>
-          <p:cNvCxnSpPr/>
-          <p:nvPr/>
-        </p:nvCxnSpPr>
-        <p:spPr>
-          <a:xfrm>
-            <a:off x="4910328" y="2148840"/>
-            <a:ext cx="201168" cy="0"/>
-          </a:xfrm>
-          <a:prstGeom prst="line">
-            <a:avLst/>
-          </a:prstGeom>
-          <a:ln w="25400">
-            <a:solidFill>
-              <a:srgbClr val="1F3864"/>
-            </a:solidFill>
-            <a:tailEnd type="triangle" w="med" len="med"/>
-          </a:ln>
-          <a:effectLst/>
-        </p:spPr>
-        <p:style>
-          <a:lnRef idx="2">
-            <a:schemeClr val="accent1"/>
-          </a:lnRef>
-          <a:fillRef idx="0">
-            <a:schemeClr val="accent1"/>
-          </a:fillRef>
-          <a:effectRef idx="1">
-            <a:schemeClr val="accent1"/>
-          </a:effectRef>
-          <a:fontRef idx="minor">
-            <a:schemeClr val="tx1"/>
-          </a:fontRef>
-        </p:style>
-      </p:cxnSp>
-      <p:sp>
-        <p:nvSpPr>
-          <p:cNvPr id="10" name="Rounded Rectangle 9"/>
-          <p:cNvSpPr/>
-          <p:nvPr/>
-        </p:nvSpPr>
-        <p:spPr>
-          <a:xfrm>
-            <a:off x="5111496" y="1463040"/>
-            <a:ext cx="2103120" cy="1371600"/>
-          </a:xfrm>
-          <a:prstGeom prst="roundRect">
-            <a:avLst>
-              <a:gd name="adj" fmla="val 12000"/>
-            </a:avLst>
-          </a:prstGeom>
-          <a:solidFill>
-            <a:srgbClr val="FDF0E6"/>
-          </a:solidFill>
-          <a:ln w="15240">
-            <a:solidFill>
-              <a:srgbClr val="ED7D31"/>
-            </a:solidFill>
-          </a:ln>
-          <a:effectLst/>
-        </p:spPr>
-        <p:style>
-          <a:lnRef idx="1">
-            <a:schemeClr val="accent1"/>
-          </a:lnRef>
-          <a:fillRef idx="3">
-            <a:schemeClr val="accent1"/>
-          </a:fillRef>
-          <a:effectRef idx="2">
-            <a:schemeClr val="accent1"/>
-          </a:effectRef>
-          <a:fontRef idx="minor">
-            <a:schemeClr val="lt1"/>
-          </a:fontRef>
-        </p:style>
-        <p:txBody>
-          <a:bodyPr rtlCol="0" anchor="ctr" wrap="square" lIns="38100" rIns="38100" tIns="25400" bIns="25400"/>
-          <a:lstStyle/>
-          <a:p>
-            <a:pPr algn="ctr">
-              <a:spcAft>
-                <a:spcPts val="200"/>
-              </a:spcAft>
-            </a:pPr>
-            <a:r>
-              <a:rPr sz="1450" b="1" i="0">
-                <a:solidFill>
-                  <a:srgbClr val="1F3864"/>
-                </a:solidFill>
-                <a:latin typeface="微软雅黑"/>
-                <a:ea typeface="微软雅黑"/>
-              </a:rPr>
-              <a:t>STEP2</a:t>
-            </a:r>
-          </a:p>
-          <a:p>
-            <a:pPr algn="ctr">
-              <a:spcAft>
-                <a:spcPts val="200"/>
-              </a:spcAft>
-            </a:pPr>
-            <a:r>
-              <a:rPr sz="1150" b="0" i="0">
-                <a:solidFill>
-                  <a:srgbClr val="595959"/>
-                </a:solidFill>
-                <a:latin typeface="微软雅黑"/>
-                <a:ea typeface="微软雅黑"/>
-              </a:rPr>
-              <a:t>PID 参数整定(先P后D再I)</a:t>
-            </a:r>
-          </a:p>
-        </p:txBody>
-      </p:sp>
-      <p:cxnSp>
-        <p:nvCxnSpPr>
-          <p:cNvPr id="11" name="Connector 10"/>
-          <p:cNvCxnSpPr/>
-          <p:nvPr/>
-        </p:nvCxnSpPr>
-        <p:spPr>
-          <a:xfrm>
-            <a:off x="7214616" y="2148840"/>
-            <a:ext cx="201167" cy="0"/>
-          </a:xfrm>
-          <a:prstGeom prst="line">
-            <a:avLst/>
-          </a:prstGeom>
-          <a:ln w="25400">
-            <a:solidFill>
-              <a:srgbClr val="1F3864"/>
-            </a:solidFill>
-            <a:tailEnd type="triangle" w="med" len="med"/>
-          </a:ln>
-          <a:effectLst/>
-        </p:spPr>
-        <p:style>
-          <a:lnRef idx="2">
-            <a:schemeClr val="accent1"/>
-          </a:lnRef>
-          <a:fillRef idx="0">
-            <a:schemeClr val="accent1"/>
-          </a:fillRef>
-          <a:effectRef idx="1">
-            <a:schemeClr val="accent1"/>
-          </a:effectRef>
-          <a:fontRef idx="minor">
-            <a:schemeClr val="tx1"/>
-          </a:fontRef>
-        </p:style>
-      </p:cxnSp>
-      <p:sp>
-        <p:nvSpPr>
-          <p:cNvPr id="12" name="Rounded Rectangle 11"/>
-          <p:cNvSpPr/>
-          <p:nvPr/>
-        </p:nvSpPr>
-        <p:spPr>
-          <a:xfrm>
-            <a:off x="7415783" y="1463040"/>
-            <a:ext cx="2103120" cy="1371600"/>
-          </a:xfrm>
-          <a:prstGeom prst="roundRect">
-            <a:avLst>
-              <a:gd name="adj" fmla="val 12000"/>
-            </a:avLst>
-          </a:prstGeom>
-          <a:solidFill>
-            <a:srgbClr val="E2EFDA"/>
-          </a:solidFill>
-          <a:ln w="15240">
-            <a:solidFill>
-              <a:srgbClr val="2E7D32"/>
-            </a:solidFill>
-          </a:ln>
-          <a:effectLst/>
-        </p:spPr>
-        <p:style>
-          <a:lnRef idx="1">
-            <a:schemeClr val="accent1"/>
-          </a:lnRef>
-          <a:fillRef idx="3">
-            <a:schemeClr val="accent1"/>
-          </a:fillRef>
-          <a:effectRef idx="2">
-            <a:schemeClr val="accent1"/>
-          </a:effectRef>
-          <a:fontRef idx="minor">
-            <a:schemeClr val="lt1"/>
-          </a:fontRef>
-        </p:style>
-        <p:txBody>
-          <a:bodyPr rtlCol="0" anchor="ctr" wrap="square" lIns="38100" rIns="38100" tIns="25400" bIns="25400"/>
-          <a:lstStyle/>
-          <a:p>
-            <a:pPr algn="ctr">
-              <a:spcAft>
-                <a:spcPts val="200"/>
-              </a:spcAft>
-            </a:pPr>
-            <a:r>
-              <a:rPr sz="1450" b="1" i="0">
-                <a:solidFill>
-                  <a:srgbClr val="1F3864"/>
-                </a:solidFill>
-                <a:latin typeface="微软雅黑"/>
-                <a:ea typeface="微软雅黑"/>
-              </a:rPr>
-              <a:t>STEP3</a:t>
-            </a:r>
-          </a:p>
-          <a:p>
-            <a:pPr algn="ctr">
-              <a:spcAft>
-                <a:spcPts val="200"/>
-              </a:spcAft>
-            </a:pPr>
-            <a:r>
-              <a:rPr sz="1150" b="0" i="0">
-                <a:solidFill>
-                  <a:srgbClr val="595959"/>
-                </a:solidFill>
-                <a:latin typeface="微软雅黑"/>
-                <a:ea typeface="微软雅黑"/>
-              </a:rPr>
-              <a:t>系留首飞 → 自由飞</a:t>
-            </a:r>
-          </a:p>
-        </p:txBody>
-      </p:sp>
-      <p:cxnSp>
-        <p:nvCxnSpPr>
-          <p:cNvPr id="13" name="Connector 12"/>
-          <p:cNvCxnSpPr/>
-          <p:nvPr/>
-        </p:nvCxnSpPr>
-        <p:spPr>
-          <a:xfrm>
-            <a:off x="9518904" y="2148840"/>
-            <a:ext cx="201168" cy="0"/>
-          </a:xfrm>
-          <a:prstGeom prst="line">
-            <a:avLst/>
-          </a:prstGeom>
-          <a:ln w="25400">
-            <a:solidFill>
-              <a:srgbClr val="1F3864"/>
-            </a:solidFill>
-            <a:tailEnd type="triangle" w="med" len="med"/>
-          </a:ln>
-          <a:effectLst/>
-        </p:spPr>
-        <p:style>
-          <a:lnRef idx="2">
-            <a:schemeClr val="accent1"/>
-          </a:lnRef>
-          <a:fillRef idx="0">
-            <a:schemeClr val="accent1"/>
-          </a:fillRef>
-          <a:effectRef idx="1">
-            <a:schemeClr val="accent1"/>
-          </a:effectRef>
-          <a:fontRef idx="minor">
-            <a:schemeClr val="tx1"/>
-          </a:fontRef>
-        </p:style>
-      </p:cxnSp>
-      <p:sp>
-        <p:nvSpPr>
-          <p:cNvPr id="14" name="Rounded Rectangle 13"/>
-          <p:cNvSpPr/>
-          <p:nvPr/>
-        </p:nvSpPr>
-        <p:spPr>
-          <a:xfrm>
-            <a:off x="9720072" y="1463040"/>
-            <a:ext cx="2103120" cy="1371600"/>
-          </a:xfrm>
-          <a:prstGeom prst="roundRect">
-            <a:avLst>
-              <a:gd name="adj" fmla="val 12000"/>
-            </a:avLst>
-          </a:prstGeom>
-          <a:solidFill>
-            <a:srgbClr val="F2F4F8"/>
-          </a:solidFill>
-          <a:ln w="15240">
-            <a:solidFill>
-              <a:srgbClr val="2E75B6"/>
-            </a:solidFill>
-          </a:ln>
-          <a:effectLst/>
-        </p:spPr>
-        <p:style>
-          <a:lnRef idx="1">
-            <a:schemeClr val="accent1"/>
-          </a:lnRef>
-          <a:fillRef idx="3">
-            <a:schemeClr val="accent1"/>
-          </a:fillRef>
-          <a:effectRef idx="2">
-            <a:schemeClr val="accent1"/>
-          </a:effectRef>
-          <a:fontRef idx="minor">
-            <a:schemeClr val="lt1"/>
-          </a:fontRef>
-        </p:style>
-        <p:txBody>
-          <a:bodyPr rtlCol="0" anchor="ctr" wrap="square" lIns="38100" rIns="38100" tIns="25400" bIns="25400"/>
-          <a:lstStyle/>
-          <a:p>
-            <a:pPr algn="ctr">
-              <a:spcAft>
-                <a:spcPts val="200"/>
-              </a:spcAft>
-            </a:pPr>
-            <a:r>
-              <a:rPr sz="1450" b="1" i="0">
-                <a:solidFill>
-                  <a:srgbClr val="1F3864"/>
-                </a:solidFill>
-                <a:latin typeface="微软雅黑"/>
-                <a:ea typeface="微软雅黑"/>
-              </a:rPr>
-              <a:t>FUTURE</a:t>
-            </a:r>
-          </a:p>
-          <a:p>
-            <a:pPr algn="ctr">
-              <a:spcAft>
-                <a:spcPts val="200"/>
-              </a:spcAft>
-            </a:pPr>
-            <a:r>
-              <a:rPr sz="1150" b="0" i="0">
-                <a:solidFill>
-                  <a:srgbClr val="595959"/>
-                </a:solidFill>
-                <a:latin typeface="微软雅黑"/>
-                <a:ea typeface="微软雅黑"/>
-              </a:rPr>
-              <a:t>SBUS 遥控器 / 气压计定高 / GPS</a:t>
-            </a:r>
-          </a:p>
-        </p:txBody>
-      </p:sp>
-      <p:sp>
-        <p:nvSpPr>
-          <p:cNvPr id="15" name="Rounded Rectangle 14"/>
-          <p:cNvSpPr/>
-          <p:nvPr/>
-        </p:nvSpPr>
-        <p:spPr>
-          <a:xfrm>
-            <a:off x="502920" y="3291840"/>
-            <a:ext cx="11292840" cy="1188720"/>
-          </a:xfrm>
-          <a:prstGeom prst="roundRect">
-            <a:avLst>
-              <a:gd name="adj" fmla="val 12000"/>
-            </a:avLst>
-          </a:prstGeom>
-          <a:solidFill>
-            <a:srgbClr val="F2F4F8"/>
-          </a:solidFill>
-          <a:ln w="15240">
-            <a:solidFill>
-              <a:srgbClr val="2E75B6"/>
-            </a:solidFill>
-          </a:ln>
-          <a:effectLst/>
-        </p:spPr>
-        <p:style>
-          <a:lnRef idx="1">
-            <a:schemeClr val="accent1"/>
-          </a:lnRef>
-          <a:fillRef idx="3">
-            <a:schemeClr val="accent1"/>
-          </a:fillRef>
-          <a:effectRef idx="2">
-            <a:schemeClr val="accent1"/>
-          </a:effectRef>
-          <a:fontRef idx="minor">
-            <a:schemeClr val="lt1"/>
-          </a:fontRef>
-        </p:style>
-        <p:txBody>
-          <a:bodyPr rtlCol="0" anchor="ctr" wrap="square" lIns="38100" rIns="38100" tIns="25400" bIns="25400"/>
-          <a:lstStyle/>
-          <a:p>
-            <a:pPr algn="ctr">
-              <a:spcAft>
-                <a:spcPts val="200"/>
-              </a:spcAft>
-            </a:pPr>
-            <a:r>
-              <a:rPr sz="1600" b="1" i="0">
-                <a:solidFill>
-                  <a:srgbClr val="1F3864"/>
-                </a:solidFill>
-                <a:latin typeface="微软雅黑"/>
-                <a:ea typeface="微软雅黑"/>
-              </a:rPr>
-              <a:t>一句话总结</a:t>
-            </a:r>
-          </a:p>
-          <a:p>
-            <a:pPr algn="ctr">
-              <a:spcAft>
-                <a:spcPts val="200"/>
-              </a:spcAft>
-            </a:pPr>
-            <a:r>
-              <a:rPr sz="1400" b="0" i="0">
-                <a:solidFill>
-                  <a:srgbClr val="595959"/>
-                </a:solidFill>
-                <a:latin typeface="微软雅黑"/>
-                <a:ea typeface="微软雅黑"/>
-              </a:rPr>
-              <a:t>用自动化专业的控制理论 + 嵌入式工程能力,独立完成了一个'算法-实时系统-硬件'闭环的飞控软件栈,</a:t>
-            </a:r>
-          </a:p>
-          <a:p>
-            <a:pPr algn="ctr">
-              <a:spcAft>
-                <a:spcPts val="200"/>
-              </a:spcAft>
-            </a:pPr>
-            <a:r>
-              <a:rPr sz="1400" b="1" i="0">
-                <a:solidFill>
-                  <a:srgbClr val="2E75B6"/>
-                </a:solidFill>
-                <a:latin typeface="微软雅黑"/>
-                <a:ea typeface="微软雅黑"/>
-              </a:rPr>
-              <a:t>并用测试与静态验证让它达到'可上电机'的工程成熟度。</a:t>
-            </a:r>
-          </a:p>
-        </p:txBody>
-      </p:sp>
-      <p:sp>
-        <p:nvSpPr>
-          <p:cNvPr id="16" name="TextBox 15"/>
-          <p:cNvSpPr txBox="1"/>
-          <p:nvPr/>
-        </p:nvSpPr>
-        <p:spPr>
-          <a:xfrm>
-            <a:off x="502920" y="4846320"/>
-            <a:ext cx="11247120" cy="1371600"/>
-          </a:xfrm>
-          <a:prstGeom prst="rect">
-            <a:avLst/>
-          </a:prstGeom>
-          <a:noFill/>
-        </p:spPr>
-        <p:txBody>
-          <a:bodyPr wrap="square" anchor="t" lIns="25400" rIns="25400" tIns="12700" bIns="12700">
-            <a:spAutoFit/>
-          </a:bodyPr>
-          <a:lstStyle/>
-          <a:p>
-            <a:pPr algn="l">
-              <a:spcAft>
-                <a:spcPts val="400"/>
-              </a:spcAft>
-            </a:pPr>
-            <a:r>
-              <a:rPr sz="4000" b="1" i="0">
-                <a:solidFill>
-                  <a:srgbClr val="1F3864"/>
-                </a:solidFill>
-                <a:latin typeface="微软雅黑"/>
-                <a:ea typeface="微软雅黑"/>
-              </a:rPr>
-              <a:t>Q &amp; A</a:t>
-            </a:r>
-          </a:p>
-          <a:p>
-            <a:pPr algn="l">
-              <a:spcAft>
-                <a:spcPts val="400"/>
-              </a:spcAft>
-            </a:pPr>
-            <a:r>
-              <a:rPr sz="1600" b="0" i="0">
-                <a:solidFill>
-                  <a:srgbClr val="595959"/>
-                </a:solidFill>
-                <a:latin typeface="微软雅黑"/>
-                <a:ea typeface="微软雅黑"/>
-              </a:rPr>
-              <a:t>感谢聆听 · 欢迎拍砖</a:t>
-            </a:r>
-          </a:p>
-        </p:txBody>
-      </p:sp>
-    </p:spTree>
-  </p:cSld>
-  <p:clrMapOvr>
-    <a:masterClrMapping/>
-  </p:clrMapOvr>
-</p:sld>
-</file>
-
-<file path=ppt/slides/slide2.xml><?xml version="1.0" encoding="utf-8"?>
-<p:sld xmlns:a="http://schemas.openxmlformats.org/drawingml/2006/main" xmlns:p="http://schemas.openxmlformats.org/presentationml/2006/main" xmlns:r="http://schemas.openxmlformats.org/officeDocument/2006/relationships">
-  <p:cSld>
-    <p:spTree>
-      <p:nvGrpSpPr>
-        <p:cNvPr id="1" name=""/>
-        <p:cNvGrpSpPr/>
-        <p:nvPr/>
-      </p:nvGrpSpPr>
-      <p:grpSpPr/>
-      <p:sp>
-        <p:nvSpPr>
-          <p:cNvPr id="2" name="Rectangle 1"/>
-          <p:cNvSpPr/>
-          <p:nvPr/>
-        </p:nvSpPr>
-        <p:spPr>
-          <a:xfrm>
-            <a:off x="0" y="0"/>
-            <a:ext cx="12191695" cy="868680"/>
-          </a:xfrm>
-          <a:prstGeom prst="rect">
-            <a:avLst/>
-          </a:prstGeom>
-          <a:solidFill>
-            <a:srgbClr val="1F3864"/>
-          </a:solidFill>
-          <a:ln>
-            <a:noFill/>
-          </a:ln>
-          <a:effectLst/>
-        </p:spPr>
-        <p:style>
-          <a:lnRef idx="1">
-            <a:schemeClr val="accent1"/>
-          </a:lnRef>
-          <a:fillRef idx="3">
-            <a:schemeClr val="accent1"/>
-          </a:fillRef>
-          <a:effectRef idx="2">
-            <a:schemeClr val="accent1"/>
-          </a:effectRef>
-          <a:fontRef idx="minor">
-            <a:schemeClr val="lt1"/>
-          </a:fontRef>
-        </p:style>
-        <p:txBody>
-          <a:bodyPr rtlCol="0" anchor="ctr"/>
-          <a:lstStyle/>
-          <a:p>
-            <a:pPr algn="ctr"/>
-          </a:p>
-        </p:txBody>
-      </p:sp>
-      <p:sp>
-        <p:nvSpPr>
-          <p:cNvPr id="3" name="TextBox 2"/>
-          <p:cNvSpPr txBox="1"/>
-          <p:nvPr/>
-        </p:nvSpPr>
-        <p:spPr>
-          <a:xfrm>
-            <a:off x="502920" y="91440"/>
-            <a:ext cx="10241280" cy="731520"/>
-          </a:xfrm>
-          <a:prstGeom prst="rect">
-            <a:avLst/>
-          </a:prstGeom>
-          <a:noFill/>
-        </p:spPr>
-        <p:txBody>
-          <a:bodyPr wrap="square" anchor="ctr" lIns="25400" rIns="25400" tIns="12700" bIns="12700">
-            <a:spAutoFit/>
-          </a:bodyPr>
-          <a:lstStyle/>
-          <a:p>
-            <a:pPr algn="l">
-              <a:spcAft>
-                <a:spcPts val="400"/>
-              </a:spcAft>
-            </a:pPr>
-            <a:r>
-              <a:rPr sz="2600" b="1" i="0">
-                <a:solidFill>
-                  <a:srgbClr val="FFFFFF"/>
-                </a:solidFill>
-                <a:latin typeface="微软雅黑"/>
-                <a:ea typeface="微软雅黑"/>
-              </a:rPr>
-              <a:t>分享脉络</a:t>
-            </a:r>
-          </a:p>
-        </p:txBody>
-      </p:sp>
-      <p:sp>
-        <p:nvSpPr>
-          <p:cNvPr id="4" name="TextBox 3"/>
-          <p:cNvSpPr txBox="1"/>
-          <p:nvPr/>
-        </p:nvSpPr>
-        <p:spPr>
-          <a:xfrm>
-            <a:off x="11292840" y="6382512"/>
-            <a:ext cx="822960" cy="365760"/>
-          </a:xfrm>
-          <a:prstGeom prst="rect">
-            <a:avLst/>
-          </a:prstGeom>
-          <a:noFill/>
-        </p:spPr>
-        <p:txBody>
-          <a:bodyPr wrap="square" anchor="t" lIns="25400" rIns="25400" tIns="12700" bIns="12700">
-            <a:spAutoFit/>
-          </a:bodyPr>
-          <a:lstStyle/>
-          <a:p>
-            <a:pPr algn="r">
-              <a:spcAft>
-                <a:spcPts val="400"/>
-              </a:spcAft>
-            </a:pPr>
-            <a:r>
-              <a:rPr sz="1200" b="0" i="0">
-                <a:solidFill>
-                  <a:srgbClr val="FFFFFF"/>
-                </a:solidFill>
-                <a:latin typeface="微软雅黑"/>
-                <a:ea typeface="微软雅黑"/>
-              </a:rPr>
-              <a:t>01</a:t>
-            </a:r>
-          </a:p>
-        </p:txBody>
-      </p:sp>
-      <p:sp>
-        <p:nvSpPr>
-          <p:cNvPr id="5" name="Rectangle 4"/>
-          <p:cNvSpPr/>
-          <p:nvPr/>
-        </p:nvSpPr>
-        <p:spPr>
-          <a:xfrm>
-            <a:off x="0" y="868680"/>
-            <a:ext cx="12191695" cy="41148"/>
-          </a:xfrm>
-          <a:prstGeom prst="rect">
-            <a:avLst/>
-          </a:prstGeom>
-          <a:solidFill>
-            <a:srgbClr val="ED7D31"/>
-          </a:solidFill>
-          <a:ln>
-            <a:noFill/>
-          </a:ln>
-          <a:effectLst/>
-        </p:spPr>
-        <p:style>
-          <a:lnRef idx="1">
-            <a:schemeClr val="accent1"/>
-          </a:lnRef>
-          <a:fillRef idx="3">
-            <a:schemeClr val="accent1"/>
-          </a:fillRef>
-          <a:effectRef idx="2">
-            <a:schemeClr val="accent1"/>
-          </a:effectRef>
-          <a:fontRef idx="minor">
-            <a:schemeClr val="lt1"/>
-          </a:fontRef>
-        </p:style>
-        <p:txBody>
-          <a:bodyPr rtlCol="0" anchor="ctr"/>
-          <a:lstStyle/>
-          <a:p>
-            <a:pPr algn="ctr"/>
-          </a:p>
-        </p:txBody>
-      </p:sp>
-      <p:sp>
-        <p:nvSpPr>
-          <p:cNvPr id="6" name="Rounded Rectangle 5"/>
-          <p:cNvSpPr/>
-          <p:nvPr/>
-        </p:nvSpPr>
-        <p:spPr>
-          <a:xfrm>
-            <a:off x="1097280" y="1371600"/>
+            <a:off x="1097280" y="1600200"/>
             <a:ext cx="914400" cy="658368"/>
           </a:xfrm>
           <a:prstGeom prst="roundRect">
@@ -14633,7 +14250,7 @@
         </p:nvSpPr>
         <p:spPr>
           <a:xfrm>
-            <a:off x="2148840" y="1371600"/>
+            <a:off x="2148840" y="1600200"/>
             <a:ext cx="8961120" cy="658368"/>
           </a:xfrm>
           <a:prstGeom prst="roundRect">
@@ -14705,7 +14322,7 @@
         </p:nvSpPr>
         <p:spPr>
           <a:xfrm>
-            <a:off x="1097280" y="2212848"/>
+            <a:off x="1097280" y="2441448"/>
             <a:ext cx="914400" cy="658368"/>
           </a:xfrm>
           <a:prstGeom prst="roundRect">
@@ -14767,7 +14384,7 @@
         </p:nvSpPr>
         <p:spPr>
           <a:xfrm>
-            <a:off x="2148840" y="2212848"/>
+            <a:off x="2148840" y="2441448"/>
             <a:ext cx="8961120" cy="658368"/>
           </a:xfrm>
           <a:prstGeom prst="roundRect">
@@ -14839,7 +14456,7 @@
         </p:nvSpPr>
         <p:spPr>
           <a:xfrm>
-            <a:off x="1097280" y="3054096"/>
+            <a:off x="1097280" y="3282696"/>
             <a:ext cx="914400" cy="658368"/>
           </a:xfrm>
           <a:prstGeom prst="roundRect">
@@ -14901,7 +14518,7 @@
         </p:nvSpPr>
         <p:spPr>
           <a:xfrm>
-            <a:off x="2148840" y="3054096"/>
+            <a:off x="2148840" y="3282696"/>
             <a:ext cx="8961120" cy="658368"/>
           </a:xfrm>
           <a:prstGeom prst="roundRect">
@@ -14950,7 +14567,7 @@
                 <a:latin typeface="微软雅黑"/>
                 <a:ea typeface="微软雅黑"/>
               </a:rPr>
-              <a:t>核心模块原理  </a:t>
+              <a:t>姿态解算  </a:t>
             </a:r>
             <a:r>
               <a:rPr sz="1400" b="0" i="0">
@@ -14960,7 +14577,7 @@
                 <a:latin typeface="微软雅黑"/>
                 <a:ea typeface="微软雅黑"/>
               </a:rPr>
-              <a:t>IMU → 滤波 → Mahony 姿态 → 串级PID → 混控</a:t>
+              <a:t>数学原理 → 滤波 → Mahony → 垂直加速度</a:t>
             </a:r>
           </a:p>
         </p:txBody>
@@ -14973,7 +14590,7 @@
         </p:nvSpPr>
         <p:spPr>
           <a:xfrm>
-            <a:off x="1097280" y="3895344"/>
+            <a:off x="1097280" y="4123944"/>
             <a:ext cx="914400" cy="658368"/>
           </a:xfrm>
           <a:prstGeom prst="roundRect">
@@ -15035,7 +14652,7 @@
         </p:nvSpPr>
         <p:spPr>
           <a:xfrm>
-            <a:off x="2148840" y="3895344"/>
+            <a:off x="2148840" y="4123944"/>
             <a:ext cx="8961120" cy="658368"/>
           </a:xfrm>
           <a:prstGeom prst="roundRect">
@@ -15084,7 +14701,7 @@
                 <a:latin typeface="微软雅黑"/>
                 <a:ea typeface="微软雅黑"/>
               </a:rPr>
-              <a:t>飞行逻辑  </a:t>
+              <a:t>控制算法  </a:t>
             </a:r>
             <a:r>
               <a:rPr sz="1400" b="0" i="0">
@@ -15094,7 +14711,7 @@
                 <a:latin typeface="微软雅黑"/>
                 <a:ea typeface="微软雅黑"/>
               </a:rPr>
-              <a:t>状态机 · 多级安全链 · 三环协同</a:t>
+              <a:t>PID 原理 → 串级实现 → X 型混控</a:t>
             </a:r>
           </a:p>
         </p:txBody>
@@ -15107,7 +14724,7 @@
         </p:nvSpPr>
         <p:spPr>
           <a:xfrm>
-            <a:off x="1097280" y="4736592"/>
+            <a:off x="1097280" y="4965192"/>
             <a:ext cx="914400" cy="658368"/>
           </a:xfrm>
           <a:prstGeom prst="roundRect">
@@ -15169,7 +14786,7 @@
         </p:nvSpPr>
         <p:spPr>
           <a:xfrm>
-            <a:off x="2148840" y="4736592"/>
+            <a:off x="2148840" y="4965192"/>
             <a:ext cx="8961120" cy="658368"/>
           </a:xfrm>
           <a:prstGeom prst="roundRect">
@@ -15218,7 +14835,7 @@
                 <a:latin typeface="微软雅黑"/>
                 <a:ea typeface="微软雅黑"/>
               </a:rPr>
-              <a:t>工程化与验证  </a:t>
+              <a:t>飞行逻辑  </a:t>
             </a:r>
             <a:r>
               <a:rPr sz="1400" b="0" i="0">
@@ -15228,141 +14845,7 @@
                 <a:latin typeface="微软雅黑"/>
                 <a:ea typeface="微软雅黑"/>
               </a:rPr>
-              <a:t>构建体系 · 主机端回归测试 · 静态检查</a:t>
-            </a:r>
-          </a:p>
-        </p:txBody>
-      </p:sp>
-      <p:sp>
-        <p:nvSpPr>
-          <p:cNvPr id="16" name="Rounded Rectangle 15"/>
-          <p:cNvSpPr/>
-          <p:nvPr/>
-        </p:nvSpPr>
-        <p:spPr>
-          <a:xfrm>
-            <a:off x="1097280" y="5577840"/>
-            <a:ext cx="914400" cy="658368"/>
-          </a:xfrm>
-          <a:prstGeom prst="roundRect">
-            <a:avLst>
-              <a:gd name="adj" fmla="val 12000"/>
-            </a:avLst>
-          </a:prstGeom>
-          <a:solidFill>
-            <a:srgbClr val="1F3864"/>
-          </a:solidFill>
-          <a:ln w="15240">
-            <a:solidFill>
-              <a:srgbClr val="1F3864"/>
-            </a:solidFill>
-          </a:ln>
-          <a:effectLst/>
-        </p:spPr>
-        <p:style>
-          <a:lnRef idx="1">
-            <a:schemeClr val="accent1"/>
-          </a:lnRef>
-          <a:fillRef idx="3">
-            <a:schemeClr val="accent1"/>
-          </a:fillRef>
-          <a:effectRef idx="2">
-            <a:schemeClr val="accent1"/>
-          </a:effectRef>
-          <a:fontRef idx="minor">
-            <a:schemeClr val="lt1"/>
-          </a:fontRef>
-        </p:style>
-        <p:txBody>
-          <a:bodyPr rtlCol="0" anchor="ctr" wrap="square" lIns="38100" rIns="38100" tIns="25400" bIns="25400"/>
-          <a:lstStyle/>
-          <a:p>
-            <a:pPr algn="ctr">
-              <a:spcAft>
-                <a:spcPts val="200"/>
-              </a:spcAft>
-            </a:pPr>
-            <a:r>
-              <a:rPr sz="2200" b="1" i="0">
-                <a:solidFill>
-                  <a:srgbClr val="ED7D31"/>
-                </a:solidFill>
-                <a:latin typeface="微软雅黑"/>
-                <a:ea typeface="微软雅黑"/>
-              </a:rPr>
-              <a:t>06</a:t>
-            </a:r>
-          </a:p>
-        </p:txBody>
-      </p:sp>
-      <p:sp>
-        <p:nvSpPr>
-          <p:cNvPr id="17" name="Rounded Rectangle 16"/>
-          <p:cNvSpPr/>
-          <p:nvPr/>
-        </p:nvSpPr>
-        <p:spPr>
-          <a:xfrm>
-            <a:off x="2148840" y="5577840"/>
-            <a:ext cx="8961120" cy="658368"/>
-          </a:xfrm>
-          <a:prstGeom prst="roundRect">
-            <a:avLst>
-              <a:gd name="adj" fmla="val 12000"/>
-            </a:avLst>
-          </a:prstGeom>
-          <a:solidFill>
-            <a:srgbClr val="F2F4F8"/>
-          </a:solidFill>
-          <a:ln w="15240">
-            <a:solidFill>
-              <a:srgbClr val="D9E2F3"/>
-            </a:solidFill>
-          </a:ln>
-          <a:effectLst/>
-        </p:spPr>
-        <p:style>
-          <a:lnRef idx="1">
-            <a:schemeClr val="accent1"/>
-          </a:lnRef>
-          <a:fillRef idx="3">
-            <a:schemeClr val="accent1"/>
-          </a:fillRef>
-          <a:effectRef idx="2">
-            <a:schemeClr val="accent1"/>
-          </a:effectRef>
-          <a:fontRef idx="minor">
-            <a:schemeClr val="lt1"/>
-          </a:fontRef>
-        </p:style>
-        <p:txBody>
-          <a:bodyPr rtlCol="0" anchor="ctr" wrap="square" lIns="38100" rIns="38100" tIns="25400" bIns="25400"/>
-          <a:lstStyle/>
-          <a:p>
-            <a:pPr algn="l">
-              <a:spcAft>
-                <a:spcPts val="200"/>
-              </a:spcAft>
-            </a:pPr>
-            <a:r>
-              <a:rPr sz="1800" b="1" i="0">
-                <a:solidFill>
-                  <a:srgbClr val="1F3864"/>
-                </a:solidFill>
-                <a:latin typeface="微软雅黑"/>
-                <a:ea typeface="微软雅黑"/>
-              </a:rPr>
-              <a:t>踩坑与计划  </a:t>
-            </a:r>
-            <a:r>
-              <a:rPr sz="1400" b="0" i="0">
-                <a:solidFill>
-                  <a:srgbClr val="595959"/>
-                </a:solidFill>
-                <a:latin typeface="微软雅黑"/>
-                <a:ea typeface="微软雅黑"/>
-              </a:rPr>
-              <a:t>典型 bug 复盘 · 台架验证路线 · Q&amp;A</a:t>
+              <a:t>状态机 · 多级安全链 · 三环协同 · 通信协议</a:t>
             </a:r>
           </a:p>
         </p:txBody>
@@ -20680,7 +20163,7 @@
                 <a:latin typeface="微软雅黑"/>
                 <a:ea typeface="微软雅黑"/>
               </a:rPr>
-              <a:t>模块③ Mahony 互补滤波</a:t>
+              <a:t>姿态解算原理</a:t>
             </a:r>
             <a:r>
               <a:rPr sz="1400" b="0" i="0">
@@ -20690,7 +20173,7 @@
                 <a:latin typeface="微软雅黑"/>
                 <a:ea typeface="微软雅黑"/>
               </a:rPr>
-              <a:t>   陀螺管快,加计管准</a:t>
+              <a:t>   两条观测途径 + 三种数学表示</a:t>
             </a:r>
           </a:p>
         </p:txBody>
@@ -20731,6 +20214,882 @@
                 <a:ea typeface="微软雅黑"/>
               </a:rPr>
               <a:t>07</a:t>
+            </a:r>
+          </a:p>
+        </p:txBody>
+      </p:sp>
+      <p:sp>
+        <p:nvSpPr>
+          <p:cNvPr id="5" name="Rectangle 4"/>
+          <p:cNvSpPr/>
+          <p:nvPr/>
+        </p:nvSpPr>
+        <p:spPr>
+          <a:xfrm>
+            <a:off x="0" y="868680"/>
+            <a:ext cx="12191695" cy="41148"/>
+          </a:xfrm>
+          <a:prstGeom prst="rect">
+            <a:avLst/>
+          </a:prstGeom>
+          <a:solidFill>
+            <a:srgbClr val="ED7D31"/>
+          </a:solidFill>
+          <a:ln>
+            <a:noFill/>
+          </a:ln>
+          <a:effectLst/>
+        </p:spPr>
+        <p:style>
+          <a:lnRef idx="1">
+            <a:schemeClr val="accent1"/>
+          </a:lnRef>
+          <a:fillRef idx="3">
+            <a:schemeClr val="accent1"/>
+          </a:fillRef>
+          <a:effectRef idx="2">
+            <a:schemeClr val="accent1"/>
+          </a:effectRef>
+          <a:fontRef idx="minor">
+            <a:schemeClr val="lt1"/>
+          </a:fontRef>
+        </p:style>
+        <p:txBody>
+          <a:bodyPr rtlCol="0" anchor="ctr"/>
+          <a:lstStyle/>
+          <a:p>
+            <a:pPr algn="ctr"/>
+          </a:p>
+        </p:txBody>
+      </p:sp>
+      <p:sp>
+        <p:nvSpPr>
+          <p:cNvPr id="6" name="TextBox 5"/>
+          <p:cNvSpPr txBox="1"/>
+          <p:nvPr/>
+        </p:nvSpPr>
+        <p:spPr>
+          <a:xfrm>
+            <a:off x="502920" y="1143000"/>
+            <a:ext cx="5760720" cy="5212080"/>
+          </a:xfrm>
+          <a:prstGeom prst="rect">
+            <a:avLst/>
+          </a:prstGeom>
+          <a:noFill/>
+        </p:spPr>
+        <p:txBody>
+          <a:bodyPr wrap="square" anchor="t" lIns="25400" rIns="25400" tIns="12700" bIns="12700">
+            <a:spAutoFit/>
+          </a:bodyPr>
+          <a:lstStyle/>
+          <a:p>
+            <a:pPr algn="l">
+              <a:spcAft>
+                <a:spcPts val="400"/>
+              </a:spcAft>
+            </a:pPr>
+            <a:r>
+              <a:rPr sz="1600" b="1" i="0">
+                <a:solidFill>
+                  <a:srgbClr val="1F3864"/>
+                </a:solidFill>
+                <a:latin typeface="微软雅黑"/>
+                <a:ea typeface="微软雅黑"/>
+              </a:rPr>
+              <a:t>为什么要'解算'?</a:t>
+            </a:r>
+          </a:p>
+          <a:p>
+            <a:pPr algn="l">
+              <a:spcAft>
+                <a:spcPts val="400"/>
+              </a:spcAft>
+            </a:pPr>
+            <a:r>
+              <a:rPr sz="1400" b="0" i="0">
+                <a:solidFill>
+                  <a:srgbClr val="595959"/>
+                </a:solidFill>
+                <a:latin typeface="微软雅黑"/>
+                <a:ea typeface="微软雅黑"/>
+              </a:rPr>
+              <a:t>▸ IMU 不直接给姿态:陀螺输出角速度,加计输出比力</a:t>
+            </a:r>
+          </a:p>
+          <a:p>
+            <a:pPr algn="l">
+              <a:spcAft>
+                <a:spcPts val="400"/>
+              </a:spcAft>
+            </a:pPr>
+            <a:r>
+              <a:rPr sz="1400" b="0" i="0">
+                <a:solidFill>
+                  <a:srgbClr val="595959"/>
+                </a:solidFill>
+                <a:latin typeface="微软雅黑"/>
+                <a:ea typeface="微软雅黑"/>
+              </a:rPr>
+              <a:t>▸ 姿态是隐藏状态,必须由算法估计出来</a:t>
+            </a:r>
+          </a:p>
+          <a:p>
+            <a:pPr algn="l">
+              <a:spcAft>
+                <a:spcPts val="400"/>
+              </a:spcAft>
+            </a:pPr>
+            <a:r>
+              <a:rPr sz="600" b="0" i="0">
+                <a:solidFill>
+                  <a:srgbClr val="595959"/>
+                </a:solidFill>
+                <a:latin typeface="微软雅黑"/>
+                <a:ea typeface="微软雅黑"/>
+              </a:rPr>
+              <a:t/>
+            </a:r>
+          </a:p>
+          <a:p>
+            <a:pPr algn="l">
+              <a:spcAft>
+                <a:spcPts val="400"/>
+              </a:spcAft>
+            </a:pPr>
+            <a:r>
+              <a:rPr sz="1500" b="1" i="0">
+                <a:solidFill>
+                  <a:srgbClr val="2E75B6"/>
+                </a:solidFill>
+                <a:latin typeface="微软雅黑"/>
+                <a:ea typeface="微软雅黑"/>
+              </a:rPr>
+              <a:t>途径一:陀螺积分(高频好,会漂移)</a:t>
+            </a:r>
+          </a:p>
+          <a:p>
+            <a:pPr algn="l">
+              <a:spcAft>
+                <a:spcPts val="400"/>
+              </a:spcAft>
+            </a:pPr>
+            <a:r>
+              <a:rPr sz="1500" b="1" i="0">
+                <a:solidFill>
+                  <a:srgbClr val="2E75B6"/>
+                </a:solidFill>
+                <a:latin typeface="微软雅黑"/>
+                <a:ea typeface="微软雅黑"/>
+              </a:rPr>
+              <a:t>   q̇ = ½ q ⊗ ω   →   q ← q + q̇·dt</a:t>
+            </a:r>
+          </a:p>
+          <a:p>
+            <a:pPr algn="l">
+              <a:spcAft>
+                <a:spcPts val="400"/>
+              </a:spcAft>
+            </a:pPr>
+            <a:r>
+              <a:rPr sz="1350" b="0" i="0">
+                <a:solidFill>
+                  <a:srgbClr val="595959"/>
+                </a:solidFill>
+                <a:latin typeface="微软雅黑"/>
+                <a:ea typeface="微软雅黑"/>
+              </a:rPr>
+              <a:t>▸ 零偏 1°/s 不校准 → 姿态每分钟漂 60°</a:t>
+            </a:r>
+          </a:p>
+          <a:p>
+            <a:pPr algn="l">
+              <a:spcAft>
+                <a:spcPts val="400"/>
+              </a:spcAft>
+            </a:pPr>
+            <a:r>
+              <a:rPr sz="600" b="0" i="0">
+                <a:solidFill>
+                  <a:srgbClr val="595959"/>
+                </a:solidFill>
+                <a:latin typeface="微软雅黑"/>
+                <a:ea typeface="微软雅黑"/>
+              </a:rPr>
+              <a:t/>
+            </a:r>
+          </a:p>
+          <a:p>
+            <a:pPr algn="l">
+              <a:spcAft>
+                <a:spcPts val="400"/>
+              </a:spcAft>
+            </a:pPr>
+            <a:r>
+              <a:rPr sz="1500" b="1" i="0">
+                <a:solidFill>
+                  <a:srgbClr val="2E7D32"/>
+                </a:solidFill>
+                <a:latin typeface="微软雅黑"/>
+                <a:ea typeface="微软雅黑"/>
+              </a:rPr>
+              <a:t>途径二:加计测重力(低频准,动态脏)</a:t>
+            </a:r>
+          </a:p>
+          <a:p>
+            <a:pPr algn="l">
+              <a:spcAft>
+                <a:spcPts val="400"/>
+              </a:spcAft>
+            </a:pPr>
+            <a:r>
+              <a:rPr sz="1450" b="1" i="0">
+                <a:solidFill>
+                  <a:srgbClr val="2E7D32"/>
+                </a:solidFill>
+                <a:latin typeface="微软雅黑"/>
+                <a:ea typeface="微软雅黑"/>
+              </a:rPr>
+              <a:t>   roll = atan2(ay, az)</a:t>
+            </a:r>
+          </a:p>
+          <a:p>
+            <a:pPr algn="l">
+              <a:spcAft>
+                <a:spcPts val="400"/>
+              </a:spcAft>
+            </a:pPr>
+            <a:r>
+              <a:rPr sz="1450" b="1" i="0">
+                <a:solidFill>
+                  <a:srgbClr val="2E7D32"/>
+                </a:solidFill>
+                <a:latin typeface="微软雅黑"/>
+                <a:ea typeface="微软雅黑"/>
+              </a:rPr>
+              <a:t>   pitch = atan2(−ax, √(ay²+az²))</a:t>
+            </a:r>
+          </a:p>
+          <a:p>
+            <a:pPr algn="l">
+              <a:spcAft>
+                <a:spcPts val="400"/>
+              </a:spcAft>
+            </a:pPr>
+            <a:r>
+              <a:rPr sz="1350" b="0" i="0">
+                <a:solidFill>
+                  <a:srgbClr val="595959"/>
+                </a:solidFill>
+                <a:latin typeface="微软雅黑"/>
+                <a:ea typeface="微软雅黑"/>
+              </a:rPr>
+              <a:t>▸ 静止时即真实倾角;一动就被运动加速度污染</a:t>
+            </a:r>
+          </a:p>
+          <a:p>
+            <a:pPr algn="l">
+              <a:spcAft>
+                <a:spcPts val="400"/>
+              </a:spcAft>
+            </a:pPr>
+            <a:r>
+              <a:rPr sz="600" b="0" i="0">
+                <a:solidFill>
+                  <a:srgbClr val="595959"/>
+                </a:solidFill>
+                <a:latin typeface="微软雅黑"/>
+                <a:ea typeface="微软雅黑"/>
+              </a:rPr>
+              <a:t/>
+            </a:r>
+          </a:p>
+          <a:p>
+            <a:pPr algn="l">
+              <a:spcAft>
+                <a:spcPts val="400"/>
+              </a:spcAft>
+            </a:pPr>
+            <a:r>
+              <a:rPr sz="1500" b="1" i="0">
+                <a:solidFill>
+                  <a:srgbClr val="1F3864"/>
+                </a:solidFill>
+                <a:latin typeface="微软雅黑"/>
+                <a:ea typeface="微软雅黑"/>
+              </a:rPr>
+              <a:t>→ 各取所长做融合,就是姿态解算的出发点</a:t>
+            </a:r>
+          </a:p>
+        </p:txBody>
+      </p:sp>
+      <p:graphicFrame>
+        <p:nvGraphicFramePr>
+          <p:cNvPr id="7" name="Table 6"/>
+          <p:cNvGraphicFramePr>
+            <a:graphicFrameLocks noGrp="1"/>
+          </p:cNvGraphicFramePr>
+          <p:nvPr/>
+        </p:nvGraphicFramePr>
+        <p:xfrm>
+          <a:off x="6492240" y="1234440"/>
+          <a:ext cx="5303520" cy="3108960"/>
+        </p:xfrm>
+        <a:graphic>
+          <a:graphicData uri="http://schemas.openxmlformats.org/drawingml/2006/table">
+            <a:tbl>
+              <a:tblPr firstRow="1" bandRow="1">
+                <a:tableStyleId>{5C22544A-7EE6-4342-B048-85BDC9FD1C3A}</a:tableStyleId>
+              </a:tblPr>
+              <a:tblGrid>
+                <a:gridCol w="1188720"/>
+                <a:gridCol w="640080"/>
+                <a:gridCol w="3474720"/>
+              </a:tblGrid>
+              <a:tr h="777240">
+                <a:tc>
+                  <a:txBody>
+                    <a:bodyPr wrap="square"/>
+                    <a:lstStyle/>
+                    <a:p>
+                      <a:pPr algn="l"/>
+                      <a:r>
+                        <a:rPr sz="1250" b="1" i="0">
+                          <a:solidFill>
+                            <a:srgbClr val="FFFFFF"/>
+                          </a:solidFill>
+                          <a:latin typeface="微软雅黑"/>
+                          <a:ea typeface="微软雅黑"/>
+                        </a:rPr>
+                        <a:t>表示方法</a:t>
+                      </a:r>
+                    </a:p>
+                  </a:txBody>
+                  <a:tcPr marL="50800" marR="50800" marT="12700" marB="12700" anchor="ctr">
+                    <a:solidFill>
+                      <a:srgbClr val="1F3864"/>
+                    </a:solidFill>
+                  </a:tcPr>
+                </a:tc>
+                <a:tc>
+                  <a:txBody>
+                    <a:bodyPr wrap="square"/>
+                    <a:lstStyle/>
+                    <a:p>
+                      <a:pPr algn="ctr"/>
+                      <a:r>
+                        <a:rPr sz="1250" b="1" i="0">
+                          <a:solidFill>
+                            <a:srgbClr val="FFFFFF"/>
+                          </a:solidFill>
+                          <a:latin typeface="微软雅黑"/>
+                          <a:ea typeface="微软雅黑"/>
+                        </a:rPr>
+                        <a:t>参数</a:t>
+                      </a:r>
+                    </a:p>
+                  </a:txBody>
+                  <a:tcPr marL="50800" marR="50800" marT="12700" marB="12700" anchor="ctr">
+                    <a:solidFill>
+                      <a:srgbClr val="1F3864"/>
+                    </a:solidFill>
+                  </a:tcPr>
+                </a:tc>
+                <a:tc>
+                  <a:txBody>
+                    <a:bodyPr wrap="square"/>
+                    <a:lstStyle/>
+                    <a:p>
+                      <a:pPr algn="ctr"/>
+                      <a:r>
+                        <a:rPr sz="1250" b="1" i="0">
+                          <a:solidFill>
+                            <a:srgbClr val="FFFFFF"/>
+                          </a:solidFill>
+                          <a:latin typeface="微软雅黑"/>
+                          <a:ea typeface="微软雅黑"/>
+                        </a:rPr>
+                        <a:t>优 / 劣</a:t>
+                      </a:r>
+                    </a:p>
+                  </a:txBody>
+                  <a:tcPr marL="50800" marR="50800" marT="12700" marB="12700" anchor="ctr">
+                    <a:solidFill>
+                      <a:srgbClr val="1F3864"/>
+                    </a:solidFill>
+                  </a:tcPr>
+                </a:tc>
+              </a:tr>
+              <a:tr h="777240">
+                <a:tc>
+                  <a:txBody>
+                    <a:bodyPr wrap="square"/>
+                    <a:lstStyle/>
+                    <a:p>
+                      <a:pPr algn="l"/>
+                      <a:r>
+                        <a:rPr sz="1250" b="0" i="0">
+                          <a:solidFill>
+                            <a:srgbClr val="595959"/>
+                          </a:solidFill>
+                          <a:latin typeface="微软雅黑"/>
+                          <a:ea typeface="微软雅黑"/>
+                        </a:rPr>
+                        <a:t>欧拉角</a:t>
+                      </a:r>
+                    </a:p>
+                  </a:txBody>
+                  <a:tcPr marL="50800" marR="50800" marT="12700" marB="12700" anchor="ctr">
+                    <a:solidFill>
+                      <a:srgbClr val="FFFFFF"/>
+                    </a:solidFill>
+                  </a:tcPr>
+                </a:tc>
+                <a:tc>
+                  <a:txBody>
+                    <a:bodyPr wrap="square"/>
+                    <a:lstStyle/>
+                    <a:p>
+                      <a:pPr algn="ctr"/>
+                      <a:r>
+                        <a:rPr sz="1250" b="0" i="0">
+                          <a:solidFill>
+                            <a:srgbClr val="595959"/>
+                          </a:solidFill>
+                          <a:latin typeface="微软雅黑"/>
+                          <a:ea typeface="微软雅黑"/>
+                        </a:rPr>
+                        <a:t>3</a:t>
+                      </a:r>
+                    </a:p>
+                  </a:txBody>
+                  <a:tcPr marL="50800" marR="50800" marT="12700" marB="12700" anchor="ctr">
+                    <a:solidFill>
+                      <a:srgbClr val="FFFFFF"/>
+                    </a:solidFill>
+                  </a:tcPr>
+                </a:tc>
+                <a:tc>
+                  <a:txBody>
+                    <a:bodyPr wrap="square"/>
+                    <a:lstStyle/>
+                    <a:p>
+                      <a:pPr algn="ctr"/>
+                      <a:r>
+                        <a:rPr sz="1250" b="0" i="0">
+                          <a:solidFill>
+                            <a:srgbClr val="595959"/>
+                          </a:solidFill>
+                          <a:latin typeface="微软雅黑"/>
+                          <a:ea typeface="微软雅黑"/>
+                        </a:rPr>
+                        <a:t>直观;有万向节锁(pitch=±90°时 roll/yaw 同轴,丢失一个自由度)</a:t>
+                      </a:r>
+                    </a:p>
+                  </a:txBody>
+                  <a:tcPr marL="50800" marR="50800" marT="12700" marB="12700" anchor="ctr">
+                    <a:solidFill>
+                      <a:srgbClr val="FFFFFF"/>
+                    </a:solidFill>
+                  </a:tcPr>
+                </a:tc>
+              </a:tr>
+              <a:tr h="777240">
+                <a:tc>
+                  <a:txBody>
+                    <a:bodyPr wrap="square"/>
+                    <a:lstStyle/>
+                    <a:p>
+                      <a:pPr algn="l"/>
+                      <a:r>
+                        <a:rPr sz="1250" b="0" i="0">
+                          <a:solidFill>
+                            <a:srgbClr val="595959"/>
+                          </a:solidFill>
+                          <a:latin typeface="微软雅黑"/>
+                          <a:ea typeface="微软雅黑"/>
+                        </a:rPr>
+                        <a:t>旋转矩阵</a:t>
+                      </a:r>
+                    </a:p>
+                  </a:txBody>
+                  <a:tcPr marL="50800" marR="50800" marT="12700" marB="12700" anchor="ctr">
+                    <a:solidFill>
+                      <a:srgbClr val="F2F4F8"/>
+                    </a:solidFill>
+                  </a:tcPr>
+                </a:tc>
+                <a:tc>
+                  <a:txBody>
+                    <a:bodyPr wrap="square"/>
+                    <a:lstStyle/>
+                    <a:p>
+                      <a:pPr algn="ctr"/>
+                      <a:r>
+                        <a:rPr sz="1250" b="0" i="0">
+                          <a:solidFill>
+                            <a:srgbClr val="595959"/>
+                          </a:solidFill>
+                          <a:latin typeface="微软雅黑"/>
+                          <a:ea typeface="微软雅黑"/>
+                        </a:rPr>
+                        <a:t>9</a:t>
+                      </a:r>
+                    </a:p>
+                  </a:txBody>
+                  <a:tcPr marL="50800" marR="50800" marT="12700" marB="12700" anchor="ctr">
+                    <a:solidFill>
+                      <a:srgbClr val="F2F4F8"/>
+                    </a:solidFill>
+                  </a:tcPr>
+                </a:tc>
+                <a:tc>
+                  <a:txBody>
+                    <a:bodyPr wrap="square"/>
+                    <a:lstStyle/>
+                    <a:p>
+                      <a:pPr algn="ctr"/>
+                      <a:r>
+                        <a:rPr sz="1250" b="0" i="0">
+                          <a:solidFill>
+                            <a:srgbClr val="595959"/>
+                          </a:solidFill>
+                          <a:latin typeface="微软雅黑"/>
+                          <a:ea typeface="微软雅黑"/>
+                        </a:rPr>
+                        <a:t>无奇异;参数冗余,运算量大</a:t>
+                      </a:r>
+                    </a:p>
+                  </a:txBody>
+                  <a:tcPr marL="50800" marR="50800" marT="12700" marB="12700" anchor="ctr">
+                    <a:solidFill>
+                      <a:srgbClr val="F2F4F8"/>
+                    </a:solidFill>
+                  </a:tcPr>
+                </a:tc>
+              </a:tr>
+              <a:tr h="777240">
+                <a:tc>
+                  <a:txBody>
+                    <a:bodyPr wrap="square"/>
+                    <a:lstStyle/>
+                    <a:p>
+                      <a:pPr algn="l"/>
+                      <a:r>
+                        <a:rPr sz="1250" b="0" i="0">
+                          <a:solidFill>
+                            <a:srgbClr val="595959"/>
+                          </a:solidFill>
+                          <a:latin typeface="微软雅黑"/>
+                          <a:ea typeface="微软雅黑"/>
+                        </a:rPr>
+                        <a:t>四元数</a:t>
+                      </a:r>
+                    </a:p>
+                  </a:txBody>
+                  <a:tcPr marL="50800" marR="50800" marT="12700" marB="12700" anchor="ctr">
+                    <a:solidFill>
+                      <a:srgbClr val="FFFFFF"/>
+                    </a:solidFill>
+                  </a:tcPr>
+                </a:tc>
+                <a:tc>
+                  <a:txBody>
+                    <a:bodyPr wrap="square"/>
+                    <a:lstStyle/>
+                    <a:p>
+                      <a:pPr algn="ctr"/>
+                      <a:r>
+                        <a:rPr sz="1250" b="0" i="0">
+                          <a:solidFill>
+                            <a:srgbClr val="595959"/>
+                          </a:solidFill>
+                          <a:latin typeface="微软雅黑"/>
+                          <a:ea typeface="微软雅黑"/>
+                        </a:rPr>
+                        <a:t>4</a:t>
+                      </a:r>
+                    </a:p>
+                  </a:txBody>
+                  <a:tcPr marL="50800" marR="50800" marT="12700" marB="12700" anchor="ctr">
+                    <a:solidFill>
+                      <a:srgbClr val="FFFFFF"/>
+                    </a:solidFill>
+                  </a:tcPr>
+                </a:tc>
+                <a:tc>
+                  <a:txBody>
+                    <a:bodyPr wrap="square"/>
+                    <a:lstStyle/>
+                    <a:p>
+                      <a:pPr algn="ctr"/>
+                      <a:r>
+                        <a:rPr sz="1250" b="0" i="0">
+                          <a:solidFill>
+                            <a:srgbClr val="595959"/>
+                          </a:solidFill>
+                          <a:latin typeface="微软雅黑"/>
+                          <a:ea typeface="微软雅黑"/>
+                        </a:rPr>
+                        <a:t>无奇异;只有乘加运算,FPU 友好</a:t>
+                      </a:r>
+                    </a:p>
+                  </a:txBody>
+                  <a:tcPr marL="50800" marR="50800" marT="12700" marB="12700" anchor="ctr">
+                    <a:solidFill>
+                      <a:srgbClr val="FFFFFF"/>
+                    </a:solidFill>
+                  </a:tcPr>
+                </a:tc>
+              </a:tr>
+            </a:tbl>
+          </a:graphicData>
+        </a:graphic>
+      </p:graphicFrame>
+      <p:sp>
+        <p:nvSpPr>
+          <p:cNvPr id="8" name="Rounded Rectangle 7"/>
+          <p:cNvSpPr/>
+          <p:nvPr/>
+        </p:nvSpPr>
+        <p:spPr>
+          <a:xfrm>
+            <a:off x="6492240" y="4572000"/>
+            <a:ext cx="5303520" cy="1554480"/>
+          </a:xfrm>
+          <a:prstGeom prst="roundRect">
+            <a:avLst>
+              <a:gd name="adj" fmla="val 12000"/>
+            </a:avLst>
+          </a:prstGeom>
+          <a:solidFill>
+            <a:srgbClr val="F2F4F8"/>
+          </a:solidFill>
+          <a:ln w="15240">
+            <a:solidFill>
+              <a:srgbClr val="2E75B6"/>
+            </a:solidFill>
+          </a:ln>
+          <a:effectLst/>
+        </p:spPr>
+        <p:style>
+          <a:lnRef idx="1">
+            <a:schemeClr val="accent1"/>
+          </a:lnRef>
+          <a:fillRef idx="3">
+            <a:schemeClr val="accent1"/>
+          </a:fillRef>
+          <a:effectRef idx="2">
+            <a:schemeClr val="accent1"/>
+          </a:effectRef>
+          <a:fontRef idx="minor">
+            <a:schemeClr val="lt1"/>
+          </a:fontRef>
+        </p:style>
+        <p:txBody>
+          <a:bodyPr rtlCol="0" anchor="t" wrap="square" lIns="38100" rIns="38100" tIns="25400" bIns="25400"/>
+          <a:lstStyle/>
+          <a:p>
+            <a:pPr algn="l">
+              <a:spcAft>
+                <a:spcPts val="200"/>
+              </a:spcAft>
+            </a:pPr>
+            <a:r>
+              <a:rPr sz="1450" b="1" i="0">
+                <a:solidFill>
+                  <a:srgbClr val="1F3864"/>
+                </a:solidFill>
+                <a:latin typeface="微软雅黑"/>
+                <a:ea typeface="微软雅黑"/>
+              </a:rPr>
+              <a:t>选型:四元数做内部状态</a:t>
+            </a:r>
+          </a:p>
+          <a:p>
+            <a:pPr algn="l">
+              <a:spcAft>
+                <a:spcPts val="200"/>
+              </a:spcAft>
+            </a:pPr>
+            <a:r>
+              <a:rPr sz="1300" b="0" i="0">
+                <a:solidFill>
+                  <a:srgbClr val="595959"/>
+                </a:solidFill>
+                <a:latin typeface="微软雅黑"/>
+                <a:ea typeface="微软雅黑"/>
+              </a:rPr>
+              <a:t>▸ 欧拉角只在人机接口两端转换</a:t>
+            </a:r>
+          </a:p>
+          <a:p>
+            <a:pPr algn="l">
+              <a:spcAft>
+                <a:spcPts val="200"/>
+              </a:spcAft>
+            </a:pPr>
+            <a:r>
+              <a:rPr sz="1300" b="0" i="0">
+                <a:solidFill>
+                  <a:srgbClr val="595959"/>
+                </a:solidFill>
+                <a:latin typeface="微软雅黑"/>
+                <a:ea typeface="微软雅黑"/>
+              </a:rPr>
+              <a:t>▸ 姿态误差用叉积(三维)表示,天然适配反馈</a:t>
+            </a:r>
+          </a:p>
+        </p:txBody>
+      </p:sp>
+    </p:spTree>
+  </p:cSld>
+  <p:clrMapOvr>
+    <a:masterClrMapping/>
+  </p:clrMapOvr>
+</p:sld>
+</file>
+
+<file path=ppt/slides/slide9.xml><?xml version="1.0" encoding="utf-8"?>
+<p:sld xmlns:a="http://schemas.openxmlformats.org/drawingml/2006/main" xmlns:p="http://schemas.openxmlformats.org/presentationml/2006/main" xmlns:r="http://schemas.openxmlformats.org/officeDocument/2006/relationships">
+  <p:cSld>
+    <p:spTree>
+      <p:nvGrpSpPr>
+        <p:cNvPr id="1" name=""/>
+        <p:cNvGrpSpPr/>
+        <p:nvPr/>
+      </p:nvGrpSpPr>
+      <p:grpSpPr/>
+      <p:sp>
+        <p:nvSpPr>
+          <p:cNvPr id="2" name="Rectangle 1"/>
+          <p:cNvSpPr/>
+          <p:nvPr/>
+        </p:nvSpPr>
+        <p:spPr>
+          <a:xfrm>
+            <a:off x="0" y="0"/>
+            <a:ext cx="12191695" cy="868680"/>
+          </a:xfrm>
+          <a:prstGeom prst="rect">
+            <a:avLst/>
+          </a:prstGeom>
+          <a:solidFill>
+            <a:srgbClr val="1F3864"/>
+          </a:solidFill>
+          <a:ln>
+            <a:noFill/>
+          </a:ln>
+          <a:effectLst/>
+        </p:spPr>
+        <p:style>
+          <a:lnRef idx="1">
+            <a:schemeClr val="accent1"/>
+          </a:lnRef>
+          <a:fillRef idx="3">
+            <a:schemeClr val="accent1"/>
+          </a:fillRef>
+          <a:effectRef idx="2">
+            <a:schemeClr val="accent1"/>
+          </a:effectRef>
+          <a:fontRef idx="minor">
+            <a:schemeClr val="lt1"/>
+          </a:fontRef>
+        </p:style>
+        <p:txBody>
+          <a:bodyPr rtlCol="0" anchor="ctr"/>
+          <a:lstStyle/>
+          <a:p>
+            <a:pPr algn="ctr"/>
+          </a:p>
+        </p:txBody>
+      </p:sp>
+      <p:sp>
+        <p:nvSpPr>
+          <p:cNvPr id="3" name="TextBox 2"/>
+          <p:cNvSpPr txBox="1"/>
+          <p:nvPr/>
+        </p:nvSpPr>
+        <p:spPr>
+          <a:xfrm>
+            <a:off x="502920" y="91440"/>
+            <a:ext cx="10241280" cy="731520"/>
+          </a:xfrm>
+          <a:prstGeom prst="rect">
+            <a:avLst/>
+          </a:prstGeom>
+          <a:noFill/>
+        </p:spPr>
+        <p:txBody>
+          <a:bodyPr wrap="square" anchor="ctr" lIns="25400" rIns="25400" tIns="12700" bIns="12700">
+            <a:spAutoFit/>
+          </a:bodyPr>
+          <a:lstStyle/>
+          <a:p>
+            <a:pPr algn="l">
+              <a:spcAft>
+                <a:spcPts val="400"/>
+              </a:spcAft>
+            </a:pPr>
+            <a:r>
+              <a:rPr sz="2600" b="1" i="0">
+                <a:solidFill>
+                  <a:srgbClr val="FFFFFF"/>
+                </a:solidFill>
+                <a:latin typeface="微软雅黑"/>
+                <a:ea typeface="微软雅黑"/>
+              </a:rPr>
+              <a:t>模块③ Mahony 互补滤波</a:t>
+            </a:r>
+            <a:r>
+              <a:rPr sz="1400" b="0" i="0">
+                <a:solidFill>
+                  <a:srgbClr val="BDD7EE"/>
+                </a:solidFill>
+                <a:latin typeface="微软雅黑"/>
+                <a:ea typeface="微软雅黑"/>
+              </a:rPr>
+              <a:t>   陀螺管快,加计管准</a:t>
+            </a:r>
+          </a:p>
+        </p:txBody>
+      </p:sp>
+      <p:sp>
+        <p:nvSpPr>
+          <p:cNvPr id="4" name="TextBox 3"/>
+          <p:cNvSpPr txBox="1"/>
+          <p:nvPr/>
+        </p:nvSpPr>
+        <p:spPr>
+          <a:xfrm>
+            <a:off x="11292840" y="6382512"/>
+            <a:ext cx="822960" cy="365760"/>
+          </a:xfrm>
+          <a:prstGeom prst="rect">
+            <a:avLst/>
+          </a:prstGeom>
+          <a:noFill/>
+        </p:spPr>
+        <p:txBody>
+          <a:bodyPr wrap="square" anchor="t" lIns="25400" rIns="25400" tIns="12700" bIns="12700">
+            <a:spAutoFit/>
+          </a:bodyPr>
+          <a:lstStyle/>
+          <a:p>
+            <a:pPr algn="r">
+              <a:spcAft>
+                <a:spcPts val="400"/>
+              </a:spcAft>
+            </a:pPr>
+            <a:r>
+              <a:rPr sz="1200" b="0" i="0">
+                <a:solidFill>
+                  <a:srgbClr val="FFFFFF"/>
+                </a:solidFill>
+                <a:latin typeface="微软雅黑"/>
+                <a:ea typeface="微软雅黑"/>
+              </a:rPr>
+              <a:t>08</a:t>
             </a:r>
           </a:p>
         </p:txBody>
@@ -20966,7 +21325,7 @@
                 <a:latin typeface="微软雅黑"/>
                 <a:ea typeface="微软雅黑"/>
               </a:rPr>
-              <a:t>为什么用四元数?</a:t>
+              <a:t>参数与收敛特性</a:t>
             </a:r>
           </a:p>
           <a:p>
@@ -20983,7 +21342,7 @@
                 <a:latin typeface="微软雅黑"/>
                 <a:ea typeface="微软雅黑"/>
               </a:rPr>
-              <a:t>▸ 欧拉角:万向节锁(pitch=90°时 roll/yaw 失效)</a:t>
+              <a:t>▸ Kp=0.5:加计权重,越大收敛越快但噪声越大</a:t>
             </a:r>
           </a:p>
           <a:p>
@@ -21000,7 +21359,7 @@
                 <a:latin typeface="微软雅黑"/>
                 <a:ea typeface="微软雅黑"/>
               </a:rPr>
-              <a:t>▸ 四元数:4 参数无奇异,只有乘加,FPU 友好</a:t>
+              <a:t>▸ Ki=0.05:积分反馈,消除陀螺残余零偏</a:t>
             </a:r>
           </a:p>
           <a:p>
@@ -21017,7 +21376,7 @@
                 <a:latin typeface="微软雅黑"/>
                 <a:ea typeface="微软雅黑"/>
               </a:rPr>
-              <a:t>▸ 姿态误差用叉积表示 → 天然适配 PI 反馈</a:t>
+              <a:t>▸ 定步长 dt=2ms(500Hz),数值稳定</a:t>
             </a:r>
           </a:p>
           <a:p>
@@ -21034,7 +21393,7 @@
                 <a:latin typeface="微软雅黑"/>
                 <a:ea typeface="微软雅黑"/>
               </a:rPr>
-              <a:t>▸ 参数:Kp=0.5(收敛速度) Ki=0.05(消恒偏差)</a:t>
+              <a:t>▸ 静止时任一初始姿态,数秒内对准重力</a:t>
             </a:r>
           </a:p>
         </p:txBody>
@@ -21936,734 +22295,6 @@
                 <a:ea typeface="微软雅黑"/>
               </a:rPr>
               <a:t>→ 无磁力计,yaw 缓慢漂移(只控角速度,不做航向角闭环)</a:t>
-            </a:r>
-          </a:p>
-        </p:txBody>
-      </p:sp>
-    </p:spTree>
-  </p:cSld>
-  <p:clrMapOvr>
-    <a:masterClrMapping/>
-  </p:clrMapOvr>
-</p:sld>
-</file>
-
-<file path=ppt/slides/slide9.xml><?xml version="1.0" encoding="utf-8"?>
-<p:sld xmlns:a="http://schemas.openxmlformats.org/drawingml/2006/main" xmlns:p="http://schemas.openxmlformats.org/presentationml/2006/main" xmlns:r="http://schemas.openxmlformats.org/officeDocument/2006/relationships">
-  <p:cSld>
-    <p:spTree>
-      <p:nvGrpSpPr>
-        <p:cNvPr id="1" name=""/>
-        <p:cNvGrpSpPr/>
-        <p:nvPr/>
-      </p:nvGrpSpPr>
-      <p:grpSpPr/>
-      <p:sp>
-        <p:nvSpPr>
-          <p:cNvPr id="2" name="Rectangle 1"/>
-          <p:cNvSpPr/>
-          <p:nvPr/>
-        </p:nvSpPr>
-        <p:spPr>
-          <a:xfrm>
-            <a:off x="0" y="0"/>
-            <a:ext cx="12191695" cy="868680"/>
-          </a:xfrm>
-          <a:prstGeom prst="rect">
-            <a:avLst/>
-          </a:prstGeom>
-          <a:solidFill>
-            <a:srgbClr val="1F3864"/>
-          </a:solidFill>
-          <a:ln>
-            <a:noFill/>
-          </a:ln>
-          <a:effectLst/>
-        </p:spPr>
-        <p:style>
-          <a:lnRef idx="1">
-            <a:schemeClr val="accent1"/>
-          </a:lnRef>
-          <a:fillRef idx="3">
-            <a:schemeClr val="accent1"/>
-          </a:fillRef>
-          <a:effectRef idx="2">
-            <a:schemeClr val="accent1"/>
-          </a:effectRef>
-          <a:fontRef idx="minor">
-            <a:schemeClr val="lt1"/>
-          </a:fontRef>
-        </p:style>
-        <p:txBody>
-          <a:bodyPr rtlCol="0" anchor="ctr"/>
-          <a:lstStyle/>
-          <a:p>
-            <a:pPr algn="ctr"/>
-          </a:p>
-        </p:txBody>
-      </p:sp>
-      <p:sp>
-        <p:nvSpPr>
-          <p:cNvPr id="3" name="TextBox 2"/>
-          <p:cNvSpPr txBox="1"/>
-          <p:nvPr/>
-        </p:nvSpPr>
-        <p:spPr>
-          <a:xfrm>
-            <a:off x="502920" y="91440"/>
-            <a:ext cx="10241280" cy="731520"/>
-          </a:xfrm>
-          <a:prstGeom prst="rect">
-            <a:avLst/>
-          </a:prstGeom>
-          <a:noFill/>
-        </p:spPr>
-        <p:txBody>
-          <a:bodyPr wrap="square" anchor="ctr" lIns="25400" rIns="25400" tIns="12700" bIns="12700">
-            <a:spAutoFit/>
-          </a:bodyPr>
-          <a:lstStyle/>
-          <a:p>
-            <a:pPr algn="l">
-              <a:spcAft>
-                <a:spcPts val="400"/>
-              </a:spcAft>
-            </a:pPr>
-            <a:r>
-              <a:rPr sz="2600" b="1" i="0">
-                <a:solidFill>
-                  <a:srgbClr val="FFFFFF"/>
-                </a:solidFill>
-                <a:latin typeface="微软雅黑"/>
-                <a:ea typeface="微软雅黑"/>
-              </a:rPr>
-              <a:t>模块④ 垂直加速度 az</a:t>
-            </a:r>
-            <a:r>
-              <a:rPr sz="1400" b="0" i="0">
-                <a:solidFill>
-                  <a:srgbClr val="BDD7EE"/>
-                </a:solidFill>
-                <a:latin typeface="微软雅黑"/>
-                <a:ea typeface="微软雅黑"/>
-              </a:rPr>
-              <a:t>   旋转矩阵去重力</a:t>
-            </a:r>
-          </a:p>
-        </p:txBody>
-      </p:sp>
-      <p:sp>
-        <p:nvSpPr>
-          <p:cNvPr id="4" name="TextBox 3"/>
-          <p:cNvSpPr txBox="1"/>
-          <p:nvPr/>
-        </p:nvSpPr>
-        <p:spPr>
-          <a:xfrm>
-            <a:off x="11292840" y="6382512"/>
-            <a:ext cx="822960" cy="365760"/>
-          </a:xfrm>
-          <a:prstGeom prst="rect">
-            <a:avLst/>
-          </a:prstGeom>
-          <a:noFill/>
-        </p:spPr>
-        <p:txBody>
-          <a:bodyPr wrap="square" anchor="t" lIns="25400" rIns="25400" tIns="12700" bIns="12700">
-            <a:spAutoFit/>
-          </a:bodyPr>
-          <a:lstStyle/>
-          <a:p>
-            <a:pPr algn="r">
-              <a:spcAft>
-                <a:spcPts val="400"/>
-              </a:spcAft>
-            </a:pPr>
-            <a:r>
-              <a:rPr sz="1200" b="0" i="0">
-                <a:solidFill>
-                  <a:srgbClr val="FFFFFF"/>
-                </a:solidFill>
-                <a:latin typeface="微软雅黑"/>
-                <a:ea typeface="微软雅黑"/>
-              </a:rPr>
-              <a:t>08</a:t>
-            </a:r>
-          </a:p>
-        </p:txBody>
-      </p:sp>
-      <p:sp>
-        <p:nvSpPr>
-          <p:cNvPr id="5" name="Rectangle 4"/>
-          <p:cNvSpPr/>
-          <p:nvPr/>
-        </p:nvSpPr>
-        <p:spPr>
-          <a:xfrm>
-            <a:off x="0" y="868680"/>
-            <a:ext cx="12191695" cy="41148"/>
-          </a:xfrm>
-          <a:prstGeom prst="rect">
-            <a:avLst/>
-          </a:prstGeom>
-          <a:solidFill>
-            <a:srgbClr val="ED7D31"/>
-          </a:solidFill>
-          <a:ln>
-            <a:noFill/>
-          </a:ln>
-          <a:effectLst/>
-        </p:spPr>
-        <p:style>
-          <a:lnRef idx="1">
-            <a:schemeClr val="accent1"/>
-          </a:lnRef>
-          <a:fillRef idx="3">
-            <a:schemeClr val="accent1"/>
-          </a:fillRef>
-          <a:effectRef idx="2">
-            <a:schemeClr val="accent1"/>
-          </a:effectRef>
-          <a:fontRef idx="minor">
-            <a:schemeClr val="lt1"/>
-          </a:fontRef>
-        </p:style>
-        <p:txBody>
-          <a:bodyPr rtlCol="0" anchor="ctr"/>
-          <a:lstStyle/>
-          <a:p>
-            <a:pPr algn="ctr"/>
-          </a:p>
-        </p:txBody>
-      </p:sp>
-      <p:sp>
-        <p:nvSpPr>
-          <p:cNvPr id="6" name="Rounded Rectangle 5"/>
-          <p:cNvSpPr/>
-          <p:nvPr/>
-        </p:nvSpPr>
-        <p:spPr>
-          <a:xfrm>
-            <a:off x="502920" y="1188720"/>
-            <a:ext cx="5577840" cy="2651760"/>
-          </a:xfrm>
-          <a:prstGeom prst="roundRect">
-            <a:avLst>
-              <a:gd name="adj" fmla="val 12000"/>
-            </a:avLst>
-          </a:prstGeom>
-          <a:solidFill>
-            <a:srgbClr val="F2F4F8"/>
-          </a:solidFill>
-          <a:ln w="15240">
-            <a:solidFill>
-              <a:srgbClr val="2E75B6"/>
-            </a:solidFill>
-          </a:ln>
-          <a:effectLst/>
-        </p:spPr>
-        <p:style>
-          <a:lnRef idx="1">
-            <a:schemeClr val="accent1"/>
-          </a:lnRef>
-          <a:fillRef idx="3">
-            <a:schemeClr val="accent1"/>
-          </a:fillRef>
-          <a:effectRef idx="2">
-            <a:schemeClr val="accent1"/>
-          </a:effectRef>
-          <a:fontRef idx="minor">
-            <a:schemeClr val="lt1"/>
-          </a:fontRef>
-        </p:style>
-        <p:txBody>
-          <a:bodyPr rtlCol="0" anchor="ctr" wrap="square" lIns="38100" rIns="38100" tIns="25400" bIns="25400"/>
-          <a:lstStyle/>
-          <a:p>
-            <a:pPr algn="ctr">
-              <a:spcAft>
-                <a:spcPts val="200"/>
-              </a:spcAft>
-            </a:pPr>
-            <a:r>
-              <a:rPr sz="1800" b="1" i="0">
-                <a:solidFill>
-                  <a:srgbClr val="2E75B6"/>
-                </a:solidFill>
-                <a:latin typeface="微软雅黑"/>
-                <a:ea typeface="微软雅黑"/>
-              </a:rPr>
-              <a:t>a_world = R(q) · a_body</a:t>
-            </a:r>
-          </a:p>
-          <a:p>
-            <a:pPr algn="ctr">
-              <a:spcAft>
-                <a:spcPts val="200"/>
-              </a:spcAft>
-            </a:pPr>
-            <a:r>
-              <a:rPr sz="600" b="0" i="0">
-                <a:solidFill>
-                  <a:srgbClr val="595959"/>
-                </a:solidFill>
-                <a:latin typeface="微软雅黑"/>
-                <a:ea typeface="微软雅黑"/>
-              </a:rPr>
-              <a:t/>
-            </a:r>
-          </a:p>
-          <a:p>
-            <a:pPr algn="ctr">
-              <a:spcAft>
-                <a:spcPts val="200"/>
-              </a:spcAft>
-            </a:pPr>
-            <a:r>
-              <a:rPr sz="1400" b="0" i="0">
-                <a:solidFill>
-                  <a:srgbClr val="595959"/>
-                </a:solidFill>
-                <a:latin typeface="微软雅黑"/>
-                <a:ea typeface="微软雅黑"/>
-              </a:rPr>
-              <a:t>取世界系 z 分量(R 第三行):</a:t>
-            </a:r>
-          </a:p>
-          <a:p>
-            <a:pPr algn="ctr">
-              <a:spcAft>
-                <a:spcPts val="200"/>
-              </a:spcAft>
-            </a:pPr>
-            <a:r>
-              <a:rPr sz="1400" b="1" i="0">
-                <a:solidFill>
-                  <a:srgbClr val="595959"/>
-                </a:solidFill>
-                <a:latin typeface="微软雅黑"/>
-                <a:ea typeface="微软雅黑"/>
-              </a:rPr>
-              <a:t>az = 2(q1q3−q0q2)·ax + 2(q2q3+q0q1)·ay</a:t>
-            </a:r>
-          </a:p>
-          <a:p>
-            <a:pPr algn="ctr">
-              <a:spcAft>
-                <a:spcPts val="200"/>
-              </a:spcAft>
-            </a:pPr>
-            <a:r>
-              <a:rPr sz="1400" b="1" i="0">
-                <a:solidFill>
-                  <a:srgbClr val="595959"/>
-                </a:solidFill>
-                <a:latin typeface="微软雅黑"/>
-                <a:ea typeface="微软雅黑"/>
-              </a:rPr>
-              <a:t>     + (q0²−q1²−q2²+q3²)·az − g</a:t>
-            </a:r>
-          </a:p>
-          <a:p>
-            <a:pPr algn="ctr">
-              <a:spcAft>
-                <a:spcPts val="200"/>
-              </a:spcAft>
-            </a:pPr>
-            <a:r>
-              <a:rPr sz="600" b="0" i="0">
-                <a:solidFill>
-                  <a:srgbClr val="595959"/>
-                </a:solidFill>
-                <a:latin typeface="微软雅黑"/>
-                <a:ea typeface="微软雅黑"/>
-              </a:rPr>
-              <a:t/>
-            </a:r>
-          </a:p>
-          <a:p>
-            <a:pPr algn="ctr">
-              <a:spcAft>
-                <a:spcPts val="200"/>
-              </a:spcAft>
-            </a:pPr>
-            <a:r>
-              <a:rPr sz="1400" b="1" i="0">
-                <a:solidFill>
-                  <a:srgbClr val="1F3864"/>
-                </a:solidFill>
-                <a:latin typeface="微软雅黑"/>
-                <a:ea typeface="微软雅黑"/>
-              </a:rPr>
-              <a:t>物理含义:扣除重力后的净垂直加速度</a:t>
-            </a:r>
-          </a:p>
-        </p:txBody>
-      </p:sp>
-      <p:sp>
-        <p:nvSpPr>
-          <p:cNvPr id="7" name="TextBox 6"/>
-          <p:cNvSpPr txBox="1"/>
-          <p:nvPr/>
-        </p:nvSpPr>
-        <p:spPr>
-          <a:xfrm>
-            <a:off x="502920" y="4114800"/>
-            <a:ext cx="5577840" cy="2194560"/>
-          </a:xfrm>
-          <a:prstGeom prst="rect">
-            <a:avLst/>
-          </a:prstGeom>
-          <a:noFill/>
-        </p:spPr>
-        <p:txBody>
-          <a:bodyPr wrap="square" anchor="t" lIns="25400" rIns="25400" tIns="12700" bIns="12700">
-            <a:spAutoFit/>
-          </a:bodyPr>
-          <a:lstStyle/>
-          <a:p>
-            <a:pPr algn="l">
-              <a:spcAft>
-                <a:spcPts val="400"/>
-              </a:spcAft>
-            </a:pPr>
-            <a:r>
-              <a:rPr sz="1600" b="1" i="0">
-                <a:solidFill>
-                  <a:srgbClr val="1F3864"/>
-                </a:solidFill>
-                <a:latin typeface="微软雅黑"/>
-                <a:ea typeface="微软雅黑"/>
-              </a:rPr>
-              <a:t>为什么需要它?</a:t>
-            </a:r>
-          </a:p>
-          <a:p>
-            <a:pPr algn="l">
-              <a:spcAft>
-                <a:spcPts val="400"/>
-              </a:spcAft>
-            </a:pPr>
-            <a:r>
-              <a:rPr sz="1400" b="0" i="0">
-                <a:solidFill>
-                  <a:srgbClr val="595959"/>
-                </a:solidFill>
-                <a:latin typeface="微软雅黑"/>
-                <a:ea typeface="微软雅黑"/>
-              </a:rPr>
-              <a:t>▸ 没有气压计/高度计 → 无法直接定高</a:t>
-            </a:r>
-          </a:p>
-          <a:p>
-            <a:pPr algn="l">
-              <a:spcAft>
-                <a:spcPts val="400"/>
-              </a:spcAft>
-            </a:pPr>
-            <a:r>
-              <a:rPr sz="1400" b="0" i="0">
-                <a:solidFill>
-                  <a:srgbClr val="595959"/>
-                </a:solidFill>
-                <a:latin typeface="微软雅黑"/>
-                <a:ea typeface="微软雅黑"/>
-              </a:rPr>
-              <a:t>▸ 但'悬停'的物理条件是 az = 0(升力=重力)</a:t>
-            </a:r>
-          </a:p>
-          <a:p>
-            <a:pPr algn="l">
-              <a:spcAft>
-                <a:spcPts val="400"/>
-              </a:spcAft>
-            </a:pPr>
-            <a:r>
-              <a:rPr sz="1400" b="0" i="0">
-                <a:solidFill>
-                  <a:srgbClr val="595959"/>
-                </a:solidFill>
-                <a:latin typeface="微软雅黑"/>
-                <a:ea typeface="微软雅黑"/>
-              </a:rPr>
-              <a:t>▸ 用加速度信号闭环逼近悬停,不积分不漂移</a:t>
-            </a:r>
-          </a:p>
-        </p:txBody>
-      </p:sp>
-      <p:sp>
-        <p:nvSpPr>
-          <p:cNvPr id="8" name="Rounded Rectangle 7"/>
-          <p:cNvSpPr/>
-          <p:nvPr/>
-        </p:nvSpPr>
-        <p:spPr>
-          <a:xfrm>
-            <a:off x="6492240" y="1188720"/>
-            <a:ext cx="5303520" cy="2377440"/>
-          </a:xfrm>
-          <a:prstGeom prst="roundRect">
-            <a:avLst>
-              <a:gd name="adj" fmla="val 12000"/>
-            </a:avLst>
-          </a:prstGeom>
-          <a:solidFill>
-            <a:srgbClr val="F2F4F8"/>
-          </a:solidFill>
-          <a:ln w="15240">
-            <a:solidFill>
-              <a:srgbClr val="2E75B6"/>
-            </a:solidFill>
-          </a:ln>
-          <a:effectLst/>
-        </p:spPr>
-        <p:style>
-          <a:lnRef idx="1">
-            <a:schemeClr val="accent1"/>
-          </a:lnRef>
-          <a:fillRef idx="3">
-            <a:schemeClr val="accent1"/>
-          </a:fillRef>
-          <a:effectRef idx="2">
-            <a:schemeClr val="accent1"/>
-          </a:effectRef>
-          <a:fontRef idx="minor">
-            <a:schemeClr val="lt1"/>
-          </a:fontRef>
-        </p:style>
-        <p:txBody>
-          <a:bodyPr rtlCol="0" anchor="t" wrap="square" lIns="38100" rIns="38100" tIns="25400" bIns="25400"/>
-          <a:lstStyle/>
-          <a:p>
-            <a:pPr algn="l">
-              <a:spcAft>
-                <a:spcPts val="200"/>
-              </a:spcAft>
-            </a:pPr>
-            <a:r>
-              <a:rPr sz="1500" b="1" i="0">
-                <a:solidFill>
-                  <a:srgbClr val="1F3864"/>
-                </a:solidFill>
-                <a:latin typeface="微软雅黑"/>
-                <a:ea typeface="微软雅黑"/>
-              </a:rPr>
-              <a:t>精度依赖姿态精度</a:t>
-            </a:r>
-          </a:p>
-          <a:p>
-            <a:pPr algn="l">
-              <a:spcAft>
-                <a:spcPts val="200"/>
-              </a:spcAft>
-            </a:pPr>
-            <a:r>
-              <a:rPr sz="1350" b="0" i="0">
-                <a:solidFill>
-                  <a:srgbClr val="595959"/>
-                </a:solidFill>
-                <a:latin typeface="微软雅黑"/>
-                <a:ea typeface="微软雅黑"/>
-              </a:rPr>
-              <a:t>▸ 姿态误差 θ → az 误差 ≈ g·θ²/2(二阶小量)</a:t>
-            </a:r>
-          </a:p>
-          <a:p>
-            <a:pPr algn="l">
-              <a:spcAft>
-                <a:spcPts val="200"/>
-              </a:spcAft>
-            </a:pPr>
-            <a:r>
-              <a:rPr sz="1350" b="0" i="0">
-                <a:solidFill>
-                  <a:srgbClr val="595959"/>
-                </a:solidFill>
-                <a:latin typeface="微软雅黑"/>
-                <a:ea typeface="微软雅黑"/>
-              </a:rPr>
-              <a:t>▸ 小角度下安全;大倾角需姿态准</a:t>
-            </a:r>
-          </a:p>
-          <a:p>
-            <a:pPr algn="l">
-              <a:spcAft>
-                <a:spcPts val="200"/>
-              </a:spcAft>
-            </a:pPr>
-            <a:r>
-              <a:rPr sz="1350" b="0" i="0">
-                <a:solidFill>
-                  <a:srgbClr val="ED7D31"/>
-                </a:solidFill>
-                <a:latin typeface="微软雅黑"/>
-                <a:ea typeface="微软雅黑"/>
-              </a:rPr>
-              <a:t>▸ 曾发现系数符号写反(转置矩阵)</a:t>
-            </a:r>
-          </a:p>
-          <a:p>
-            <a:pPr algn="l">
-              <a:spcAft>
-                <a:spcPts val="200"/>
-              </a:spcAft>
-            </a:pPr>
-            <a:r>
-              <a:rPr sz="1350" b="0" i="0">
-                <a:solidFill>
-                  <a:srgbClr val="2E7D32"/>
-                </a:solidFill>
-                <a:latin typeface="微软雅黑"/>
-                <a:ea typeface="微软雅黑"/>
-              </a:rPr>
-              <a:t>   → 已修复并加回归用例</a:t>
-            </a:r>
-          </a:p>
-        </p:txBody>
-      </p:sp>
-      <p:sp>
-        <p:nvSpPr>
-          <p:cNvPr id="9" name="Rounded Rectangle 8"/>
-          <p:cNvSpPr/>
-          <p:nvPr/>
-        </p:nvSpPr>
-        <p:spPr>
-          <a:xfrm>
-            <a:off x="6492240" y="3840480"/>
-            <a:ext cx="5303520" cy="2560320"/>
-          </a:xfrm>
-          <a:prstGeom prst="roundRect">
-            <a:avLst>
-              <a:gd name="adj" fmla="val 12000"/>
-            </a:avLst>
-          </a:prstGeom>
-          <a:solidFill>
-            <a:srgbClr val="F2F4F8"/>
-          </a:solidFill>
-          <a:ln w="15240">
-            <a:solidFill>
-              <a:srgbClr val="2E75B6"/>
-            </a:solidFill>
-          </a:ln>
-          <a:effectLst/>
-        </p:spPr>
-        <p:style>
-          <a:lnRef idx="1">
-            <a:schemeClr val="accent1"/>
-          </a:lnRef>
-          <a:fillRef idx="3">
-            <a:schemeClr val="accent1"/>
-          </a:fillRef>
-          <a:effectRef idx="2">
-            <a:schemeClr val="accent1"/>
-          </a:effectRef>
-          <a:fontRef idx="minor">
-            <a:schemeClr val="lt1"/>
-          </a:fontRef>
-        </p:style>
-        <p:txBody>
-          <a:bodyPr rtlCol="0" anchor="t" wrap="square" lIns="38100" rIns="38100" tIns="25400" bIns="25400"/>
-          <a:lstStyle/>
-          <a:p>
-            <a:pPr algn="l">
-              <a:spcAft>
-                <a:spcPts val="200"/>
-              </a:spcAft>
-            </a:pPr>
-            <a:r>
-              <a:rPr sz="1500" b="1" i="0">
-                <a:solidFill>
-                  <a:srgbClr val="1F3864"/>
-                </a:solidFill>
-                <a:latin typeface="微软雅黑"/>
-                <a:ea typeface="微软雅黑"/>
-              </a:rPr>
-              <a:t>az 环怎么用(预告)</a:t>
-            </a:r>
-          </a:p>
-          <a:p>
-            <a:pPr algn="l">
-              <a:spcAft>
-                <a:spcPts val="200"/>
-              </a:spcAft>
-            </a:pPr>
-            <a:r>
-              <a:rPr sz="1400" b="1" i="0">
-                <a:solidFill>
-                  <a:srgbClr val="2E75B6"/>
-                </a:solidFill>
-                <a:latin typeface="微软雅黑"/>
-                <a:ea typeface="微软雅黑"/>
-              </a:rPr>
-              <a:t>悬停态:throttle −= az × 0.0002 (每 5ms)</a:t>
-            </a:r>
-          </a:p>
-          <a:p>
-            <a:pPr algn="l">
-              <a:spcAft>
-                <a:spcPts val="200"/>
-              </a:spcAft>
-            </a:pPr>
-            <a:r>
-              <a:rPr sz="1350" b="0" i="0">
-                <a:solidFill>
-                  <a:srgbClr val="595959"/>
-                </a:solidFill>
-                <a:latin typeface="微软雅黑"/>
-                <a:ea typeface="微软雅黑"/>
-              </a:rPr>
-              <a:t>az&gt;0 在升 → 收油门;az&lt;0 在掉 → 加油门</a:t>
-            </a:r>
-          </a:p>
-          <a:p>
-            <a:pPr algn="l">
-              <a:spcAft>
-                <a:spcPts val="200"/>
-              </a:spcAft>
-            </a:pPr>
-            <a:r>
-              <a:rPr sz="1350" b="0" i="0">
-                <a:solidFill>
-                  <a:srgbClr val="595959"/>
-                </a:solidFill>
-                <a:latin typeface="微软雅黑"/>
-                <a:ea typeface="微软雅黑"/>
-              </a:rPr>
-              <a:t>收敛到 az≈0,即'加速度意义下的悬停'</a:t>
-            </a:r>
-          </a:p>
-          <a:p>
-            <a:pPr algn="l">
-              <a:spcAft>
-                <a:spcPts val="200"/>
-              </a:spcAft>
-            </a:pPr>
-            <a:r>
-              <a:rPr sz="600" b="0" i="0">
-                <a:solidFill>
-                  <a:srgbClr val="595959"/>
-                </a:solidFill>
-                <a:latin typeface="微软雅黑"/>
-                <a:ea typeface="微软雅黑"/>
-              </a:rPr>
-              <a:t/>
-            </a:r>
-          </a:p>
-          <a:p>
-            <a:pPr algn="l">
-              <a:spcAft>
-                <a:spcPts val="200"/>
-              </a:spcAft>
-            </a:pPr>
-            <a:r>
-              <a:rPr sz="1250" b="0" i="0">
-                <a:solidFill>
-                  <a:srgbClr val="ED7D31"/>
-                </a:solidFill>
-                <a:latin typeface="微软雅黑"/>
-                <a:ea typeface="微软雅黑"/>
-              </a:rPr>
-              <a:t>局限:速度不为零时'托住'的是当前运动趋势</a:t>
             </a:r>
           </a:p>
         </p:txBody>
